--- a/Modeule 2 - Code Apps with Github Copilot.pptx
+++ b/Modeule 2 - Code Apps with Github Copilot.pptx
@@ -6,23 +6,28 @@
     <p:sldMasterId id="2147483680" r:id="rId2"/>
     <p:sldMasterId id="2147483684" r:id="rId3"/>
     <p:sldMasterId id="2147483687" r:id="rId4"/>
+    <p:sldMasterId id="2147483691" r:id="rId5"/>
   </p:sldMasterIdLst>
   <p:notesMasterIdLst>
-    <p:notesMasterId r:id="rId17"/>
+    <p:notesMasterId r:id="rId22"/>
   </p:notesMasterIdLst>
   <p:sldIdLst>
-    <p:sldId id="2147479557" r:id="rId5"/>
-    <p:sldId id="263" r:id="rId6"/>
-    <p:sldId id="264" r:id="rId7"/>
-    <p:sldId id="2147479588" r:id="rId8"/>
-    <p:sldId id="2147479589" r:id="rId9"/>
-    <p:sldId id="2147479590" r:id="rId10"/>
-    <p:sldId id="258" r:id="rId11"/>
-    <p:sldId id="259" r:id="rId12"/>
-    <p:sldId id="2147479591" r:id="rId13"/>
-    <p:sldId id="260" r:id="rId14"/>
-    <p:sldId id="2147479598" r:id="rId15"/>
-    <p:sldId id="2142533481" r:id="rId16"/>
+    <p:sldId id="2147479557" r:id="rId6"/>
+    <p:sldId id="263" r:id="rId7"/>
+    <p:sldId id="264" r:id="rId8"/>
+    <p:sldId id="2147479588" r:id="rId9"/>
+    <p:sldId id="2147479589" r:id="rId10"/>
+    <p:sldId id="2147479590" r:id="rId11"/>
+    <p:sldId id="258" r:id="rId12"/>
+    <p:sldId id="259" r:id="rId13"/>
+    <p:sldId id="2147479591" r:id="rId14"/>
+    <p:sldId id="260" r:id="rId15"/>
+    <p:sldId id="2147479598" r:id="rId16"/>
+    <p:sldId id="2147479599" r:id="rId17"/>
+    <p:sldId id="2147479600" r:id="rId18"/>
+    <p:sldId id="2147479601" r:id="rId19"/>
+    <p:sldId id="261" r:id="rId20"/>
+    <p:sldId id="2142533481" r:id="rId21"/>
   </p:sldIdLst>
   <p:sldSz cx="12192000" cy="6858000"/>
   <p:notesSz cx="6858000" cy="9144000"/>
@@ -125,6 +130,9 @@
     <p:ext uri="{EFAFB233-063F-42B5-8137-9DF3F51BA10A}">
       <p15:sldGuideLst xmlns:p15="http://schemas.microsoft.com/office/powerpoint/2012/main"/>
     </p:ext>
+    <p:ext uri="{2D200454-40CA-4A62-9FC3-DE9A4176ACB9}">
+      <p15:notesGuideLst xmlns:p15="http://schemas.microsoft.com/office/powerpoint/2012/main"/>
+    </p:ext>
   </p:extLst>
 </p:presentation>
 </file>
@@ -132,8 +140,7 @@
 <file path=ppt/revisionInfo.xml><?xml version="1.0" encoding="utf-8"?>
 <p1510:revInfo xmlns:a="http://schemas.openxmlformats.org/drawingml/2006/main" xmlns:r="http://schemas.openxmlformats.org/officeDocument/2006/relationships" xmlns:p1510="http://schemas.microsoft.com/office/powerpoint/2015/10/main">
   <p1510:revLst>
-    <p1510:client id="{9DF06EC0-6773-4754-B5CF-3A86373E55DF}" v="92" dt="2026-10-22T17:12:19.706"/>
-    <p1510:client id="{F58680DD-FFF5-4D2B-B065-F48D10CC8C0D}" v="9" dt="2026-10-22T21:19:29.857"/>
+    <p1510:client id="{F58680DD-FFF5-4D2B-B065-F48D10CC8C0D}" v="14" dt="2026-10-27T18:17:51.256"/>
   </p1510:revLst>
 </p1510:revInfo>
 </file>
@@ -153,14 +160,6 @@
           <pc:docMk/>
           <pc:sldMk cId="0" sldId="256"/>
         </pc:sldMkLst>
-        <pc:spChg chg="mod">
-          <ac:chgData name="Jenkins NS" userId="8bdba4d2-1367-40cf-ad35-f59b31261896" providerId="ADAL" clId="{9DF06EC0-6773-4754-B5CF-3A86373E55DF}" dt="2026-10-21T19:26:48.705" v="5" actId="6549"/>
-          <ac:spMkLst>
-            <pc:docMk/>
-            <pc:sldMk cId="0" sldId="256"/>
-            <ac:spMk id="2" creationId="{00000000-0000-0000-0000-000000000000}"/>
-          </ac:spMkLst>
-        </pc:spChg>
       </pc:sldChg>
       <pc:sldChg chg="modSp add mod">
         <pc:chgData name="Jenkins NS" userId="8bdba4d2-1367-40cf-ad35-f59b31261896" providerId="ADAL" clId="{9DF06EC0-6773-4754-B5CF-3A86373E55DF}" dt="2026-10-21T19:44:54.496" v="293" actId="123"/>
@@ -168,14 +167,6 @@
           <pc:docMk/>
           <pc:sldMk cId="0" sldId="257"/>
         </pc:sldMkLst>
-        <pc:spChg chg="mod">
-          <ac:chgData name="Jenkins NS" userId="8bdba4d2-1367-40cf-ad35-f59b31261896" providerId="ADAL" clId="{9DF06EC0-6773-4754-B5CF-3A86373E55DF}" dt="2026-10-21T19:44:54.496" v="293" actId="123"/>
-          <ac:spMkLst>
-            <pc:docMk/>
-            <pc:sldMk cId="0" sldId="257"/>
-            <ac:spMk id="5" creationId="{00000000-0000-0000-0000-000000000000}"/>
-          </ac:spMkLst>
-        </pc:spChg>
       </pc:sldChg>
       <pc:sldChg chg="add">
         <pc:chgData name="Jenkins NS" userId="8bdba4d2-1367-40cf-ad35-f59b31261896" providerId="ADAL" clId="{9DF06EC0-6773-4754-B5CF-3A86373E55DF}" dt="2026-10-21T19:44:09.197" v="292"/>
@@ -218,22 +209,6 @@
           <pc:docMk/>
           <pc:sldMk cId="0" sldId="263"/>
         </pc:sldMkLst>
-        <pc:spChg chg="del">
-          <ac:chgData name="Jenkins NS" userId="8bdba4d2-1367-40cf-ad35-f59b31261896" providerId="ADAL" clId="{9DF06EC0-6773-4754-B5CF-3A86373E55DF}" dt="2026-10-21T20:11:04.574" v="353" actId="478"/>
-          <ac:spMkLst>
-            <pc:docMk/>
-            <pc:sldMk cId="0" sldId="263"/>
-            <ac:spMk id="16" creationId="{00000000-0000-0000-0000-000000000000}"/>
-          </ac:spMkLst>
-        </pc:spChg>
-        <pc:spChg chg="del mod">
-          <ac:chgData name="Jenkins NS" userId="8bdba4d2-1367-40cf-ad35-f59b31261896" providerId="ADAL" clId="{9DF06EC0-6773-4754-B5CF-3A86373E55DF}" dt="2026-10-21T20:11:07.284" v="355" actId="478"/>
-          <ac:spMkLst>
-            <pc:docMk/>
-            <pc:sldMk cId="0" sldId="263"/>
-            <ac:spMk id="17" creationId="{00000000-0000-0000-0000-000000000000}"/>
-          </ac:spMkLst>
-        </pc:spChg>
       </pc:sldChg>
       <pc:sldChg chg="delSp modSp add del mod setBg">
         <pc:chgData name="Jenkins NS" userId="8bdba4d2-1367-40cf-ad35-f59b31261896" providerId="ADAL" clId="{9DF06EC0-6773-4754-B5CF-3A86373E55DF}" dt="2026-10-21T20:11:34.235" v="359"/>
@@ -241,22 +216,6 @@
           <pc:docMk/>
           <pc:sldMk cId="0" sldId="264"/>
         </pc:sldMkLst>
-        <pc:spChg chg="del mod">
-          <ac:chgData name="Jenkins NS" userId="8bdba4d2-1367-40cf-ad35-f59b31261896" providerId="ADAL" clId="{9DF06EC0-6773-4754-B5CF-3A86373E55DF}" dt="2026-10-21T20:11:23.009" v="357" actId="478"/>
-          <ac:spMkLst>
-            <pc:docMk/>
-            <pc:sldMk cId="0" sldId="264"/>
-            <ac:spMk id="12" creationId="{00000000-0000-0000-0000-000000000000}"/>
-          </ac:spMkLst>
-        </pc:spChg>
-        <pc:spChg chg="del">
-          <ac:chgData name="Jenkins NS" userId="8bdba4d2-1367-40cf-ad35-f59b31261896" providerId="ADAL" clId="{9DF06EC0-6773-4754-B5CF-3A86373E55DF}" dt="2026-10-21T20:11:25.804" v="358" actId="478"/>
-          <ac:spMkLst>
-            <pc:docMk/>
-            <pc:sldMk cId="0" sldId="264"/>
-            <ac:spMk id="13" creationId="{00000000-0000-0000-0000-000000000000}"/>
-          </ac:spMkLst>
-        </pc:spChg>
       </pc:sldChg>
       <pc:sldChg chg="add del setBg">
         <pc:chgData name="Jenkins NS" userId="8bdba4d2-1367-40cf-ad35-f59b31261896" providerId="ADAL" clId="{9DF06EC0-6773-4754-B5CF-3A86373E55DF}" dt="2026-10-21T22:16:56.748" v="401"/>
@@ -271,22 +230,6 @@
           <pc:docMk/>
           <pc:sldMk cId="101198574" sldId="1611"/>
         </pc:sldMkLst>
-        <pc:picChg chg="mod">
-          <ac:chgData name="Jenkins NS" userId="8bdba4d2-1367-40cf-ad35-f59b31261896" providerId="ADAL" clId="{9DF06EC0-6773-4754-B5CF-3A86373E55DF}" dt="2026-10-21T19:43:22.468" v="290" actId="1076"/>
-          <ac:picMkLst>
-            <pc:docMk/>
-            <pc:sldMk cId="101198574" sldId="1611"/>
-            <ac:picMk id="22" creationId="{6AC8544B-45DF-A5F3-BBFD-2855810FA51C}"/>
-          </ac:picMkLst>
-        </pc:picChg>
-        <pc:picChg chg="del">
-          <ac:chgData name="Jenkins NS" userId="8bdba4d2-1367-40cf-ad35-f59b31261896" providerId="ADAL" clId="{9DF06EC0-6773-4754-B5CF-3A86373E55DF}" dt="2026-10-21T19:43:15.777" v="287" actId="478"/>
-          <ac:picMkLst>
-            <pc:docMk/>
-            <pc:sldMk cId="101198574" sldId="1611"/>
-            <ac:picMk id="23" creationId="{B3A8E0FB-0190-4ABD-8FD9-E2538AE80004}"/>
-          </ac:picMkLst>
-        </pc:picChg>
       </pc:sldChg>
       <pc:sldChg chg="add del">
         <pc:chgData name="Jenkins NS" userId="8bdba4d2-1367-40cf-ad35-f59b31261896" providerId="ADAL" clId="{9DF06EC0-6773-4754-B5CF-3A86373E55DF}" dt="2026-10-21T22:20:53.660" v="422"/>
@@ -315,14 +258,6 @@
           <pc:docMk/>
           <pc:sldMk cId="2010521932" sldId="2048"/>
         </pc:sldMkLst>
-        <pc:spChg chg="mod">
-          <ac:chgData name="Jenkins NS" userId="8bdba4d2-1367-40cf-ad35-f59b31261896" providerId="ADAL" clId="{9DF06EC0-6773-4754-B5CF-3A86373E55DF}" dt="2026-10-21T22:21:20.971" v="430" actId="20577"/>
-          <ac:spMkLst>
-            <pc:docMk/>
-            <pc:sldMk cId="2010521932" sldId="2048"/>
-            <ac:spMk id="2" creationId="{09619246-1C22-48B2-BAE7-A4B8164D5DF8}"/>
-          </ac:spMkLst>
-        </pc:spChg>
       </pc:sldChg>
       <pc:sldChg chg="del">
         <pc:chgData name="Jenkins NS" userId="8bdba4d2-1367-40cf-ad35-f59b31261896" providerId="ADAL" clId="{9DF06EC0-6773-4754-B5CF-3A86373E55DF}" dt="2026-10-21T19:24:49.810" v="0" actId="47"/>
@@ -365,14 +300,6 @@
           <pc:docMk/>
           <pc:sldMk cId="0" sldId="2142533482"/>
         </pc:sldMkLst>
-        <pc:spChg chg="mod">
-          <ac:chgData name="Jenkins NS" userId="8bdba4d2-1367-40cf-ad35-f59b31261896" providerId="ADAL" clId="{9DF06EC0-6773-4754-B5CF-3A86373E55DF}" dt="2026-10-21T19:27:40.114" v="38" actId="20577"/>
-          <ac:spMkLst>
-            <pc:docMk/>
-            <pc:sldMk cId="0" sldId="2142533482"/>
-            <ac:spMk id="2" creationId="{00000000-0000-0000-0000-000000000000}"/>
-          </ac:spMkLst>
-        </pc:spChg>
       </pc:sldChg>
       <pc:sldChg chg="addSp delSp modSp add mod">
         <pc:chgData name="Jenkins NS" userId="8bdba4d2-1367-40cf-ad35-f59b31261896" providerId="ADAL" clId="{9DF06EC0-6773-4754-B5CF-3A86373E55DF}" dt="2026-10-22T17:11:01.115" v="471" actId="20577"/>
@@ -380,22 +307,6 @@
           <pc:docMk/>
           <pc:sldMk cId="4060601304" sldId="2147479557"/>
         </pc:sldMkLst>
-        <pc:spChg chg="add del mod">
-          <ac:chgData name="Jenkins NS" userId="8bdba4d2-1367-40cf-ad35-f59b31261896" providerId="ADAL" clId="{9DF06EC0-6773-4754-B5CF-3A86373E55DF}" dt="2026-10-21T19:28:52.948" v="46" actId="478"/>
-          <ac:spMkLst>
-            <pc:docMk/>
-            <pc:sldMk cId="4060601304" sldId="2147479557"/>
-            <ac:spMk id="3" creationId="{A5827300-B0A8-F5BD-0DAD-B7489CFB926C}"/>
-          </ac:spMkLst>
-        </pc:spChg>
-        <pc:spChg chg="add del mod">
-          <ac:chgData name="Jenkins NS" userId="8bdba4d2-1367-40cf-ad35-f59b31261896" providerId="ADAL" clId="{9DF06EC0-6773-4754-B5CF-3A86373E55DF}" dt="2026-10-21T20:06:12.009" v="313" actId="478"/>
-          <ac:spMkLst>
-            <pc:docMk/>
-            <pc:sldMk cId="4060601304" sldId="2147479557"/>
-            <ac:spMk id="5" creationId="{5F89B307-F569-2CA2-6DC1-AB566E7411E0}"/>
-          </ac:spMkLst>
-        </pc:spChg>
         <pc:spChg chg="mod">
           <ac:chgData name="Jenkins NS" userId="8bdba4d2-1367-40cf-ad35-f59b31261896" providerId="ADAL" clId="{9DF06EC0-6773-4754-B5CF-3A86373E55DF}" dt="2026-10-22T17:11:01.115" v="471" actId="20577"/>
           <ac:spMkLst>
@@ -404,36 +315,12 @@
             <ac:spMk id="6" creationId="{A3E08FA2-C73F-A01D-C334-4FAC0DB0C177}"/>
           </ac:spMkLst>
         </pc:spChg>
-        <pc:spChg chg="del">
-          <ac:chgData name="Jenkins NS" userId="8bdba4d2-1367-40cf-ad35-f59b31261896" providerId="ADAL" clId="{9DF06EC0-6773-4754-B5CF-3A86373E55DF}" dt="2026-10-21T19:28:51.472" v="45" actId="478"/>
-          <ac:spMkLst>
-            <pc:docMk/>
-            <pc:sldMk cId="4060601304" sldId="2147479557"/>
-            <ac:spMk id="8" creationId="{7C4740F1-B816-6BEC-8362-3B8D251DFCEE}"/>
-          </ac:spMkLst>
-        </pc:spChg>
-        <pc:spChg chg="add del mod">
-          <ac:chgData name="Jenkins NS" userId="8bdba4d2-1367-40cf-ad35-f59b31261896" providerId="ADAL" clId="{9DF06EC0-6773-4754-B5CF-3A86373E55DF}" dt="2026-10-21T19:41:35.148" v="272" actId="478"/>
-          <ac:spMkLst>
-            <pc:docMk/>
-            <pc:sldMk cId="4060601304" sldId="2147479557"/>
-            <ac:spMk id="9" creationId="{0DD8651C-DB72-1BCD-9C0F-3DB573B15677}"/>
-          </ac:spMkLst>
-        </pc:spChg>
         <pc:spChg chg="add mod">
           <ac:chgData name="Jenkins NS" userId="8bdba4d2-1367-40cf-ad35-f59b31261896" providerId="ADAL" clId="{9DF06EC0-6773-4754-B5CF-3A86373E55DF}" dt="2026-10-21T20:07:12.837" v="328" actId="14100"/>
           <ac:spMkLst>
             <pc:docMk/>
             <pc:sldMk cId="4060601304" sldId="2147479557"/>
             <ac:spMk id="11" creationId="{14201019-6AD5-8165-776C-55816BE8B289}"/>
-          </ac:spMkLst>
-        </pc:spChg>
-        <pc:spChg chg="del">
-          <ac:chgData name="Jenkins NS" userId="8bdba4d2-1367-40cf-ad35-f59b31261896" providerId="ADAL" clId="{9DF06EC0-6773-4754-B5CF-3A86373E55DF}" dt="2026-10-21T19:28:50.222" v="44" actId="478"/>
-          <ac:spMkLst>
-            <pc:docMk/>
-            <pc:sldMk cId="4060601304" sldId="2147479557"/>
-            <ac:spMk id="12" creationId="{AA2BF8BC-EDED-61C2-562F-15FB955AD759}"/>
           </ac:spMkLst>
         </pc:spChg>
         <pc:spChg chg="add mod">
@@ -459,30 +346,6 @@
           <pc:docMk/>
           <pc:sldMk cId="1451565363" sldId="2147479572"/>
         </pc:sldMkLst>
-        <pc:spChg chg="mod">
-          <ac:chgData name="Jenkins NS" userId="8bdba4d2-1367-40cf-ad35-f59b31261896" providerId="ADAL" clId="{9DF06EC0-6773-4754-B5CF-3A86373E55DF}" dt="2026-10-21T19:43:29.848" v="291" actId="113"/>
-          <ac:spMkLst>
-            <pc:docMk/>
-            <pc:sldMk cId="1451565363" sldId="2147479572"/>
-            <ac:spMk id="2" creationId="{DF6D4226-15FB-8407-4AAF-26919D886337}"/>
-          </ac:spMkLst>
-        </pc:spChg>
-        <pc:spChg chg="mod">
-          <ac:chgData name="Jenkins NS" userId="8bdba4d2-1367-40cf-ad35-f59b31261896" providerId="ADAL" clId="{9DF06EC0-6773-4754-B5CF-3A86373E55DF}" dt="2026-10-21T19:29:50.148" v="55" actId="14100"/>
-          <ac:spMkLst>
-            <pc:docMk/>
-            <pc:sldMk cId="1451565363" sldId="2147479572"/>
-            <ac:spMk id="3" creationId="{EE7DBE02-710B-EABC-6AFC-4BC12CF16267}"/>
-          </ac:spMkLst>
-        </pc:spChg>
-        <pc:spChg chg="del">
-          <ac:chgData name="Jenkins NS" userId="8bdba4d2-1367-40cf-ad35-f59b31261896" providerId="ADAL" clId="{9DF06EC0-6773-4754-B5CF-3A86373E55DF}" dt="2026-10-21T19:29:53.068" v="56" actId="478"/>
-          <ac:spMkLst>
-            <pc:docMk/>
-            <pc:sldMk cId="1451565363" sldId="2147479572"/>
-            <ac:spMk id="4" creationId="{46147394-57D0-11C7-6AE6-6A34F2358945}"/>
-          </ac:spMkLst>
-        </pc:spChg>
       </pc:sldChg>
       <pc:sldChg chg="add del modNotesTx">
         <pc:chgData name="Jenkins NS" userId="8bdba4d2-1367-40cf-ad35-f59b31261896" providerId="ADAL" clId="{9DF06EC0-6773-4754-B5CF-3A86373E55DF}" dt="2026-10-21T19:57:56.902" v="308" actId="20577"/>
@@ -532,30 +395,6 @@
           <pc:docMk/>
           <pc:sldMk cId="0" sldId="2147479579"/>
         </pc:sldMkLst>
-        <pc:spChg chg="mod">
-          <ac:chgData name="Jenkins NS" userId="8bdba4d2-1367-40cf-ad35-f59b31261896" providerId="ADAL" clId="{9DF06EC0-6773-4754-B5CF-3A86373E55DF}" dt="2026-10-21T20:09:50.194" v="341" actId="6549"/>
-          <ac:spMkLst>
-            <pc:docMk/>
-            <pc:sldMk cId="0" sldId="2147479579"/>
-            <ac:spMk id="3" creationId="{00000000-0000-0000-0000-000000000000}"/>
-          </ac:spMkLst>
-        </pc:spChg>
-        <pc:spChg chg="mod">
-          <ac:chgData name="Jenkins NS" userId="8bdba4d2-1367-40cf-ad35-f59b31261896" providerId="ADAL" clId="{9DF06EC0-6773-4754-B5CF-3A86373E55DF}" dt="2026-10-21T20:12:56.506" v="377"/>
-          <ac:spMkLst>
-            <pc:docMk/>
-            <pc:sldMk cId="0" sldId="2147479579"/>
-            <ac:spMk id="5" creationId="{00000000-0000-0000-0000-000000000000}"/>
-          </ac:spMkLst>
-        </pc:spChg>
-        <pc:graphicFrameChg chg="add mod">
-          <ac:chgData name="Jenkins NS" userId="8bdba4d2-1367-40cf-ad35-f59b31261896" providerId="ADAL" clId="{9DF06EC0-6773-4754-B5CF-3A86373E55DF}" dt="2026-10-21T20:12:47.995" v="375"/>
-          <ac:graphicFrameMkLst>
-            <pc:docMk/>
-            <pc:sldMk cId="0" sldId="2147479579"/>
-            <ac:graphicFrameMk id="7" creationId="{C51EEEF9-BD86-2FDB-E51B-BC16406CA83D}"/>
-          </ac:graphicFrameMkLst>
-        </pc:graphicFrameChg>
       </pc:sldChg>
       <pc:sldChg chg="delSp add del mod setBg">
         <pc:chgData name="Jenkins NS" userId="8bdba4d2-1367-40cf-ad35-f59b31261896" providerId="ADAL" clId="{9DF06EC0-6773-4754-B5CF-3A86373E55DF}" dt="2026-10-21T20:10:06.987" v="342" actId="478"/>
@@ -563,14 +402,6 @@
           <pc:docMk/>
           <pc:sldMk cId="0" sldId="2147479580"/>
         </pc:sldMkLst>
-        <pc:spChg chg="del">
-          <ac:chgData name="Jenkins NS" userId="8bdba4d2-1367-40cf-ad35-f59b31261896" providerId="ADAL" clId="{9DF06EC0-6773-4754-B5CF-3A86373E55DF}" dt="2026-10-21T20:10:06.987" v="342" actId="478"/>
-          <ac:spMkLst>
-            <pc:docMk/>
-            <pc:sldMk cId="0" sldId="2147479580"/>
-            <ac:spMk id="16" creationId="{00000000-0000-0000-0000-000000000000}"/>
-          </ac:spMkLst>
-        </pc:spChg>
       </pc:sldChg>
       <pc:sldChg chg="delSp add del mod setBg">
         <pc:chgData name="Jenkins NS" userId="8bdba4d2-1367-40cf-ad35-f59b31261896" providerId="ADAL" clId="{9DF06EC0-6773-4754-B5CF-3A86373E55DF}" dt="2026-10-21T20:10:14.773" v="344" actId="478"/>
@@ -578,22 +409,6 @@
           <pc:docMk/>
           <pc:sldMk cId="0" sldId="2147479581"/>
         </pc:sldMkLst>
-        <pc:spChg chg="del">
-          <ac:chgData name="Jenkins NS" userId="8bdba4d2-1367-40cf-ad35-f59b31261896" providerId="ADAL" clId="{9DF06EC0-6773-4754-B5CF-3A86373E55DF}" dt="2026-10-21T20:10:11.863" v="343" actId="478"/>
-          <ac:spMkLst>
-            <pc:docMk/>
-            <pc:sldMk cId="0" sldId="2147479581"/>
-            <ac:spMk id="20" creationId="{00000000-0000-0000-0000-000000000000}"/>
-          </ac:spMkLst>
-        </pc:spChg>
-        <pc:spChg chg="del">
-          <ac:chgData name="Jenkins NS" userId="8bdba4d2-1367-40cf-ad35-f59b31261896" providerId="ADAL" clId="{9DF06EC0-6773-4754-B5CF-3A86373E55DF}" dt="2026-10-21T20:10:14.773" v="344" actId="478"/>
-          <ac:spMkLst>
-            <pc:docMk/>
-            <pc:sldMk cId="0" sldId="2147479581"/>
-            <ac:spMk id="21" creationId="{00000000-0000-0000-0000-000000000000}"/>
-          </ac:spMkLst>
-        </pc:spChg>
       </pc:sldChg>
       <pc:sldChg chg="delSp add del mod setBg">
         <pc:chgData name="Jenkins NS" userId="8bdba4d2-1367-40cf-ad35-f59b31261896" providerId="ADAL" clId="{9DF06EC0-6773-4754-B5CF-3A86373E55DF}" dt="2026-10-21T20:10:28.364" v="346" actId="478"/>
@@ -601,22 +416,6 @@
           <pc:docMk/>
           <pc:sldMk cId="0" sldId="2147479582"/>
         </pc:sldMkLst>
-        <pc:spChg chg="del">
-          <ac:chgData name="Jenkins NS" userId="8bdba4d2-1367-40cf-ad35-f59b31261896" providerId="ADAL" clId="{9DF06EC0-6773-4754-B5CF-3A86373E55DF}" dt="2026-10-21T20:10:25.654" v="345" actId="478"/>
-          <ac:spMkLst>
-            <pc:docMk/>
-            <pc:sldMk cId="0" sldId="2147479582"/>
-            <ac:spMk id="10" creationId="{00000000-0000-0000-0000-000000000000}"/>
-          </ac:spMkLst>
-        </pc:spChg>
-        <pc:spChg chg="del">
-          <ac:chgData name="Jenkins NS" userId="8bdba4d2-1367-40cf-ad35-f59b31261896" providerId="ADAL" clId="{9DF06EC0-6773-4754-B5CF-3A86373E55DF}" dt="2026-10-21T20:10:28.364" v="346" actId="478"/>
-          <ac:spMkLst>
-            <pc:docMk/>
-            <pc:sldMk cId="0" sldId="2147479582"/>
-            <ac:spMk id="11" creationId="{00000000-0000-0000-0000-000000000000}"/>
-          </ac:spMkLst>
-        </pc:spChg>
       </pc:sldChg>
       <pc:sldChg chg="delSp add del mod setBg">
         <pc:chgData name="Jenkins NS" userId="8bdba4d2-1367-40cf-ad35-f59b31261896" providerId="ADAL" clId="{9DF06EC0-6773-4754-B5CF-3A86373E55DF}" dt="2026-10-21T20:10:35.216" v="348" actId="478"/>
@@ -624,22 +423,6 @@
           <pc:docMk/>
           <pc:sldMk cId="0" sldId="2147479583"/>
         </pc:sldMkLst>
-        <pc:spChg chg="del">
-          <ac:chgData name="Jenkins NS" userId="8bdba4d2-1367-40cf-ad35-f59b31261896" providerId="ADAL" clId="{9DF06EC0-6773-4754-B5CF-3A86373E55DF}" dt="2026-10-21T20:10:32.632" v="347" actId="478"/>
-          <ac:spMkLst>
-            <pc:docMk/>
-            <pc:sldMk cId="0" sldId="2147479583"/>
-            <ac:spMk id="16" creationId="{00000000-0000-0000-0000-000000000000}"/>
-          </ac:spMkLst>
-        </pc:spChg>
-        <pc:spChg chg="del">
-          <ac:chgData name="Jenkins NS" userId="8bdba4d2-1367-40cf-ad35-f59b31261896" providerId="ADAL" clId="{9DF06EC0-6773-4754-B5CF-3A86373E55DF}" dt="2026-10-21T20:10:35.216" v="348" actId="478"/>
-          <ac:spMkLst>
-            <pc:docMk/>
-            <pc:sldMk cId="0" sldId="2147479583"/>
-            <ac:spMk id="17" creationId="{00000000-0000-0000-0000-000000000000}"/>
-          </ac:spMkLst>
-        </pc:spChg>
       </pc:sldChg>
       <pc:sldChg chg="delSp add del mod setBg">
         <pc:chgData name="Jenkins NS" userId="8bdba4d2-1367-40cf-ad35-f59b31261896" providerId="ADAL" clId="{9DF06EC0-6773-4754-B5CF-3A86373E55DF}" dt="2026-10-21T20:10:43.160" v="350" actId="478"/>
@@ -647,22 +430,6 @@
           <pc:docMk/>
           <pc:sldMk cId="0" sldId="2147479584"/>
         </pc:sldMkLst>
-        <pc:spChg chg="del">
-          <ac:chgData name="Jenkins NS" userId="8bdba4d2-1367-40cf-ad35-f59b31261896" providerId="ADAL" clId="{9DF06EC0-6773-4754-B5CF-3A86373E55DF}" dt="2026-10-21T20:10:40.385" v="349" actId="478"/>
-          <ac:spMkLst>
-            <pc:docMk/>
-            <pc:sldMk cId="0" sldId="2147479584"/>
-            <ac:spMk id="12" creationId="{00000000-0000-0000-0000-000000000000}"/>
-          </ac:spMkLst>
-        </pc:spChg>
-        <pc:spChg chg="del">
-          <ac:chgData name="Jenkins NS" userId="8bdba4d2-1367-40cf-ad35-f59b31261896" providerId="ADAL" clId="{9DF06EC0-6773-4754-B5CF-3A86373E55DF}" dt="2026-10-21T20:10:43.160" v="350" actId="478"/>
-          <ac:spMkLst>
-            <pc:docMk/>
-            <pc:sldMk cId="0" sldId="2147479584"/>
-            <ac:spMk id="13" creationId="{00000000-0000-0000-0000-000000000000}"/>
-          </ac:spMkLst>
-        </pc:spChg>
       </pc:sldChg>
       <pc:sldChg chg="delSp add del mod setBg">
         <pc:chgData name="Jenkins NS" userId="8bdba4d2-1367-40cf-ad35-f59b31261896" providerId="ADAL" clId="{9DF06EC0-6773-4754-B5CF-3A86373E55DF}" dt="2026-10-21T20:10:50.318" v="352" actId="478"/>
@@ -670,22 +437,6 @@
           <pc:docMk/>
           <pc:sldMk cId="0" sldId="2147479585"/>
         </pc:sldMkLst>
-        <pc:spChg chg="del">
-          <ac:chgData name="Jenkins NS" userId="8bdba4d2-1367-40cf-ad35-f59b31261896" providerId="ADAL" clId="{9DF06EC0-6773-4754-B5CF-3A86373E55DF}" dt="2026-10-21T20:10:47.751" v="351" actId="478"/>
-          <ac:spMkLst>
-            <pc:docMk/>
-            <pc:sldMk cId="0" sldId="2147479585"/>
-            <ac:spMk id="14" creationId="{00000000-0000-0000-0000-000000000000}"/>
-          </ac:spMkLst>
-        </pc:spChg>
-        <pc:spChg chg="del">
-          <ac:chgData name="Jenkins NS" userId="8bdba4d2-1367-40cf-ad35-f59b31261896" providerId="ADAL" clId="{9DF06EC0-6773-4754-B5CF-3A86373E55DF}" dt="2026-10-21T20:10:50.318" v="352" actId="478"/>
-          <ac:spMkLst>
-            <pc:docMk/>
-            <pc:sldMk cId="0" sldId="2147479585"/>
-            <ac:spMk id="15" creationId="{00000000-0000-0000-0000-000000000000}"/>
-          </ac:spMkLst>
-        </pc:spChg>
       </pc:sldChg>
       <pc:sldChg chg="add setBg">
         <pc:chgData name="Jenkins NS" userId="8bdba4d2-1367-40cf-ad35-f59b31261896" providerId="ADAL" clId="{9DF06EC0-6773-4754-B5CF-3A86373E55DF}" dt="2026-10-21T20:18:07.696" v="378"/>
@@ -749,30 +500,6 @@
           <pc:docMk/>
           <pc:sldMk cId="2979084665" sldId="2147479593"/>
         </pc:sldMkLst>
-        <pc:spChg chg="mod">
-          <ac:chgData name="Jenkins NS" userId="8bdba4d2-1367-40cf-ad35-f59b31261896" providerId="ADAL" clId="{9DF06EC0-6773-4754-B5CF-3A86373E55DF}" dt="2026-10-22T17:16:18.362" v="499" actId="20577"/>
-          <ac:spMkLst>
-            <pc:docMk/>
-            <pc:sldMk cId="2979084665" sldId="2147479593"/>
-            <ac:spMk id="3" creationId="{E1E21D66-9B9B-D583-A6D9-39E93A43781F}"/>
-          </ac:spMkLst>
-        </pc:spChg>
-        <pc:spChg chg="mod">
-          <ac:chgData name="Jenkins NS" userId="8bdba4d2-1367-40cf-ad35-f59b31261896" providerId="ADAL" clId="{9DF06EC0-6773-4754-B5CF-3A86373E55DF}" dt="2026-10-21T22:15:48.232" v="393" actId="1076"/>
-          <ac:spMkLst>
-            <pc:docMk/>
-            <pc:sldMk cId="2979084665" sldId="2147479593"/>
-            <ac:spMk id="4" creationId="{A9ECFEB2-8A24-ED4C-3E67-A1B9A79C3FB9}"/>
-          </ac:spMkLst>
-        </pc:spChg>
-        <pc:spChg chg="mod">
-          <ac:chgData name="Jenkins NS" userId="8bdba4d2-1367-40cf-ad35-f59b31261896" providerId="ADAL" clId="{9DF06EC0-6773-4754-B5CF-3A86373E55DF}" dt="2026-10-21T22:15:55.569" v="399" actId="27636"/>
-          <ac:spMkLst>
-            <pc:docMk/>
-            <pc:sldMk cId="2979084665" sldId="2147479593"/>
-            <ac:spMk id="5" creationId="{1FF910D3-E0EF-26BF-DD23-5E5560BAFD85}"/>
-          </ac:spMkLst>
-        </pc:spChg>
       </pc:sldChg>
       <pc:sldChg chg="add setBg">
         <pc:chgData name="Jenkins NS" userId="8bdba4d2-1367-40cf-ad35-f59b31261896" providerId="ADAL" clId="{9DF06EC0-6773-4754-B5CF-3A86373E55DF}" dt="2026-10-21T22:16:56.748" v="401"/>
@@ -830,14 +557,6 @@
           <pc:docMk/>
           <pc:sldMk cId="2017300280" sldId="2147479599"/>
         </pc:sldMkLst>
-        <pc:spChg chg="mod">
-          <ac:chgData name="Jenkins NS" userId="8bdba4d2-1367-40cf-ad35-f59b31261896" providerId="ADAL" clId="{9DF06EC0-6773-4754-B5CF-3A86373E55DF}" dt="2026-10-21T22:22:47.759" v="439" actId="20577"/>
-          <ac:spMkLst>
-            <pc:docMk/>
-            <pc:sldMk cId="2017300280" sldId="2147479599"/>
-            <ac:spMk id="5" creationId="{C5571311-60DC-186C-A284-A2FC41512B78}"/>
-          </ac:spMkLst>
-        </pc:spChg>
       </pc:sldChg>
       <pc:sldChg chg="add del setBg">
         <pc:chgData name="Jenkins NS" userId="8bdba4d2-1367-40cf-ad35-f59b31261896" providerId="ADAL" clId="{9DF06EC0-6773-4754-B5CF-3A86373E55DF}" dt="2026-10-21T22:22:14.279" v="432"/>
@@ -866,14 +585,6 @@
           <pc:docMk/>
           <pc:sldMk cId="703889543" sldId="2147479601"/>
         </pc:sldMkLst>
-        <pc:spChg chg="mod">
-          <ac:chgData name="Jenkins NS" userId="8bdba4d2-1367-40cf-ad35-f59b31261896" providerId="ADAL" clId="{9DF06EC0-6773-4754-B5CF-3A86373E55DF}" dt="2026-10-21T22:25:14.296" v="451" actId="20577"/>
-          <ac:spMkLst>
-            <pc:docMk/>
-            <pc:sldMk cId="703889543" sldId="2147479601"/>
-            <ac:spMk id="5" creationId="{18C41326-B7FB-9658-C24D-5FC0275137C8}"/>
-          </ac:spMkLst>
-        </pc:spChg>
       </pc:sldChg>
       <pc:sldChg chg="add del setBg">
         <pc:chgData name="Jenkins NS" userId="8bdba4d2-1367-40cf-ad35-f59b31261896" providerId="ADAL" clId="{9DF06EC0-6773-4754-B5CF-3A86373E55DF}" dt="2026-10-21T22:24:33.809" v="444"/>
@@ -895,14 +606,6 @@
           <pc:docMk/>
           <pc:sldMk cId="3585144251" sldId="2147479602"/>
         </pc:sldMkLst>
-        <pc:spChg chg="mod">
-          <ac:chgData name="Jenkins NS" userId="8bdba4d2-1367-40cf-ad35-f59b31261896" providerId="ADAL" clId="{9DF06EC0-6773-4754-B5CF-3A86373E55DF}" dt="2026-10-21T22:27:40.341" v="466" actId="20577"/>
-          <ac:spMkLst>
-            <pc:docMk/>
-            <pc:sldMk cId="3585144251" sldId="2147479602"/>
-            <ac:spMk id="5" creationId="{C5C36B88-BDFD-29D8-DA60-E1A871D76BCB}"/>
-          </ac:spMkLst>
-        </pc:spChg>
       </pc:sldChg>
       <pc:sldChg chg="modSp add mod">
         <pc:chgData name="Jenkins NS" userId="8bdba4d2-1367-40cf-ad35-f59b31261896" providerId="ADAL" clId="{9DF06EC0-6773-4754-B5CF-3A86373E55DF}" dt="2026-10-22T17:12:25.880" v="489" actId="20577"/>
@@ -910,22 +613,6 @@
           <pc:docMk/>
           <pc:sldMk cId="1525641040" sldId="2147479603"/>
         </pc:sldMkLst>
-        <pc:spChg chg="mod">
-          <ac:chgData name="Jenkins NS" userId="8bdba4d2-1367-40cf-ad35-f59b31261896" providerId="ADAL" clId="{9DF06EC0-6773-4754-B5CF-3A86373E55DF}" dt="2026-10-22T17:11:59.113" v="483" actId="20577"/>
-          <ac:spMkLst>
-            <pc:docMk/>
-            <pc:sldMk cId="1525641040" sldId="2147479603"/>
-            <ac:spMk id="3" creationId="{553923D6-D6BD-2A1A-B726-3087B6D885BC}"/>
-          </ac:spMkLst>
-        </pc:spChg>
-        <pc:spChg chg="mod">
-          <ac:chgData name="Jenkins NS" userId="8bdba4d2-1367-40cf-ad35-f59b31261896" providerId="ADAL" clId="{9DF06EC0-6773-4754-B5CF-3A86373E55DF}" dt="2026-10-22T17:12:25.880" v="489" actId="20577"/>
-          <ac:spMkLst>
-            <pc:docMk/>
-            <pc:sldMk cId="1525641040" sldId="2147479603"/>
-            <ac:spMk id="4" creationId="{5D97F56A-A0BE-BE10-5B49-DFB6A23B5F18}"/>
-          </ac:spMkLst>
-        </pc:spChg>
       </pc:sldChg>
       <pc:sldChg chg="add del setBg">
         <pc:chgData name="Jenkins NS" userId="8bdba4d2-1367-40cf-ad35-f59b31261896" providerId="ADAL" clId="{9DF06EC0-6773-4754-B5CF-3A86373E55DF}" dt="2026-10-22T17:11:52.663" v="473"/>
@@ -947,14 +634,6 @@
           <pc:docMk/>
           <pc:sldMk cId="443657415" sldId="2147479840"/>
         </pc:sldMkLst>
-        <pc:spChg chg="add del">
-          <ac:chgData name="Jenkins NS" userId="8bdba4d2-1367-40cf-ad35-f59b31261896" providerId="ADAL" clId="{9DF06EC0-6773-4754-B5CF-3A86373E55DF}" dt="2026-10-21T19:26:36.670" v="2" actId="22"/>
-          <ac:spMkLst>
-            <pc:docMk/>
-            <pc:sldMk cId="443657415" sldId="2147479840"/>
-            <ac:spMk id="3" creationId="{56680FA2-4971-0C4A-E1E5-2D6BA10C628F}"/>
-          </ac:spMkLst>
-        </pc:spChg>
       </pc:sldChg>
       <pc:sldChg chg="del">
         <pc:chgData name="Jenkins NS" userId="8bdba4d2-1367-40cf-ad35-f59b31261896" providerId="ADAL" clId="{9DF06EC0-6773-4754-B5CF-3A86373E55DF}" dt="2026-10-21T19:24:49.810" v="0" actId="47"/>
@@ -1290,15 +969,6 @@
             <pc:sldMasterMk cId="975404246" sldId="2147483648"/>
             <pc:sldLayoutMk cId="3241650075" sldId="2147483672"/>
           </pc:sldLayoutMkLst>
-          <pc:spChg chg="add mod">
-            <ac:chgData name="Jenkins NS" userId="8bdba4d2-1367-40cf-ad35-f59b31261896" providerId="ADAL" clId="{9DF06EC0-6773-4754-B5CF-3A86373E55DF}" dt="2026-10-21T19:31:34.097" v="178" actId="207"/>
-            <ac:spMkLst>
-              <pc:docMk/>
-              <pc:sldMasterMk cId="975404246" sldId="2147483648"/>
-              <pc:sldLayoutMk cId="3241650075" sldId="2147483672"/>
-              <ac:spMk id="2" creationId="{1E00EE6B-4843-4559-6000-99DEC0E7AECF}"/>
-            </ac:spMkLst>
-          </pc:spChg>
           <pc:spChg chg="mod">
             <ac:chgData name="Jenkins NS" userId="8bdba4d2-1367-40cf-ad35-f59b31261896" providerId="ADAL" clId="{9DF06EC0-6773-4754-B5CF-3A86373E55DF}" dt="2026-10-21T19:35:35.446" v="224" actId="207"/>
             <ac:spMkLst>
@@ -1308,33 +978,6 @@
               <ac:spMk id="3" creationId="{3E21C31D-925C-53B5-2E40-C54FF245B41E}"/>
             </ac:spMkLst>
           </pc:spChg>
-          <pc:picChg chg="del">
-            <ac:chgData name="Jenkins NS" userId="8bdba4d2-1367-40cf-ad35-f59b31261896" providerId="ADAL" clId="{9DF06EC0-6773-4754-B5CF-3A86373E55DF}" dt="2026-10-21T19:35:57.153" v="225" actId="478"/>
-            <ac:picMkLst>
-              <pc:docMk/>
-              <pc:sldMasterMk cId="975404246" sldId="2147483648"/>
-              <pc:sldLayoutMk cId="3241650075" sldId="2147483672"/>
-              <ac:picMk id="7" creationId="{7B930E7F-5B91-31B0-B67D-DB8C41E881CF}"/>
-            </ac:picMkLst>
-          </pc:picChg>
-          <pc:picChg chg="add del mod ord">
-            <ac:chgData name="Jenkins NS" userId="8bdba4d2-1367-40cf-ad35-f59b31261896" providerId="ADAL" clId="{9DF06EC0-6773-4754-B5CF-3A86373E55DF}" dt="2026-10-21T19:49:24.086" v="295" actId="478"/>
-            <ac:picMkLst>
-              <pc:docMk/>
-              <pc:sldMasterMk cId="975404246" sldId="2147483648"/>
-              <pc:sldLayoutMk cId="3241650075" sldId="2147483672"/>
-              <ac:picMk id="8" creationId="{A0C964CA-5AF1-09D8-14B7-7FF1EABE784A}"/>
-            </ac:picMkLst>
-          </pc:picChg>
-          <pc:picChg chg="add del mod">
-            <ac:chgData name="Jenkins NS" userId="8bdba4d2-1367-40cf-ad35-f59b31261896" providerId="ADAL" clId="{9DF06EC0-6773-4754-B5CF-3A86373E55DF}" dt="2026-10-21T19:35:25.833" v="219" actId="478"/>
-            <ac:picMkLst>
-              <pc:docMk/>
-              <pc:sldMasterMk cId="975404246" sldId="2147483648"/>
-              <pc:sldLayoutMk cId="3241650075" sldId="2147483672"/>
-              <ac:picMk id="10" creationId="{8B334D90-2717-2269-E486-F1900244A628}"/>
-            </ac:picMkLst>
-          </pc:picChg>
           <pc:picChg chg="add mod">
             <ac:chgData name="Jenkins NS" userId="8bdba4d2-1367-40cf-ad35-f59b31261896" providerId="ADAL" clId="{9DF06EC0-6773-4754-B5CF-3A86373E55DF}" dt="2026-10-21T19:36:16.316" v="233" actId="1076"/>
             <ac:picMkLst>
@@ -1342,15 +985,6 @@
               <pc:sldMasterMk cId="975404246" sldId="2147483648"/>
               <pc:sldLayoutMk cId="3241650075" sldId="2147483672"/>
               <ac:picMk id="11" creationId="{8A5D0B54-3E0F-E277-0472-C5E542E53F7F}"/>
-            </ac:picMkLst>
-          </pc:picChg>
-          <pc:picChg chg="add del mod">
-            <ac:chgData name="Jenkins NS" userId="8bdba4d2-1367-40cf-ad35-f59b31261896" providerId="ADAL" clId="{9DF06EC0-6773-4754-B5CF-3A86373E55DF}" dt="2026-10-22T17:10:37.795" v="467" actId="478"/>
-            <ac:picMkLst>
-              <pc:docMk/>
-              <pc:sldMasterMk cId="975404246" sldId="2147483648"/>
-              <pc:sldLayoutMk cId="3241650075" sldId="2147483672"/>
-              <ac:picMk id="13" creationId="{3301086E-F595-9F37-140F-1279F2C885C8}"/>
             </ac:picMkLst>
           </pc:picChg>
           <pc:picChg chg="add mod ord">
@@ -1377,15 +1011,6 @@
             <pc:sldMasterMk cId="2391316343" sldId="2147483668"/>
             <pc:sldLayoutMk cId="1798594045" sldId="2147483670"/>
           </pc:sldLayoutMkLst>
-          <pc:spChg chg="mod">
-            <ac:chgData name="Jenkins NS" userId="8bdba4d2-1367-40cf-ad35-f59b31261896" providerId="ADAL" clId="{9DF06EC0-6773-4754-B5CF-3A86373E55DF}" dt="2026-10-21T19:48:26.160" v="294" actId="207"/>
-            <ac:spMkLst>
-              <pc:docMk/>
-              <pc:sldMasterMk cId="2391316343" sldId="2147483668"/>
-              <pc:sldLayoutMk cId="1798594045" sldId="2147483670"/>
-              <ac:spMk id="2" creationId="{00000000-0000-0000-0000-000000000000}"/>
-            </ac:spMkLst>
-          </pc:spChg>
         </pc:sldLayoutChg>
       </pc:sldMasterChg>
     </pc:docChg>
@@ -1444,8 +1069,8 @@
   </pc:docChgLst>
   <pc:docChgLst>
     <pc:chgData name="Jenkins NS" userId="8bdba4d2-1367-40cf-ad35-f59b31261896" providerId="ADAL" clId="{F58680DD-FFF5-4D2B-B065-F48D10CC8C0D}"/>
-    <pc:docChg chg="addSld delSld modSld sldOrd delMainMaster modMainMaster">
-      <pc:chgData name="Jenkins NS" userId="8bdba4d2-1367-40cf-ad35-f59b31261896" providerId="ADAL" clId="{F58680DD-FFF5-4D2B-B065-F48D10CC8C0D}" dt="2026-10-22T21:19:29.857" v="11"/>
+    <pc:docChg chg="undo custSel addSld delSld modSld sldOrd delMainMaster modMainMaster">
+      <pc:chgData name="Jenkins NS" userId="8bdba4d2-1367-40cf-ad35-f59b31261896" providerId="ADAL" clId="{F58680DD-FFF5-4D2B-B065-F48D10CC8C0D}" dt="2026-10-27T18:20:02.040" v="295" actId="313"/>
       <pc:docMkLst>
         <pc:docMk/>
       </pc:docMkLst>
@@ -1484,12 +1109,60 @@
           <pc:sldMk cId="0" sldId="260"/>
         </pc:sldMkLst>
       </pc:sldChg>
-      <pc:sldChg chg="del">
-        <pc:chgData name="Jenkins NS" userId="8bdba4d2-1367-40cf-ad35-f59b31261896" providerId="ADAL" clId="{F58680DD-FFF5-4D2B-B065-F48D10CC8C0D}" dt="2026-10-22T20:52:21.654" v="0" actId="47"/>
+      <pc:sldChg chg="addSp modSp add del mod setBg">
+        <pc:chgData name="Jenkins NS" userId="8bdba4d2-1367-40cf-ad35-f59b31261896" providerId="ADAL" clId="{F58680DD-FFF5-4D2B-B065-F48D10CC8C0D}" dt="2026-10-27T18:20:02.040" v="295" actId="313"/>
         <pc:sldMkLst>
           <pc:docMk/>
           <pc:sldMk cId="0" sldId="261"/>
         </pc:sldMkLst>
+        <pc:spChg chg="mod">
+          <ac:chgData name="Jenkins NS" userId="8bdba4d2-1367-40cf-ad35-f59b31261896" providerId="ADAL" clId="{F58680DD-FFF5-4D2B-B065-F48D10CC8C0D}" dt="2026-10-27T18:19:50.948" v="292" actId="1035"/>
+          <ac:spMkLst>
+            <pc:docMk/>
+            <pc:sldMk cId="0" sldId="261"/>
+            <ac:spMk id="2" creationId="{00000000-0000-0000-0000-000000000000}"/>
+          </ac:spMkLst>
+        </pc:spChg>
+        <pc:spChg chg="mod">
+          <ac:chgData name="Jenkins NS" userId="8bdba4d2-1367-40cf-ad35-f59b31261896" providerId="ADAL" clId="{F58680DD-FFF5-4D2B-B065-F48D10CC8C0D}" dt="2026-10-27T18:19:50.948" v="292" actId="1035"/>
+          <ac:spMkLst>
+            <pc:docMk/>
+            <pc:sldMk cId="0" sldId="261"/>
+            <ac:spMk id="3" creationId="{00000000-0000-0000-0000-000000000000}"/>
+          </ac:spMkLst>
+        </pc:spChg>
+        <pc:spChg chg="mod">
+          <ac:chgData name="Jenkins NS" userId="8bdba4d2-1367-40cf-ad35-f59b31261896" providerId="ADAL" clId="{F58680DD-FFF5-4D2B-B065-F48D10CC8C0D}" dt="2026-10-27T18:19:50.948" v="292" actId="1035"/>
+          <ac:spMkLst>
+            <pc:docMk/>
+            <pc:sldMk cId="0" sldId="261"/>
+            <ac:spMk id="4" creationId="{00000000-0000-0000-0000-000000000000}"/>
+          </ac:spMkLst>
+        </pc:spChg>
+        <pc:spChg chg="mod">
+          <ac:chgData name="Jenkins NS" userId="8bdba4d2-1367-40cf-ad35-f59b31261896" providerId="ADAL" clId="{F58680DD-FFF5-4D2B-B065-F48D10CC8C0D}" dt="2026-10-27T18:19:50.948" v="292" actId="1035"/>
+          <ac:spMkLst>
+            <pc:docMk/>
+            <pc:sldMk cId="0" sldId="261"/>
+            <ac:spMk id="5" creationId="{00000000-0000-0000-0000-000000000000}"/>
+          </ac:spMkLst>
+        </pc:spChg>
+        <pc:spChg chg="add mod">
+          <ac:chgData name="Jenkins NS" userId="8bdba4d2-1367-40cf-ad35-f59b31261896" providerId="ADAL" clId="{F58680DD-FFF5-4D2B-B065-F48D10CC8C0D}" dt="2026-10-27T18:19:50.948" v="292" actId="1035"/>
+          <ac:spMkLst>
+            <pc:docMk/>
+            <pc:sldMk cId="0" sldId="261"/>
+            <ac:spMk id="7" creationId="{9FFD1023-9CFA-120F-9741-E9D2B17A7224}"/>
+          </ac:spMkLst>
+        </pc:spChg>
+        <pc:spChg chg="add mod">
+          <ac:chgData name="Jenkins NS" userId="8bdba4d2-1367-40cf-ad35-f59b31261896" providerId="ADAL" clId="{F58680DD-FFF5-4D2B-B065-F48D10CC8C0D}" dt="2026-10-27T18:20:02.040" v="295" actId="313"/>
+          <ac:spMkLst>
+            <pc:docMk/>
+            <pc:sldMk cId="0" sldId="261"/>
+            <ac:spMk id="9" creationId="{93AFADCF-D554-668A-693C-706505EB2984}"/>
+          </ac:spMkLst>
+        </pc:spChg>
       </pc:sldChg>
       <pc:sldChg chg="del">
         <pc:chgData name="Jenkins NS" userId="8bdba4d2-1367-40cf-ad35-f59b31261896" providerId="ADAL" clId="{F58680DD-FFF5-4D2B-B065-F48D10CC8C0D}" dt="2026-10-22T20:52:21.654" v="0" actId="47"/>
@@ -1764,19 +1437,136 @@
           <pc:sldMk cId="172466689" sldId="2147479598"/>
         </pc:sldMkLst>
       </pc:sldChg>
-      <pc:sldChg chg="del">
-        <pc:chgData name="Jenkins NS" userId="8bdba4d2-1367-40cf-ad35-f59b31261896" providerId="ADAL" clId="{F58680DD-FFF5-4D2B-B065-F48D10CC8C0D}" dt="2026-10-22T20:53:28.829" v="1" actId="47"/>
+      <pc:sldChg chg="modSp add del mod setBg">
+        <pc:chgData name="Jenkins NS" userId="8bdba4d2-1367-40cf-ad35-f59b31261896" providerId="ADAL" clId="{F58680DD-FFF5-4D2B-B065-F48D10CC8C0D}" dt="2026-10-27T18:09:32.165" v="89" actId="20577"/>
         <pc:sldMkLst>
           <pc:docMk/>
-          <pc:sldMk cId="2017300280" sldId="2147479599"/>
+          <pc:sldMk cId="0" sldId="2147479599"/>
         </pc:sldMkLst>
+        <pc:spChg chg="mod">
+          <ac:chgData name="Jenkins NS" userId="8bdba4d2-1367-40cf-ad35-f59b31261896" providerId="ADAL" clId="{F58680DD-FFF5-4D2B-B065-F48D10CC8C0D}" dt="2026-10-27T18:09:32.165" v="89" actId="20577"/>
+          <ac:spMkLst>
+            <pc:docMk/>
+            <pc:sldMk cId="0" sldId="2147479599"/>
+            <ac:spMk id="2" creationId="{00000000-0000-0000-0000-000000000000}"/>
+          </ac:spMkLst>
+        </pc:spChg>
+        <pc:graphicFrameChg chg="modGraphic">
+          <ac:chgData name="Jenkins NS" userId="8bdba4d2-1367-40cf-ad35-f59b31261896" providerId="ADAL" clId="{F58680DD-FFF5-4D2B-B065-F48D10CC8C0D}" dt="2026-10-27T18:09:29.622" v="83" actId="20577"/>
+          <ac:graphicFrameMkLst>
+            <pc:docMk/>
+            <pc:sldMk cId="0" sldId="2147479599"/>
+            <ac:graphicFrameMk id="3" creationId="{00000000-0000-0000-0000-000000000000}"/>
+          </ac:graphicFrameMkLst>
+        </pc:graphicFrameChg>
       </pc:sldChg>
       <pc:sldChg chg="del">
         <pc:chgData name="Jenkins NS" userId="8bdba4d2-1367-40cf-ad35-f59b31261896" providerId="ADAL" clId="{F58680DD-FFF5-4D2B-B065-F48D10CC8C0D}" dt="2026-10-22T20:53:28.829" v="1" actId="47"/>
         <pc:sldMkLst>
           <pc:docMk/>
+          <pc:sldMk cId="2017300280" sldId="2147479599"/>
+        </pc:sldMkLst>
+      </pc:sldChg>
+      <pc:sldChg chg="addSp modSp add del mod setBg">
+        <pc:chgData name="Jenkins NS" userId="8bdba4d2-1367-40cf-ad35-f59b31261896" providerId="ADAL" clId="{F58680DD-FFF5-4D2B-B065-F48D10CC8C0D}" dt="2026-10-27T18:13:30.897" v="136" actId="108"/>
+        <pc:sldMkLst>
+          <pc:docMk/>
+          <pc:sldMk cId="0" sldId="2147479600"/>
+        </pc:sldMkLst>
+        <pc:spChg chg="mod">
+          <ac:chgData name="Jenkins NS" userId="8bdba4d2-1367-40cf-ad35-f59b31261896" providerId="ADAL" clId="{F58680DD-FFF5-4D2B-B065-F48D10CC8C0D}" dt="2026-10-27T18:12:22.008" v="121" actId="1035"/>
+          <ac:spMkLst>
+            <pc:docMk/>
+            <pc:sldMk cId="0" sldId="2147479600"/>
+            <ac:spMk id="2" creationId="{00000000-0000-0000-0000-000000000000}"/>
+          </ac:spMkLst>
+        </pc:spChg>
+        <pc:spChg chg="mod">
+          <ac:chgData name="Jenkins NS" userId="8bdba4d2-1367-40cf-ad35-f59b31261896" providerId="ADAL" clId="{F58680DD-FFF5-4D2B-B065-F48D10CC8C0D}" dt="2026-10-27T18:12:22.008" v="121" actId="1035"/>
+          <ac:spMkLst>
+            <pc:docMk/>
+            <pc:sldMk cId="0" sldId="2147479600"/>
+            <ac:spMk id="3" creationId="{00000000-0000-0000-0000-000000000000}"/>
+          </ac:spMkLst>
+        </pc:spChg>
+        <pc:spChg chg="mod">
+          <ac:chgData name="Jenkins NS" userId="8bdba4d2-1367-40cf-ad35-f59b31261896" providerId="ADAL" clId="{F58680DD-FFF5-4D2B-B065-F48D10CC8C0D}" dt="2026-10-27T18:12:22.008" v="121" actId="1035"/>
+          <ac:spMkLst>
+            <pc:docMk/>
+            <pc:sldMk cId="0" sldId="2147479600"/>
+            <ac:spMk id="4" creationId="{00000000-0000-0000-0000-000000000000}"/>
+          </ac:spMkLst>
+        </pc:spChg>
+        <pc:spChg chg="mod">
+          <ac:chgData name="Jenkins NS" userId="8bdba4d2-1367-40cf-ad35-f59b31261896" providerId="ADAL" clId="{F58680DD-FFF5-4D2B-B065-F48D10CC8C0D}" dt="2026-10-27T18:12:22.008" v="121" actId="1035"/>
+          <ac:spMkLst>
+            <pc:docMk/>
+            <pc:sldMk cId="0" sldId="2147479600"/>
+            <ac:spMk id="5" creationId="{00000000-0000-0000-0000-000000000000}"/>
+          </ac:spMkLst>
+        </pc:spChg>
+        <pc:spChg chg="add mod">
+          <ac:chgData name="Jenkins NS" userId="8bdba4d2-1367-40cf-ad35-f59b31261896" providerId="ADAL" clId="{F58680DD-FFF5-4D2B-B065-F48D10CC8C0D}" dt="2026-10-27T18:13:30.897" v="136" actId="108"/>
+          <ac:spMkLst>
+            <pc:docMk/>
+            <pc:sldMk cId="0" sldId="2147479600"/>
+            <ac:spMk id="7" creationId="{5665D398-FBE2-5349-8C7F-56199BD4AFA1}"/>
+          </ac:spMkLst>
+        </pc:spChg>
+      </pc:sldChg>
+      <pc:sldChg chg="del">
+        <pc:chgData name="Jenkins NS" userId="8bdba4d2-1367-40cf-ad35-f59b31261896" providerId="ADAL" clId="{F58680DD-FFF5-4D2B-B065-F48D10CC8C0D}" dt="2026-10-22T20:53:28.829" v="1" actId="47"/>
+        <pc:sldMkLst>
+          <pc:docMk/>
           <pc:sldMk cId="3382622447" sldId="2147479600"/>
         </pc:sldMkLst>
+      </pc:sldChg>
+      <pc:sldChg chg="addSp modSp add del mod setBg">
+        <pc:chgData name="Jenkins NS" userId="8bdba4d2-1367-40cf-ad35-f59b31261896" providerId="ADAL" clId="{F58680DD-FFF5-4D2B-B065-F48D10CC8C0D}" dt="2026-10-27T18:16:50.247" v="193" actId="1076"/>
+        <pc:sldMkLst>
+          <pc:docMk/>
+          <pc:sldMk cId="0" sldId="2147479601"/>
+        </pc:sldMkLst>
+        <pc:spChg chg="mod">
+          <ac:chgData name="Jenkins NS" userId="8bdba4d2-1367-40cf-ad35-f59b31261896" providerId="ADAL" clId="{F58680DD-FFF5-4D2B-B065-F48D10CC8C0D}" dt="2026-10-27T18:14:34.684" v="170" actId="1035"/>
+          <ac:spMkLst>
+            <pc:docMk/>
+            <pc:sldMk cId="0" sldId="2147479601"/>
+            <ac:spMk id="2" creationId="{00000000-0000-0000-0000-000000000000}"/>
+          </ac:spMkLst>
+        </pc:spChg>
+        <pc:spChg chg="mod">
+          <ac:chgData name="Jenkins NS" userId="8bdba4d2-1367-40cf-ad35-f59b31261896" providerId="ADAL" clId="{F58680DD-FFF5-4D2B-B065-F48D10CC8C0D}" dt="2026-10-27T18:14:34.684" v="170" actId="1035"/>
+          <ac:spMkLst>
+            <pc:docMk/>
+            <pc:sldMk cId="0" sldId="2147479601"/>
+            <ac:spMk id="3" creationId="{00000000-0000-0000-0000-000000000000}"/>
+          </ac:spMkLst>
+        </pc:spChg>
+        <pc:spChg chg="mod">
+          <ac:chgData name="Jenkins NS" userId="8bdba4d2-1367-40cf-ad35-f59b31261896" providerId="ADAL" clId="{F58680DD-FFF5-4D2B-B065-F48D10CC8C0D}" dt="2026-10-27T18:14:34.684" v="170" actId="1035"/>
+          <ac:spMkLst>
+            <pc:docMk/>
+            <pc:sldMk cId="0" sldId="2147479601"/>
+            <ac:spMk id="4" creationId="{00000000-0000-0000-0000-000000000000}"/>
+          </ac:spMkLst>
+        </pc:spChg>
+        <pc:spChg chg="mod">
+          <ac:chgData name="Jenkins NS" userId="8bdba4d2-1367-40cf-ad35-f59b31261896" providerId="ADAL" clId="{F58680DD-FFF5-4D2B-B065-F48D10CC8C0D}" dt="2026-10-27T18:14:34.684" v="170" actId="1035"/>
+          <ac:spMkLst>
+            <pc:docMk/>
+            <pc:sldMk cId="0" sldId="2147479601"/>
+            <ac:spMk id="5" creationId="{00000000-0000-0000-0000-000000000000}"/>
+          </ac:spMkLst>
+        </pc:spChg>
+        <pc:spChg chg="add mod">
+          <ac:chgData name="Jenkins NS" userId="8bdba4d2-1367-40cf-ad35-f59b31261896" providerId="ADAL" clId="{F58680DD-FFF5-4D2B-B065-F48D10CC8C0D}" dt="2026-10-27T18:16:50.247" v="193" actId="1076"/>
+          <ac:spMkLst>
+            <pc:docMk/>
+            <pc:sldMk cId="0" sldId="2147479601"/>
+            <ac:spMk id="7" creationId="{6DEB1799-CEAE-6B7F-6569-F6CF35838C5D}"/>
+          </ac:spMkLst>
+        </pc:spChg>
       </pc:sldChg>
       <pc:sldChg chg="del">
         <pc:chgData name="Jenkins NS" userId="8bdba4d2-1367-40cf-ad35-f59b31261896" providerId="ADAL" clId="{F58680DD-FFF5-4D2B-B065-F48D10CC8C0D}" dt="2026-10-22T20:53:28.829" v="1" actId="47"/>
@@ -2738,7 +2528,7 @@
           <a:p>
             <a:fld id="{9A68FD0E-F9ED-4497-A478-7758BBAF08B6}" type="datetimeFigureOut">
               <a:rPr lang="en-IN" smtClean="0"/>
-              <a:t>23-10-2026</a:t>
+              <a:t>27-10-2026</a:t>
             </a:fld>
             <a:endParaRPr lang="en-IN"/>
           </a:p>
@@ -3324,6 +3114,582 @@
 </p:notes>
 </file>
 
+<file path=ppt/notesSlides/notesSlide11.xml><?xml version="1.0" encoding="utf-8"?>
+<p:notes xmlns:a="http://schemas.openxmlformats.org/drawingml/2006/main" xmlns:r="http://schemas.openxmlformats.org/officeDocument/2006/relationships" xmlns:p="http://schemas.openxmlformats.org/presentationml/2006/main">
+  <p:cSld>
+    <p:spTree>
+      <p:nvGrpSpPr>
+        <p:cNvPr id="1" name=""/>
+        <p:cNvGrpSpPr/>
+        <p:nvPr/>
+      </p:nvGrpSpPr>
+      <p:grpSpPr>
+        <a:xfrm>
+          <a:off x="0" y="0"/>
+          <a:ext cx="0" cy="0"/>
+          <a:chOff x="0" y="0"/>
+          <a:chExt cx="0" cy="0"/>
+        </a:xfrm>
+      </p:grpSpPr>
+      <p:sp>
+        <p:nvSpPr>
+          <p:cNvPr id="2" name="Slide Image Placeholder 1"/>
+          <p:cNvSpPr>
+            <a:spLocks noGrp="1" noRot="1" noChangeAspect="1"/>
+          </p:cNvSpPr>
+          <p:nvPr>
+            <p:ph type="sldImg"/>
+          </p:nvPr>
+        </p:nvSpPr>
+        <p:spPr/>
+      </p:sp>
+      <p:sp>
+        <p:nvSpPr>
+          <p:cNvPr id="3" name="Notes Placeholder 2"/>
+          <p:cNvSpPr>
+            <a:spLocks noGrp="1"/>
+          </p:cNvSpPr>
+          <p:nvPr>
+            <p:ph type="body" idx="1"/>
+          </p:nvPr>
+        </p:nvSpPr>
+        <p:spPr/>
+        <p:txBody>
+          <a:bodyPr/>
+          <a:lstStyle/>
+          <a:p>
+            <a:endParaRPr lang="en-US" dirty="0"/>
+          </a:p>
+        </p:txBody>
+      </p:sp>
+      <p:sp>
+        <p:nvSpPr>
+          <p:cNvPr id="4" name="Slide Number Placeholder 3"/>
+          <p:cNvSpPr>
+            <a:spLocks noGrp="1"/>
+          </p:cNvSpPr>
+          <p:nvPr>
+            <p:ph type="sldNum" sz="quarter" idx="10"/>
+          </p:nvPr>
+        </p:nvSpPr>
+        <p:spPr/>
+        <p:txBody>
+          <a:bodyPr/>
+          <a:lstStyle/>
+          <a:p>
+            <a:pPr marL="0" marR="0" lvl="0" indent="0" algn="l" defTabSz="914400" rtl="0" eaLnBrk="1" fontAlgn="auto" latinLnBrk="0" hangingPunct="1">
+              <a:lnSpc>
+                <a:spcPct val="100000"/>
+              </a:lnSpc>
+              <a:spcBef>
+                <a:spcPts val="0"/>
+              </a:spcBef>
+              <a:spcAft>
+                <a:spcPts val="0"/>
+              </a:spcAft>
+              <a:buClrTx/>
+              <a:buSzTx/>
+              <a:buFontTx/>
+              <a:buNone/>
+              <a:tabLst/>
+              <a:defRPr/>
+            </a:pPr>
+            <a:fld id="{F7021451-1387-4CA6-816F-3879F97B5CBC}" type="slidenum">
+              <a:rPr kumimoji="0" lang="en-US" sz="1800" b="0" i="0" u="none" strike="noStrike" kern="1200" cap="none" spc="0" normalizeH="0" baseline="0" noProof="0">
+                <a:ln>
+                  <a:noFill/>
+                </a:ln>
+                <a:solidFill>
+                  <a:prstClr val="black"/>
+                </a:solidFill>
+                <a:effectLst/>
+                <a:uLnTx/>
+                <a:uFillTx/>
+                <a:latin typeface="Aptos" panose="02110004020202020204"/>
+                <a:ea typeface="+mn-ea"/>
+                <a:cs typeface="+mn-cs"/>
+              </a:rPr>
+              <a:pPr marL="0" marR="0" lvl="0" indent="0" algn="l" defTabSz="914400" rtl="0" eaLnBrk="1" fontAlgn="auto" latinLnBrk="0" hangingPunct="1">
+                <a:lnSpc>
+                  <a:spcPct val="100000"/>
+                </a:lnSpc>
+                <a:spcBef>
+                  <a:spcPts val="0"/>
+                </a:spcBef>
+                <a:spcAft>
+                  <a:spcPts val="0"/>
+                </a:spcAft>
+                <a:buClrTx/>
+                <a:buSzTx/>
+                <a:buFontTx/>
+                <a:buNone/>
+                <a:tabLst/>
+                <a:defRPr/>
+              </a:pPr>
+              <a:t>12</a:t>
+            </a:fld>
+            <a:endParaRPr kumimoji="0" lang="en-US" sz="1800" b="0" i="0" u="none" strike="noStrike" kern="1200" cap="none" spc="0" normalizeH="0" baseline="0" noProof="0">
+              <a:ln>
+                <a:noFill/>
+              </a:ln>
+              <a:solidFill>
+                <a:prstClr val="black"/>
+              </a:solidFill>
+              <a:effectLst/>
+              <a:uLnTx/>
+              <a:uFillTx/>
+              <a:latin typeface="Aptos" panose="02110004020202020204"/>
+              <a:ea typeface="+mn-ea"/>
+              <a:cs typeface="+mn-cs"/>
+            </a:endParaRPr>
+          </a:p>
+        </p:txBody>
+      </p:sp>
+    </p:spTree>
+    <p:extLst>
+      <p:ext uri="{BB962C8B-B14F-4D97-AF65-F5344CB8AC3E}">
+        <p14:creationId xmlns:p14="http://schemas.microsoft.com/office/powerpoint/2010/main" val="1024086991"/>
+      </p:ext>
+    </p:extLst>
+  </p:cSld>
+  <p:clrMapOvr>
+    <a:masterClrMapping/>
+  </p:clrMapOvr>
+</p:notes>
+</file>
+
+<file path=ppt/notesSlides/notesSlide12.xml><?xml version="1.0" encoding="utf-8"?>
+<p:notes xmlns:a="http://schemas.openxmlformats.org/drawingml/2006/main" xmlns:r="http://schemas.openxmlformats.org/officeDocument/2006/relationships" xmlns:p="http://schemas.openxmlformats.org/presentationml/2006/main">
+  <p:cSld>
+    <p:spTree>
+      <p:nvGrpSpPr>
+        <p:cNvPr id="1" name=""/>
+        <p:cNvGrpSpPr/>
+        <p:nvPr/>
+      </p:nvGrpSpPr>
+      <p:grpSpPr>
+        <a:xfrm>
+          <a:off x="0" y="0"/>
+          <a:ext cx="0" cy="0"/>
+          <a:chOff x="0" y="0"/>
+          <a:chExt cx="0" cy="0"/>
+        </a:xfrm>
+      </p:grpSpPr>
+      <p:sp>
+        <p:nvSpPr>
+          <p:cNvPr id="2" name="Slide Image Placeholder 1"/>
+          <p:cNvSpPr>
+            <a:spLocks noGrp="1" noRot="1" noChangeAspect="1"/>
+          </p:cNvSpPr>
+          <p:nvPr>
+            <p:ph type="sldImg"/>
+          </p:nvPr>
+        </p:nvSpPr>
+        <p:spPr/>
+      </p:sp>
+      <p:sp>
+        <p:nvSpPr>
+          <p:cNvPr id="3" name="Notes Placeholder 2"/>
+          <p:cNvSpPr>
+            <a:spLocks noGrp="1"/>
+          </p:cNvSpPr>
+          <p:nvPr>
+            <p:ph type="body" idx="1"/>
+          </p:nvPr>
+        </p:nvSpPr>
+        <p:spPr/>
+        <p:txBody>
+          <a:bodyPr/>
+          <a:lstStyle/>
+          <a:p>
+            <a:endParaRPr lang="en-US" dirty="0"/>
+          </a:p>
+        </p:txBody>
+      </p:sp>
+      <p:sp>
+        <p:nvSpPr>
+          <p:cNvPr id="4" name="Slide Number Placeholder 3"/>
+          <p:cNvSpPr>
+            <a:spLocks noGrp="1"/>
+          </p:cNvSpPr>
+          <p:nvPr>
+            <p:ph type="sldNum" sz="quarter" idx="10"/>
+          </p:nvPr>
+        </p:nvSpPr>
+        <p:spPr/>
+        <p:txBody>
+          <a:bodyPr/>
+          <a:lstStyle/>
+          <a:p>
+            <a:pPr marL="0" marR="0" lvl="0" indent="0" algn="l" defTabSz="914400" rtl="0" eaLnBrk="1" fontAlgn="auto" latinLnBrk="0" hangingPunct="1">
+              <a:lnSpc>
+                <a:spcPct val="100000"/>
+              </a:lnSpc>
+              <a:spcBef>
+                <a:spcPts val="0"/>
+              </a:spcBef>
+              <a:spcAft>
+                <a:spcPts val="0"/>
+              </a:spcAft>
+              <a:buClrTx/>
+              <a:buSzTx/>
+              <a:buFontTx/>
+              <a:buNone/>
+              <a:tabLst/>
+              <a:defRPr/>
+            </a:pPr>
+            <a:fld id="{F7021451-1387-4CA6-816F-3879F97B5CBC}" type="slidenum">
+              <a:rPr kumimoji="0" lang="en-US" sz="1800" b="0" i="0" u="none" strike="noStrike" kern="1200" cap="none" spc="0" normalizeH="0" baseline="0" noProof="0">
+                <a:ln>
+                  <a:noFill/>
+                </a:ln>
+                <a:solidFill>
+                  <a:prstClr val="black"/>
+                </a:solidFill>
+                <a:effectLst/>
+                <a:uLnTx/>
+                <a:uFillTx/>
+                <a:latin typeface="Aptos" panose="02110004020202020204"/>
+                <a:ea typeface="+mn-ea"/>
+                <a:cs typeface="+mn-cs"/>
+              </a:rPr>
+              <a:pPr marL="0" marR="0" lvl="0" indent="0" algn="l" defTabSz="914400" rtl="0" eaLnBrk="1" fontAlgn="auto" latinLnBrk="0" hangingPunct="1">
+                <a:lnSpc>
+                  <a:spcPct val="100000"/>
+                </a:lnSpc>
+                <a:spcBef>
+                  <a:spcPts val="0"/>
+                </a:spcBef>
+                <a:spcAft>
+                  <a:spcPts val="0"/>
+                </a:spcAft>
+                <a:buClrTx/>
+                <a:buSzTx/>
+                <a:buFontTx/>
+                <a:buNone/>
+                <a:tabLst/>
+                <a:defRPr/>
+              </a:pPr>
+              <a:t>13</a:t>
+            </a:fld>
+            <a:endParaRPr kumimoji="0" lang="en-US" sz="1800" b="0" i="0" u="none" strike="noStrike" kern="1200" cap="none" spc="0" normalizeH="0" baseline="0" noProof="0">
+              <a:ln>
+                <a:noFill/>
+              </a:ln>
+              <a:solidFill>
+                <a:prstClr val="black"/>
+              </a:solidFill>
+              <a:effectLst/>
+              <a:uLnTx/>
+              <a:uFillTx/>
+              <a:latin typeface="Aptos" panose="02110004020202020204"/>
+              <a:ea typeface="+mn-ea"/>
+              <a:cs typeface="+mn-cs"/>
+            </a:endParaRPr>
+          </a:p>
+        </p:txBody>
+      </p:sp>
+    </p:spTree>
+    <p:extLst>
+      <p:ext uri="{BB962C8B-B14F-4D97-AF65-F5344CB8AC3E}">
+        <p14:creationId xmlns:p14="http://schemas.microsoft.com/office/powerpoint/2010/main" val="1024086991"/>
+      </p:ext>
+    </p:extLst>
+  </p:cSld>
+  <p:clrMapOvr>
+    <a:masterClrMapping/>
+  </p:clrMapOvr>
+</p:notes>
+</file>
+
+<file path=ppt/notesSlides/notesSlide13.xml><?xml version="1.0" encoding="utf-8"?>
+<p:notes xmlns:a="http://schemas.openxmlformats.org/drawingml/2006/main" xmlns:r="http://schemas.openxmlformats.org/officeDocument/2006/relationships" xmlns:p="http://schemas.openxmlformats.org/presentationml/2006/main">
+  <p:cSld>
+    <p:spTree>
+      <p:nvGrpSpPr>
+        <p:cNvPr id="1" name=""/>
+        <p:cNvGrpSpPr/>
+        <p:nvPr/>
+      </p:nvGrpSpPr>
+      <p:grpSpPr>
+        <a:xfrm>
+          <a:off x="0" y="0"/>
+          <a:ext cx="0" cy="0"/>
+          <a:chOff x="0" y="0"/>
+          <a:chExt cx="0" cy="0"/>
+        </a:xfrm>
+      </p:grpSpPr>
+      <p:sp>
+        <p:nvSpPr>
+          <p:cNvPr id="2" name="Slide Image Placeholder 1"/>
+          <p:cNvSpPr>
+            <a:spLocks noGrp="1" noRot="1" noChangeAspect="1"/>
+          </p:cNvSpPr>
+          <p:nvPr>
+            <p:ph type="sldImg"/>
+          </p:nvPr>
+        </p:nvSpPr>
+        <p:spPr/>
+      </p:sp>
+      <p:sp>
+        <p:nvSpPr>
+          <p:cNvPr id="3" name="Notes Placeholder 2"/>
+          <p:cNvSpPr>
+            <a:spLocks noGrp="1"/>
+          </p:cNvSpPr>
+          <p:nvPr>
+            <p:ph type="body" idx="1"/>
+          </p:nvPr>
+        </p:nvSpPr>
+        <p:spPr/>
+        <p:txBody>
+          <a:bodyPr/>
+          <a:lstStyle/>
+          <a:p>
+            <a:endParaRPr lang="en-US" dirty="0"/>
+          </a:p>
+        </p:txBody>
+      </p:sp>
+      <p:sp>
+        <p:nvSpPr>
+          <p:cNvPr id="4" name="Slide Number Placeholder 3"/>
+          <p:cNvSpPr>
+            <a:spLocks noGrp="1"/>
+          </p:cNvSpPr>
+          <p:nvPr>
+            <p:ph type="sldNum" sz="quarter" idx="10"/>
+          </p:nvPr>
+        </p:nvSpPr>
+        <p:spPr/>
+        <p:txBody>
+          <a:bodyPr/>
+          <a:lstStyle/>
+          <a:p>
+            <a:pPr marL="0" marR="0" lvl="0" indent="0" algn="l" defTabSz="914400" rtl="0" eaLnBrk="1" fontAlgn="auto" latinLnBrk="0" hangingPunct="1">
+              <a:lnSpc>
+                <a:spcPct val="100000"/>
+              </a:lnSpc>
+              <a:spcBef>
+                <a:spcPts val="0"/>
+              </a:spcBef>
+              <a:spcAft>
+                <a:spcPts val="0"/>
+              </a:spcAft>
+              <a:buClrTx/>
+              <a:buSzTx/>
+              <a:buFontTx/>
+              <a:buNone/>
+              <a:tabLst/>
+              <a:defRPr/>
+            </a:pPr>
+            <a:fld id="{F7021451-1387-4CA6-816F-3879F97B5CBC}" type="slidenum">
+              <a:rPr kumimoji="0" lang="en-US" sz="1800" b="0" i="0" u="none" strike="noStrike" kern="1200" cap="none" spc="0" normalizeH="0" baseline="0" noProof="0">
+                <a:ln>
+                  <a:noFill/>
+                </a:ln>
+                <a:solidFill>
+                  <a:prstClr val="black"/>
+                </a:solidFill>
+                <a:effectLst/>
+                <a:uLnTx/>
+                <a:uFillTx/>
+                <a:latin typeface="Aptos" panose="02110004020202020204"/>
+                <a:ea typeface="+mn-ea"/>
+                <a:cs typeface="+mn-cs"/>
+              </a:rPr>
+              <a:pPr marL="0" marR="0" lvl="0" indent="0" algn="l" defTabSz="914400" rtl="0" eaLnBrk="1" fontAlgn="auto" latinLnBrk="0" hangingPunct="1">
+                <a:lnSpc>
+                  <a:spcPct val="100000"/>
+                </a:lnSpc>
+                <a:spcBef>
+                  <a:spcPts val="0"/>
+                </a:spcBef>
+                <a:spcAft>
+                  <a:spcPts val="0"/>
+                </a:spcAft>
+                <a:buClrTx/>
+                <a:buSzTx/>
+                <a:buFontTx/>
+                <a:buNone/>
+                <a:tabLst/>
+                <a:defRPr/>
+              </a:pPr>
+              <a:t>14</a:t>
+            </a:fld>
+            <a:endParaRPr kumimoji="0" lang="en-US" sz="1800" b="0" i="0" u="none" strike="noStrike" kern="1200" cap="none" spc="0" normalizeH="0" baseline="0" noProof="0">
+              <a:ln>
+                <a:noFill/>
+              </a:ln>
+              <a:solidFill>
+                <a:prstClr val="black"/>
+              </a:solidFill>
+              <a:effectLst/>
+              <a:uLnTx/>
+              <a:uFillTx/>
+              <a:latin typeface="Aptos" panose="02110004020202020204"/>
+              <a:ea typeface="+mn-ea"/>
+              <a:cs typeface="+mn-cs"/>
+            </a:endParaRPr>
+          </a:p>
+        </p:txBody>
+      </p:sp>
+    </p:spTree>
+    <p:extLst>
+      <p:ext uri="{BB962C8B-B14F-4D97-AF65-F5344CB8AC3E}">
+        <p14:creationId xmlns:p14="http://schemas.microsoft.com/office/powerpoint/2010/main" val="1024086991"/>
+      </p:ext>
+    </p:extLst>
+  </p:cSld>
+  <p:clrMapOvr>
+    <a:masterClrMapping/>
+  </p:clrMapOvr>
+</p:notes>
+</file>
+
+<file path=ppt/notesSlides/notesSlide14.xml><?xml version="1.0" encoding="utf-8"?>
+<p:notes xmlns:a="http://schemas.openxmlformats.org/drawingml/2006/main" xmlns:r="http://schemas.openxmlformats.org/officeDocument/2006/relationships" xmlns:p="http://schemas.openxmlformats.org/presentationml/2006/main">
+  <p:cSld>
+    <p:spTree>
+      <p:nvGrpSpPr>
+        <p:cNvPr id="1" name=""/>
+        <p:cNvGrpSpPr/>
+        <p:nvPr/>
+      </p:nvGrpSpPr>
+      <p:grpSpPr>
+        <a:xfrm>
+          <a:off x="0" y="0"/>
+          <a:ext cx="0" cy="0"/>
+          <a:chOff x="0" y="0"/>
+          <a:chExt cx="0" cy="0"/>
+        </a:xfrm>
+      </p:grpSpPr>
+      <p:sp>
+        <p:nvSpPr>
+          <p:cNvPr id="2" name="Slide Image Placeholder 1"/>
+          <p:cNvSpPr>
+            <a:spLocks noGrp="1" noRot="1" noChangeAspect="1"/>
+          </p:cNvSpPr>
+          <p:nvPr>
+            <p:ph type="sldImg"/>
+          </p:nvPr>
+        </p:nvSpPr>
+        <p:spPr/>
+      </p:sp>
+      <p:sp>
+        <p:nvSpPr>
+          <p:cNvPr id="3" name="Notes Placeholder 2"/>
+          <p:cNvSpPr>
+            <a:spLocks noGrp="1"/>
+          </p:cNvSpPr>
+          <p:nvPr>
+            <p:ph type="body" idx="1"/>
+          </p:nvPr>
+        </p:nvSpPr>
+        <p:spPr/>
+        <p:txBody>
+          <a:bodyPr/>
+          <a:lstStyle/>
+          <a:p>
+            <a:endParaRPr lang="en-US" dirty="0"/>
+          </a:p>
+        </p:txBody>
+      </p:sp>
+      <p:sp>
+        <p:nvSpPr>
+          <p:cNvPr id="4" name="Slide Number Placeholder 3"/>
+          <p:cNvSpPr>
+            <a:spLocks noGrp="1"/>
+          </p:cNvSpPr>
+          <p:nvPr>
+            <p:ph type="sldNum" sz="quarter" idx="10"/>
+          </p:nvPr>
+        </p:nvSpPr>
+        <p:spPr/>
+        <p:txBody>
+          <a:bodyPr/>
+          <a:lstStyle/>
+          <a:p>
+            <a:pPr marL="0" marR="0" lvl="0" indent="0" algn="l" defTabSz="914400" rtl="0" eaLnBrk="1" fontAlgn="auto" latinLnBrk="0" hangingPunct="1">
+              <a:lnSpc>
+                <a:spcPct val="100000"/>
+              </a:lnSpc>
+              <a:spcBef>
+                <a:spcPts val="0"/>
+              </a:spcBef>
+              <a:spcAft>
+                <a:spcPts val="0"/>
+              </a:spcAft>
+              <a:buClrTx/>
+              <a:buSzTx/>
+              <a:buFontTx/>
+              <a:buNone/>
+              <a:tabLst/>
+              <a:defRPr/>
+            </a:pPr>
+            <a:fld id="{F7021451-1387-4CA6-816F-3879F97B5CBC}" type="slidenum">
+              <a:rPr kumimoji="0" lang="en-US" sz="1800" b="0" i="0" u="none" strike="noStrike" kern="1200" cap="none" spc="0" normalizeH="0" baseline="0" noProof="0">
+                <a:ln>
+                  <a:noFill/>
+                </a:ln>
+                <a:solidFill>
+                  <a:prstClr val="black"/>
+                </a:solidFill>
+                <a:effectLst/>
+                <a:uLnTx/>
+                <a:uFillTx/>
+                <a:latin typeface="Aptos" panose="02110004020202020204"/>
+                <a:ea typeface="+mn-ea"/>
+                <a:cs typeface="+mn-cs"/>
+              </a:rPr>
+              <a:pPr marL="0" marR="0" lvl="0" indent="0" algn="l" defTabSz="914400" rtl="0" eaLnBrk="1" fontAlgn="auto" latinLnBrk="0" hangingPunct="1">
+                <a:lnSpc>
+                  <a:spcPct val="100000"/>
+                </a:lnSpc>
+                <a:spcBef>
+                  <a:spcPts val="0"/>
+                </a:spcBef>
+                <a:spcAft>
+                  <a:spcPts val="0"/>
+                </a:spcAft>
+                <a:buClrTx/>
+                <a:buSzTx/>
+                <a:buFontTx/>
+                <a:buNone/>
+                <a:tabLst/>
+                <a:defRPr/>
+              </a:pPr>
+              <a:t>15</a:t>
+            </a:fld>
+            <a:endParaRPr kumimoji="0" lang="en-US" sz="1800" b="0" i="0" u="none" strike="noStrike" kern="1200" cap="none" spc="0" normalizeH="0" baseline="0" noProof="0">
+              <a:ln>
+                <a:noFill/>
+              </a:ln>
+              <a:solidFill>
+                <a:prstClr val="black"/>
+              </a:solidFill>
+              <a:effectLst/>
+              <a:uLnTx/>
+              <a:uFillTx/>
+              <a:latin typeface="Aptos" panose="02110004020202020204"/>
+              <a:ea typeface="+mn-ea"/>
+              <a:cs typeface="+mn-cs"/>
+            </a:endParaRPr>
+          </a:p>
+        </p:txBody>
+      </p:sp>
+    </p:spTree>
+    <p:extLst>
+      <p:ext uri="{BB962C8B-B14F-4D97-AF65-F5344CB8AC3E}">
+        <p14:creationId xmlns:p14="http://schemas.microsoft.com/office/powerpoint/2010/main" val="1024086991"/>
+      </p:ext>
+    </p:extLst>
+  </p:cSld>
+  <p:clrMapOvr>
+    <a:masterClrMapping/>
+  </p:clrMapOvr>
+</p:notes>
+</file>
+
 <file path=ppt/notesSlides/notesSlide2.xml><?xml version="1.0" encoding="utf-8"?>
 <p:notes xmlns:a="http://schemas.openxmlformats.org/drawingml/2006/main" xmlns:r="http://schemas.openxmlformats.org/officeDocument/2006/relationships" xmlns:p="http://schemas.openxmlformats.org/presentationml/2006/main">
   <p:cSld>
@@ -4637,7 +5003,7 @@
           <a:p>
             <a:fld id="{A9C7556D-DCD1-4FB9-8695-8902D801681B}" type="datetimeFigureOut">
               <a:rPr lang="en-IN" smtClean="0"/>
-              <a:t>23-10-2026</a:t>
+              <a:t>27-10-2026</a:t>
             </a:fld>
             <a:endParaRPr lang="en-IN"/>
           </a:p>
@@ -4837,7 +5203,7 @@
           <a:p>
             <a:fld id="{A9C7556D-DCD1-4FB9-8695-8902D801681B}" type="datetimeFigureOut">
               <a:rPr lang="en-IN" smtClean="0"/>
-              <a:t>23-10-2026</a:t>
+              <a:t>27-10-2026</a:t>
             </a:fld>
             <a:endParaRPr lang="en-IN"/>
           </a:p>
@@ -5047,7 +5413,7 @@
           <a:p>
             <a:fld id="{A9C7556D-DCD1-4FB9-8695-8902D801681B}" type="datetimeFigureOut">
               <a:rPr lang="en-IN" smtClean="0"/>
-              <a:t>23-10-2026</a:t>
+              <a:t>27-10-2026</a:t>
             </a:fld>
             <a:endParaRPr lang="en-IN"/>
           </a:p>
@@ -6109,7 +6475,7 @@
           <a:p>
             <a:fld id="{A9C7556D-DCD1-4FB9-8695-8902D801681B}" type="datetimeFigureOut">
               <a:rPr lang="en-IN" smtClean="0"/>
-              <a:t>23-10-2026</a:t>
+              <a:t>27-10-2026</a:t>
             </a:fld>
             <a:endParaRPr lang="en-IN"/>
           </a:p>
@@ -6252,6 +6618,179 @@
     <p:extLst>
       <p:ext uri="{BB962C8B-B14F-4D97-AF65-F5344CB8AC3E}">
         <p14:creationId xmlns:p14="http://schemas.microsoft.com/office/powerpoint/2010/main" val="1052629249"/>
+      </p:ext>
+    </p:extLst>
+  </p:cSld>
+  <p:clrMapOvr>
+    <a:masterClrMapping/>
+  </p:clrMapOvr>
+</p:sldLayout>
+</file>
+
+<file path=ppt/slideLayouts/slideLayout21.xml><?xml version="1.0" encoding="utf-8"?>
+<p:sldLayout xmlns:a="http://schemas.openxmlformats.org/drawingml/2006/main" xmlns:r="http://schemas.openxmlformats.org/officeDocument/2006/relationships" xmlns:p="http://schemas.openxmlformats.org/presentationml/2006/main" preserve="1">
+  <p:cSld name="DEFAULT">
+    <p:bg>
+      <p:bgRef idx="1001">
+        <a:schemeClr val="bg1"/>
+      </p:bgRef>
+    </p:bg>
+    <p:spTree>
+      <p:nvGrpSpPr>
+        <p:cNvPr id="1" name=""/>
+        <p:cNvGrpSpPr/>
+        <p:nvPr/>
+      </p:nvGrpSpPr>
+      <p:grpSpPr>
+        <a:xfrm>
+          <a:off x="0" y="0"/>
+          <a:ext cx="0" cy="0"/>
+          <a:chOff x="0" y="0"/>
+          <a:chExt cx="0" cy="0"/>
+        </a:xfrm>
+      </p:grpSpPr>
+    </p:spTree>
+    <p:extLst>
+      <p:ext uri="{BB962C8B-B14F-4D97-AF65-F5344CB8AC3E}">
+        <p14:creationId xmlns:p14="http://schemas.microsoft.com/office/powerpoint/2010/main" val="2098972571"/>
+      </p:ext>
+    </p:extLst>
+  </p:cSld>
+  <p:clrMapOvr>
+    <a:masterClrMapping/>
+  </p:clrMapOvr>
+</p:sldLayout>
+</file>
+
+<file path=ppt/slideLayouts/slideLayout22.xml><?xml version="1.0" encoding="utf-8"?>
+<p:sldLayout xmlns:a="http://schemas.openxmlformats.org/drawingml/2006/main" xmlns:r="http://schemas.openxmlformats.org/officeDocument/2006/relationships" xmlns:p="http://schemas.openxmlformats.org/presentationml/2006/main" preserve="1">
+  <p:cSld name="Title and body">
+    <p:bg>
+      <p:bgPr>
+        <a:solidFill>
+          <a:srgbClr val="14181F"/>
+        </a:solidFill>
+        <a:effectLst/>
+      </p:bgPr>
+    </p:bg>
+    <p:spTree>
+      <p:nvGrpSpPr>
+        <p:cNvPr id="1" name=""/>
+        <p:cNvGrpSpPr/>
+        <p:nvPr/>
+      </p:nvGrpSpPr>
+      <p:grpSpPr>
+        <a:xfrm>
+          <a:off x="0" y="0"/>
+          <a:ext cx="0" cy="0"/>
+          <a:chOff x="0" y="0"/>
+          <a:chExt cx="0" cy="0"/>
+        </a:xfrm>
+      </p:grpSpPr>
+      <p:sp>
+        <p:nvSpPr>
+          <p:cNvPr id="2" name="Title Placeholder 1"/>
+          <p:cNvSpPr>
+            <a:spLocks noGrp="1"/>
+          </p:cNvSpPr>
+          <p:nvPr>
+            <p:ph type="title"/>
+          </p:nvPr>
+        </p:nvSpPr>
+        <p:spPr>
+          <a:xfrm>
+            <a:off x="812800" y="2633960"/>
+            <a:ext cx="10566400" cy="614660"/>
+          </a:xfrm>
+          <a:prstGeom prst="rect">
+            <a:avLst/>
+          </a:prstGeom>
+          <a:noFill/>
+          <a:ln/>
+        </p:spPr>
+        <p:txBody>
+          <a:bodyPr wrap="square" lIns="0" tIns="0" rIns="0" bIns="0" rtlCol="0" anchor="t"/>
+          <a:lstStyle>
+            <a:lvl1pPr marL="0" indent="0" algn="l">
+              <a:lnSpc>
+                <a:spcPct val="115000"/>
+              </a:lnSpc>
+              <a:buNone/>
+              <a:defRPr lang="en-US" sz="4400" dirty="0">
+                <a:solidFill>
+                  <a:srgbClr val="F6F4EF"/>
+                </a:solidFill>
+                <a:latin typeface="Helvetica" pitchFamily="34" charset="0"/>
+                <a:ea typeface="Helvetica" pitchFamily="34" charset="-122"/>
+                <a:cs typeface="Helvetica" pitchFamily="34" charset="-120"/>
+              </a:defRPr>
+            </a:lvl1pPr>
+          </a:lstStyle>
+          <a:p>
+            <a:pPr marL="0" indent="0" algn="l">
+              <a:lnSpc>
+                <a:spcPct val="115000"/>
+              </a:lnSpc>
+              <a:buNone/>
+            </a:pPr>
+            <a:endParaRPr lang="en-US" sz="4400" dirty="0"/>
+          </a:p>
+        </p:txBody>
+      </p:sp>
+      <p:sp>
+        <p:nvSpPr>
+          <p:cNvPr id="3" name="Text Placeholder 2"/>
+          <p:cNvSpPr>
+            <a:spLocks noGrp="1"/>
+          </p:cNvSpPr>
+          <p:nvPr>
+            <p:ph type="body" idx="101"/>
+          </p:nvPr>
+        </p:nvSpPr>
+        <p:spPr>
+          <a:xfrm>
+            <a:off x="812800" y="3553420"/>
+            <a:ext cx="10566400" cy="2491780"/>
+          </a:xfrm>
+          <a:prstGeom prst="rect">
+            <a:avLst/>
+          </a:prstGeom>
+          <a:noFill/>
+          <a:ln/>
+        </p:spPr>
+        <p:txBody>
+          <a:bodyPr wrap="square" lIns="0" tIns="0" rIns="0" bIns="0" rtlCol="0" anchor="t"/>
+          <a:lstStyle>
+            <a:lvl1pPr marL="0" indent="0" algn="l">
+              <a:lnSpc>
+                <a:spcPct val="140000"/>
+              </a:lnSpc>
+              <a:buNone/>
+              <a:defRPr lang="en-US" sz="1600" dirty="0">
+                <a:solidFill>
+                  <a:srgbClr val="F6F4EF"/>
+                </a:solidFill>
+                <a:latin typeface="Helvetica" pitchFamily="34" charset="0"/>
+                <a:ea typeface="Helvetica" pitchFamily="34" charset="-122"/>
+                <a:cs typeface="Helvetica" pitchFamily="34" charset="-120"/>
+              </a:defRPr>
+            </a:lvl1pPr>
+          </a:lstStyle>
+          <a:p>
+            <a:pPr marL="0" indent="0" algn="l">
+              <a:lnSpc>
+                <a:spcPct val="140000"/>
+              </a:lnSpc>
+              <a:buNone/>
+            </a:pPr>
+            <a:endParaRPr lang="en-US" sz="1600" dirty="0"/>
+          </a:p>
+        </p:txBody>
+      </p:sp>
+    </p:spTree>
+    <p:extLst>
+      <p:ext uri="{BB962C8B-B14F-4D97-AF65-F5344CB8AC3E}">
+        <p14:creationId xmlns:p14="http://schemas.microsoft.com/office/powerpoint/2010/main" val="216913763"/>
       </p:ext>
     </p:extLst>
   </p:cSld>
@@ -6464,7 +7003,7 @@
           <a:p>
             <a:fld id="{A9C7556D-DCD1-4FB9-8695-8902D801681B}" type="datetimeFigureOut">
               <a:rPr lang="en-IN" smtClean="0"/>
-              <a:t>23-10-2026</a:t>
+              <a:t>27-10-2026</a:t>
             </a:fld>
             <a:endParaRPr lang="en-IN"/>
           </a:p>
@@ -6732,7 +7271,7 @@
           <a:p>
             <a:fld id="{A9C7556D-DCD1-4FB9-8695-8902D801681B}" type="datetimeFigureOut">
               <a:rPr lang="en-IN" smtClean="0"/>
-              <a:t>23-10-2026</a:t>
+              <a:t>27-10-2026</a:t>
             </a:fld>
             <a:endParaRPr lang="en-IN"/>
           </a:p>
@@ -7147,7 +7686,7 @@
           <a:p>
             <a:fld id="{A9C7556D-DCD1-4FB9-8695-8902D801681B}" type="datetimeFigureOut">
               <a:rPr lang="en-IN" smtClean="0"/>
-              <a:t>23-10-2026</a:t>
+              <a:t>27-10-2026</a:t>
             </a:fld>
             <a:endParaRPr lang="en-IN"/>
           </a:p>
@@ -7289,7 +7828,7 @@
           <a:p>
             <a:fld id="{A9C7556D-DCD1-4FB9-8695-8902D801681B}" type="datetimeFigureOut">
               <a:rPr lang="en-IN" smtClean="0"/>
-              <a:t>23-10-2026</a:t>
+              <a:t>27-10-2026</a:t>
             </a:fld>
             <a:endParaRPr lang="en-IN"/>
           </a:p>
@@ -7402,7 +7941,7 @@
           <a:p>
             <a:fld id="{A9C7556D-DCD1-4FB9-8695-8902D801681B}" type="datetimeFigureOut">
               <a:rPr lang="en-IN" smtClean="0"/>
-              <a:t>23-10-2026</a:t>
+              <a:t>27-10-2026</a:t>
             </a:fld>
             <a:endParaRPr lang="en-IN"/>
           </a:p>
@@ -7715,7 +8254,7 @@
           <a:p>
             <a:fld id="{A9C7556D-DCD1-4FB9-8695-8902D801681B}" type="datetimeFigureOut">
               <a:rPr lang="en-IN" smtClean="0"/>
-              <a:t>23-10-2026</a:t>
+              <a:t>27-10-2026</a:t>
             </a:fld>
             <a:endParaRPr lang="en-IN"/>
           </a:p>
@@ -8004,7 +8543,7 @@
           <a:p>
             <a:fld id="{A9C7556D-DCD1-4FB9-8695-8902D801681B}" type="datetimeFigureOut">
               <a:rPr lang="en-IN" smtClean="0"/>
-              <a:t>23-10-2026</a:t>
+              <a:t>27-10-2026</a:t>
             </a:fld>
             <a:endParaRPr lang="en-IN"/>
           </a:p>
@@ -8247,7 +8786,7 @@
           <a:p>
             <a:fld id="{A9C7556D-DCD1-4FB9-8695-8902D801681B}" type="datetimeFigureOut">
               <a:rPr lang="en-IN" smtClean="0"/>
-              <a:t>23-10-2026</a:t>
+              <a:t>27-10-2026</a:t>
             </a:fld>
             <a:endParaRPr lang="en-IN"/>
           </a:p>
@@ -9759,6 +10298,397 @@
 </p:sldMaster>
 </file>
 
+<file path=ppt/slideMasters/slideMaster5.xml><?xml version="1.0" encoding="utf-8"?>
+<p:sldMaster xmlns:a="http://schemas.openxmlformats.org/drawingml/2006/main" xmlns:r="http://schemas.openxmlformats.org/officeDocument/2006/relationships" xmlns:p="http://schemas.openxmlformats.org/presentationml/2006/main">
+  <p:cSld>
+    <p:bg>
+      <p:bgPr>
+        <a:solidFill>
+          <a:srgbClr val="14181F"/>
+        </a:solidFill>
+        <a:effectLst/>
+      </p:bgPr>
+    </p:bg>
+    <p:spTree>
+      <p:nvGrpSpPr>
+        <p:cNvPr id="1" name=""/>
+        <p:cNvGrpSpPr/>
+        <p:nvPr/>
+      </p:nvGrpSpPr>
+      <p:grpSpPr>
+        <a:xfrm>
+          <a:off x="0" y="0"/>
+          <a:ext cx="0" cy="0"/>
+          <a:chOff x="0" y="0"/>
+          <a:chExt cx="0" cy="0"/>
+        </a:xfrm>
+      </p:grpSpPr>
+      <p:sp>
+        <p:nvSpPr>
+          <p:cNvPr id="2" name="Title Placeholder 1"/>
+          <p:cNvSpPr>
+            <a:spLocks noGrp="1"/>
+          </p:cNvSpPr>
+          <p:nvPr>
+            <p:ph type="title"/>
+          </p:nvPr>
+        </p:nvSpPr>
+        <p:spPr>
+          <a:xfrm>
+            <a:off x="812800" y="2633960"/>
+            <a:ext cx="10566400" cy="614660"/>
+          </a:xfrm>
+          <a:prstGeom prst="rect">
+            <a:avLst/>
+          </a:prstGeom>
+          <a:noFill/>
+          <a:ln/>
+        </p:spPr>
+        <p:txBody>
+          <a:bodyPr wrap="square" lIns="0" tIns="0" rIns="0" bIns="0" rtlCol="0" anchor="t"/>
+          <a:lstStyle>
+            <a:lvl1pPr marL="0" indent="0" algn="l">
+              <a:lnSpc>
+                <a:spcPct val="115000"/>
+              </a:lnSpc>
+              <a:buNone/>
+              <a:defRPr lang="en-US" sz="4400" dirty="0">
+                <a:solidFill>
+                  <a:srgbClr val="F6F4EF"/>
+                </a:solidFill>
+                <a:latin typeface="Helvetica" pitchFamily="34" charset="0"/>
+                <a:ea typeface="Helvetica" pitchFamily="34" charset="-122"/>
+                <a:cs typeface="Helvetica" pitchFamily="34" charset="-120"/>
+              </a:defRPr>
+            </a:lvl1pPr>
+          </a:lstStyle>
+          <a:p>
+            <a:pPr marL="0" indent="0" algn="l">
+              <a:lnSpc>
+                <a:spcPct val="115000"/>
+              </a:lnSpc>
+              <a:buNone/>
+            </a:pPr>
+            <a:endParaRPr lang="en-US" sz="4400" dirty="0"/>
+          </a:p>
+        </p:txBody>
+      </p:sp>
+      <p:sp>
+        <p:nvSpPr>
+          <p:cNvPr id="3" name="Text Placeholder 2"/>
+          <p:cNvSpPr>
+            <a:spLocks noGrp="1"/>
+          </p:cNvSpPr>
+          <p:nvPr>
+            <p:ph type="body" idx="101"/>
+          </p:nvPr>
+        </p:nvSpPr>
+        <p:spPr>
+          <a:xfrm>
+            <a:off x="812800" y="3553420"/>
+            <a:ext cx="10566400" cy="2491780"/>
+          </a:xfrm>
+          <a:prstGeom prst="rect">
+            <a:avLst/>
+          </a:prstGeom>
+          <a:noFill/>
+          <a:ln/>
+        </p:spPr>
+        <p:txBody>
+          <a:bodyPr wrap="square" lIns="0" tIns="0" rIns="0" bIns="0" rtlCol="0" anchor="t"/>
+          <a:lstStyle>
+            <a:lvl1pPr marL="0" indent="0" algn="l">
+              <a:lnSpc>
+                <a:spcPct val="140000"/>
+              </a:lnSpc>
+              <a:buNone/>
+              <a:defRPr lang="en-US" sz="1600" dirty="0">
+                <a:solidFill>
+                  <a:srgbClr val="F6F4EF"/>
+                </a:solidFill>
+                <a:latin typeface="Helvetica" pitchFamily="34" charset="0"/>
+                <a:ea typeface="Helvetica" pitchFamily="34" charset="-122"/>
+                <a:cs typeface="Helvetica" pitchFamily="34" charset="-120"/>
+              </a:defRPr>
+            </a:lvl1pPr>
+          </a:lstStyle>
+          <a:p>
+            <a:pPr marL="0" indent="0" algn="l">
+              <a:lnSpc>
+                <a:spcPct val="140000"/>
+              </a:lnSpc>
+              <a:buNone/>
+            </a:pPr>
+            <a:endParaRPr lang="en-US" sz="1600" dirty="0"/>
+          </a:p>
+        </p:txBody>
+      </p:sp>
+    </p:spTree>
+    <p:extLst>
+      <p:ext uri="{BB962C8B-B14F-4D97-AF65-F5344CB8AC3E}">
+        <p14:creationId xmlns:p14="http://schemas.microsoft.com/office/powerpoint/2010/main" val="2166983945"/>
+      </p:ext>
+    </p:extLst>
+  </p:cSld>
+  <p:clrMap bg1="dk1" tx1="lt1" bg2="dk2" tx2="lt2" accent1="accent1" accent2="accent2" accent3="accent3" accent4="accent4" accent5="accent5" accent6="accent6" hlink="hlink" folHlink="folHlink"/>
+  <p:sldLayoutIdLst>
+    <p:sldLayoutId id="2147483692" r:id="rId1"/>
+    <p:sldLayoutId id="2147483693" r:id="rId2"/>
+  </p:sldLayoutIdLst>
+  <p:hf sldNum="0" hdr="0" ftr="0" dt="0"/>
+  <p:txStyles>
+    <p:titleStyle>
+      <a:lvl1pPr algn="ctr" defTabSz="914400" rtl="0" eaLnBrk="1" latinLnBrk="0" hangingPunct="1">
+        <a:spcBef>
+          <a:spcPct val="0"/>
+        </a:spcBef>
+        <a:buNone/>
+        <a:defRPr sz="4400" kern="1200">
+          <a:solidFill>
+            <a:schemeClr val="tx1"/>
+          </a:solidFill>
+          <a:latin typeface="+mj-lt"/>
+          <a:ea typeface="+mj-ea"/>
+          <a:cs typeface="+mj-cs"/>
+        </a:defRPr>
+      </a:lvl1pPr>
+    </p:titleStyle>
+    <p:bodyStyle>
+      <a:lvl1pPr marL="342900" indent="-342900" algn="l" defTabSz="914400" rtl="0" eaLnBrk="1" latinLnBrk="0" hangingPunct="1">
+        <a:spcBef>
+          <a:spcPct val="20000"/>
+        </a:spcBef>
+        <a:buFont typeface="Arial" pitchFamily="34" charset="0"/>
+        <a:buChar char="•"/>
+        <a:defRPr sz="3200" kern="1200">
+          <a:solidFill>
+            <a:schemeClr val="tx1"/>
+          </a:solidFill>
+          <a:latin typeface="+mn-lt"/>
+          <a:ea typeface="+mn-ea"/>
+          <a:cs typeface="+mn-cs"/>
+        </a:defRPr>
+      </a:lvl1pPr>
+      <a:lvl2pPr marL="742950" indent="-285750" algn="l" defTabSz="914400" rtl="0" eaLnBrk="1" latinLnBrk="0" hangingPunct="1">
+        <a:spcBef>
+          <a:spcPct val="20000"/>
+        </a:spcBef>
+        <a:buFont typeface="Arial" pitchFamily="34" charset="0"/>
+        <a:buChar char="–"/>
+        <a:defRPr sz="2800" kern="1200">
+          <a:solidFill>
+            <a:schemeClr val="tx1"/>
+          </a:solidFill>
+          <a:latin typeface="+mn-lt"/>
+          <a:ea typeface="+mn-ea"/>
+          <a:cs typeface="+mn-cs"/>
+        </a:defRPr>
+      </a:lvl2pPr>
+      <a:lvl3pPr marL="1143000" indent="-228600" algn="l" defTabSz="914400" rtl="0" eaLnBrk="1" latinLnBrk="0" hangingPunct="1">
+        <a:spcBef>
+          <a:spcPct val="20000"/>
+        </a:spcBef>
+        <a:buFont typeface="Arial" pitchFamily="34" charset="0"/>
+        <a:buChar char="•"/>
+        <a:defRPr sz="2400" kern="1200">
+          <a:solidFill>
+            <a:schemeClr val="tx1"/>
+          </a:solidFill>
+          <a:latin typeface="+mn-lt"/>
+          <a:ea typeface="+mn-ea"/>
+          <a:cs typeface="+mn-cs"/>
+        </a:defRPr>
+      </a:lvl3pPr>
+      <a:lvl4pPr marL="1600200" indent="-228600" algn="l" defTabSz="914400" rtl="0" eaLnBrk="1" latinLnBrk="0" hangingPunct="1">
+        <a:spcBef>
+          <a:spcPct val="20000"/>
+        </a:spcBef>
+        <a:buFont typeface="Arial" pitchFamily="34" charset="0"/>
+        <a:buChar char="–"/>
+        <a:defRPr sz="2000" kern="1200">
+          <a:solidFill>
+            <a:schemeClr val="tx1"/>
+          </a:solidFill>
+          <a:latin typeface="+mn-lt"/>
+          <a:ea typeface="+mn-ea"/>
+          <a:cs typeface="+mn-cs"/>
+        </a:defRPr>
+      </a:lvl4pPr>
+      <a:lvl5pPr marL="2057400" indent="-228600" algn="l" defTabSz="914400" rtl="0" eaLnBrk="1" latinLnBrk="0" hangingPunct="1">
+        <a:spcBef>
+          <a:spcPct val="20000"/>
+        </a:spcBef>
+        <a:buFont typeface="Arial" pitchFamily="34" charset="0"/>
+        <a:buChar char="»"/>
+        <a:defRPr sz="2000" kern="1200">
+          <a:solidFill>
+            <a:schemeClr val="tx1"/>
+          </a:solidFill>
+          <a:latin typeface="+mn-lt"/>
+          <a:ea typeface="+mn-ea"/>
+          <a:cs typeface="+mn-cs"/>
+        </a:defRPr>
+      </a:lvl5pPr>
+      <a:lvl6pPr marL="2514600" indent="-228600" algn="l" defTabSz="914400" rtl="0" eaLnBrk="1" latinLnBrk="0" hangingPunct="1">
+        <a:spcBef>
+          <a:spcPct val="20000"/>
+        </a:spcBef>
+        <a:buFont typeface="Arial" pitchFamily="34" charset="0"/>
+        <a:buChar char="•"/>
+        <a:defRPr sz="2000" kern="1200">
+          <a:solidFill>
+            <a:schemeClr val="tx1"/>
+          </a:solidFill>
+          <a:latin typeface="+mn-lt"/>
+          <a:ea typeface="+mn-ea"/>
+          <a:cs typeface="+mn-cs"/>
+        </a:defRPr>
+      </a:lvl6pPr>
+      <a:lvl7pPr marL="2971800" indent="-228600" algn="l" defTabSz="914400" rtl="0" eaLnBrk="1" latinLnBrk="0" hangingPunct="1">
+        <a:spcBef>
+          <a:spcPct val="20000"/>
+        </a:spcBef>
+        <a:buFont typeface="Arial" pitchFamily="34" charset="0"/>
+        <a:buChar char="•"/>
+        <a:defRPr sz="2000" kern="1200">
+          <a:solidFill>
+            <a:schemeClr val="tx1"/>
+          </a:solidFill>
+          <a:latin typeface="+mn-lt"/>
+          <a:ea typeface="+mn-ea"/>
+          <a:cs typeface="+mn-cs"/>
+        </a:defRPr>
+      </a:lvl7pPr>
+      <a:lvl8pPr marL="3429000" indent="-228600" algn="l" defTabSz="914400" rtl="0" eaLnBrk="1" latinLnBrk="0" hangingPunct="1">
+        <a:spcBef>
+          <a:spcPct val="20000"/>
+        </a:spcBef>
+        <a:buFont typeface="Arial" pitchFamily="34" charset="0"/>
+        <a:buChar char="•"/>
+        <a:defRPr sz="2000" kern="1200">
+          <a:solidFill>
+            <a:schemeClr val="tx1"/>
+          </a:solidFill>
+          <a:latin typeface="+mn-lt"/>
+          <a:ea typeface="+mn-ea"/>
+          <a:cs typeface="+mn-cs"/>
+        </a:defRPr>
+      </a:lvl8pPr>
+      <a:lvl9pPr marL="3886200" indent="-228600" algn="l" defTabSz="914400" rtl="0" eaLnBrk="1" latinLnBrk="0" hangingPunct="1">
+        <a:spcBef>
+          <a:spcPct val="20000"/>
+        </a:spcBef>
+        <a:buFont typeface="Arial" pitchFamily="34" charset="0"/>
+        <a:buChar char="•"/>
+        <a:defRPr sz="2000" kern="1200">
+          <a:solidFill>
+            <a:schemeClr val="tx1"/>
+          </a:solidFill>
+          <a:latin typeface="+mn-lt"/>
+          <a:ea typeface="+mn-ea"/>
+          <a:cs typeface="+mn-cs"/>
+        </a:defRPr>
+      </a:lvl9pPr>
+    </p:bodyStyle>
+    <p:otherStyle>
+      <a:defPPr>
+        <a:defRPr lang="en-US"/>
+      </a:defPPr>
+      <a:lvl1pPr marL="0" algn="l" defTabSz="914400" rtl="0" eaLnBrk="1" latinLnBrk="0" hangingPunct="1">
+        <a:defRPr sz="1800" kern="1200">
+          <a:solidFill>
+            <a:schemeClr val="tx1"/>
+          </a:solidFill>
+          <a:latin typeface="+mn-lt"/>
+          <a:ea typeface="+mn-ea"/>
+          <a:cs typeface="+mn-cs"/>
+        </a:defRPr>
+      </a:lvl1pPr>
+      <a:lvl2pPr marL="457200" algn="l" defTabSz="914400" rtl="0" eaLnBrk="1" latinLnBrk="0" hangingPunct="1">
+        <a:defRPr sz="1800" kern="1200">
+          <a:solidFill>
+            <a:schemeClr val="tx1"/>
+          </a:solidFill>
+          <a:latin typeface="+mn-lt"/>
+          <a:ea typeface="+mn-ea"/>
+          <a:cs typeface="+mn-cs"/>
+        </a:defRPr>
+      </a:lvl2pPr>
+      <a:lvl3pPr marL="914400" algn="l" defTabSz="914400" rtl="0" eaLnBrk="1" latinLnBrk="0" hangingPunct="1">
+        <a:defRPr sz="1800" kern="1200">
+          <a:solidFill>
+            <a:schemeClr val="tx1"/>
+          </a:solidFill>
+          <a:latin typeface="+mn-lt"/>
+          <a:ea typeface="+mn-ea"/>
+          <a:cs typeface="+mn-cs"/>
+        </a:defRPr>
+      </a:lvl3pPr>
+      <a:lvl4pPr marL="1371600" algn="l" defTabSz="914400" rtl="0" eaLnBrk="1" latinLnBrk="0" hangingPunct="1">
+        <a:defRPr sz="1800" kern="1200">
+          <a:solidFill>
+            <a:schemeClr val="tx1"/>
+          </a:solidFill>
+          <a:latin typeface="+mn-lt"/>
+          <a:ea typeface="+mn-ea"/>
+          <a:cs typeface="+mn-cs"/>
+        </a:defRPr>
+      </a:lvl4pPr>
+      <a:lvl5pPr marL="1828800" algn="l" defTabSz="914400" rtl="0" eaLnBrk="1" latinLnBrk="0" hangingPunct="1">
+        <a:defRPr sz="1800" kern="1200">
+          <a:solidFill>
+            <a:schemeClr val="tx1"/>
+          </a:solidFill>
+          <a:latin typeface="+mn-lt"/>
+          <a:ea typeface="+mn-ea"/>
+          <a:cs typeface="+mn-cs"/>
+        </a:defRPr>
+      </a:lvl5pPr>
+      <a:lvl6pPr marL="2286000" algn="l" defTabSz="914400" rtl="0" eaLnBrk="1" latinLnBrk="0" hangingPunct="1">
+        <a:defRPr sz="1800" kern="1200">
+          <a:solidFill>
+            <a:schemeClr val="tx1"/>
+          </a:solidFill>
+          <a:latin typeface="+mn-lt"/>
+          <a:ea typeface="+mn-ea"/>
+          <a:cs typeface="+mn-cs"/>
+        </a:defRPr>
+      </a:lvl6pPr>
+      <a:lvl7pPr marL="2743200" algn="l" defTabSz="914400" rtl="0" eaLnBrk="1" latinLnBrk="0" hangingPunct="1">
+        <a:defRPr sz="1800" kern="1200">
+          <a:solidFill>
+            <a:schemeClr val="tx1"/>
+          </a:solidFill>
+          <a:latin typeface="+mn-lt"/>
+          <a:ea typeface="+mn-ea"/>
+          <a:cs typeface="+mn-cs"/>
+        </a:defRPr>
+      </a:lvl7pPr>
+      <a:lvl8pPr marL="3200400" algn="l" defTabSz="914400" rtl="0" eaLnBrk="1" latinLnBrk="0" hangingPunct="1">
+        <a:defRPr sz="1800" kern="1200">
+          <a:solidFill>
+            <a:schemeClr val="tx1"/>
+          </a:solidFill>
+          <a:latin typeface="+mn-lt"/>
+          <a:ea typeface="+mn-ea"/>
+          <a:cs typeface="+mn-cs"/>
+        </a:defRPr>
+      </a:lvl8pPr>
+      <a:lvl9pPr marL="3657600" algn="l" defTabSz="914400" rtl="0" eaLnBrk="1" latinLnBrk="0" hangingPunct="1">
+        <a:defRPr sz="1800" kern="1200">
+          <a:solidFill>
+            <a:schemeClr val="tx1"/>
+          </a:solidFill>
+          <a:latin typeface="+mn-lt"/>
+          <a:ea typeface="+mn-ea"/>
+          <a:cs typeface="+mn-cs"/>
+        </a:defRPr>
+      </a:lvl9pPr>
+    </p:otherStyle>
+  </p:txStyles>
+</p:sldMaster>
+</file>
+
 <file path=ppt/slides/slide1.xml><?xml version="1.0" encoding="utf-8"?>
 <p:sld xmlns:a="http://schemas.openxmlformats.org/drawingml/2006/main" xmlns:r="http://schemas.openxmlformats.org/officeDocument/2006/relationships" xmlns:p="http://schemas.openxmlformats.org/presentationml/2006/main">
   <p:cSld>
@@ -10846,6 +11776,2410 @@
 </file>
 
 <file path=ppt/slides/slide12.xml><?xml version="1.0" encoding="utf-8"?>
+<p:sld xmlns:a="http://schemas.openxmlformats.org/drawingml/2006/main" xmlns:r="http://schemas.openxmlformats.org/officeDocument/2006/relationships" xmlns:p="http://schemas.openxmlformats.org/presentationml/2006/main">
+  <p:cSld>
+    <p:bg>
+      <p:bgPr>
+        <a:solidFill>
+          <a:srgbClr val="F6F4EF"/>
+        </a:solidFill>
+        <a:effectLst/>
+      </p:bgPr>
+    </p:bg>
+    <p:spTree>
+      <p:nvGrpSpPr>
+        <p:cNvPr id="1" name=""/>
+        <p:cNvGrpSpPr/>
+        <p:nvPr/>
+      </p:nvGrpSpPr>
+      <p:grpSpPr>
+        <a:xfrm>
+          <a:off x="0" y="0"/>
+          <a:ext cx="0" cy="0"/>
+          <a:chOff x="0" y="0"/>
+          <a:chExt cx="0" cy="0"/>
+        </a:xfrm>
+      </p:grpSpPr>
+      <p:sp>
+        <p:nvSpPr>
+          <p:cNvPr id="2" name="Text 0"/>
+          <p:cNvSpPr>
+            <a:spLocks noGrp="1"/>
+          </p:cNvSpPr>
+          <p:nvPr>
+            <p:ph type="title"/>
+          </p:nvPr>
+        </p:nvSpPr>
+        <p:spPr>
+          <a:xfrm>
+            <a:off x="812800" y="812800"/>
+            <a:ext cx="10883392" cy="528290"/>
+          </a:xfrm>
+          <a:prstGeom prst="rect">
+            <a:avLst/>
+          </a:prstGeom>
+          <a:noFill/>
+          <a:ln/>
+        </p:spPr>
+        <p:txBody>
+          <a:bodyPr wrap="square" lIns="0" tIns="0" rIns="0" bIns="0" rtlCol="0" anchor="t">
+            <a:normAutofit/>
+          </a:bodyPr>
+          <a:lstStyle/>
+          <a:p>
+            <a:pPr marL="0" indent="0" algn="l">
+              <a:lnSpc>
+                <a:spcPts val="3960"/>
+              </a:lnSpc>
+              <a:buNone/>
+            </a:pPr>
+            <a:r>
+              <a:rPr lang="en-US" sz="3600" b="1" i="0" dirty="0" err="1">
+                <a:solidFill>
+                  <a:srgbClr val="14181F"/>
+                </a:solidFill>
+                <a:latin typeface="Helvetica" pitchFamily="34" charset="0"/>
+                <a:ea typeface="Helvetica" pitchFamily="34" charset="-122"/>
+                <a:cs typeface="Helvetica" pitchFamily="34" charset="-120"/>
+              </a:rPr>
+              <a:t>Github</a:t>
+            </a:r>
+            <a:r>
+              <a:rPr lang="en-US" sz="3600" b="1" i="0" dirty="0">
+                <a:solidFill>
+                  <a:srgbClr val="14181F"/>
+                </a:solidFill>
+                <a:latin typeface="Helvetica" pitchFamily="34" charset="0"/>
+                <a:ea typeface="Helvetica" pitchFamily="34" charset="-122"/>
+                <a:cs typeface="Helvetica" pitchFamily="34" charset="-120"/>
+              </a:rPr>
+              <a:t> Copilot options Model comparison</a:t>
+            </a:r>
+            <a:endParaRPr lang="en-US" sz="3600" dirty="0"/>
+          </a:p>
+        </p:txBody>
+      </p:sp>
+      <p:graphicFrame>
+        <p:nvGraphicFramePr>
+          <p:cNvPr id="3" name="Table 0"/>
+          <p:cNvGraphicFramePr>
+            <a:graphicFrameLocks noGrp="1"/>
+          </p:cNvGraphicFramePr>
+          <p:nvPr>
+            <p:extLst>
+              <p:ext uri="{D42A27DB-BD31-4B8C-83A1-F6EECF244321}">
+                <p14:modId xmlns:p14="http://schemas.microsoft.com/office/powerpoint/2010/main" val="841752871"/>
+              </p:ext>
+            </p:extLst>
+          </p:nvPr>
+        </p:nvGraphicFramePr>
+        <p:xfrm>
+          <a:off x="825500" y="1633190"/>
+          <a:ext cx="10553700" cy="1651000"/>
+        </p:xfrm>
+        <a:graphic>
+          <a:graphicData uri="http://schemas.openxmlformats.org/drawingml/2006/table">
+            <a:tbl>
+              <a:tblPr/>
+              <a:tblGrid>
+                <a:gridCol w="2374900">
+                  <a:extLst>
+                    <a:ext uri="{9D8B030D-6E8A-4147-A177-3AD203B41FA5}">
+                      <a16:colId xmlns:a16="http://schemas.microsoft.com/office/drawing/2014/main" val="20000"/>
+                    </a:ext>
+                  </a:extLst>
+                </a:gridCol>
+                <a:gridCol w="3808268">
+                  <a:extLst>
+                    <a:ext uri="{9D8B030D-6E8A-4147-A177-3AD203B41FA5}">
+                      <a16:colId xmlns:a16="http://schemas.microsoft.com/office/drawing/2014/main" val="20001"/>
+                    </a:ext>
+                  </a:extLst>
+                </a:gridCol>
+                <a:gridCol w="4370532">
+                  <a:extLst>
+                    <a:ext uri="{9D8B030D-6E8A-4147-A177-3AD203B41FA5}">
+                      <a16:colId xmlns:a16="http://schemas.microsoft.com/office/drawing/2014/main" val="20002"/>
+                    </a:ext>
+                  </a:extLst>
+                </a:gridCol>
+              </a:tblGrid>
+              <a:tr h="412750">
+                <a:tc>
+                  <a:txBody>
+                    <a:bodyPr/>
+                    <a:lstStyle/>
+                    <a:p>
+                      <a:pPr marL="0" indent="0">
+                        <a:lnSpc>
+                          <a:spcPts val="2100"/>
+                        </a:lnSpc>
+                        <a:buNone/>
+                      </a:pPr>
+                      <a:r>
+                        <a:rPr lang="en-US" sz="1500" b="1" dirty="0">
+                          <a:solidFill>
+                            <a:srgbClr val="14181F"/>
+                          </a:solidFill>
+                          <a:latin typeface="Helvetica" pitchFamily="34" charset="0"/>
+                          <a:ea typeface="Helvetica" pitchFamily="34" charset="-122"/>
+                          <a:cs typeface="Helvetica" pitchFamily="34" charset="-120"/>
+                        </a:rPr>
+                        <a:t>Model</a:t>
+                      </a:r>
+                      <a:endParaRPr lang="en-US" sz="1500" dirty="0">
+                        <a:latin typeface="Helvetica" charset="0"/>
+                        <a:ea typeface="Helvetica" charset="0"/>
+                        <a:cs typeface="Helvetica" charset="0"/>
+                      </a:endParaRPr>
+                    </a:p>
+                  </a:txBody>
+                  <a:tcPr marL="66675" marR="66675" marT="66675" marB="66675">
+                    <a:lnL w="12700" cap="flat" cmpd="sng" algn="ctr">
+                      <a:solidFill>
+                        <a:srgbClr val="C4C3BF"/>
+                      </a:solidFill>
+                      <a:prstDash val="solid"/>
+                      <a:round/>
+                      <a:headEnd type="none" w="med" len="med"/>
+                      <a:tailEnd type="none" w="med" len="med"/>
+                    </a:lnL>
+                    <a:lnR w="12700" cap="flat" cmpd="sng" algn="ctr">
+                      <a:solidFill>
+                        <a:srgbClr val="B6B5B1"/>
+                      </a:solidFill>
+                      <a:prstDash val="solid"/>
+                      <a:round/>
+                      <a:headEnd type="none" w="med" len="med"/>
+                      <a:tailEnd type="none" w="med" len="med"/>
+                    </a:lnR>
+                    <a:lnT w="12700" cap="flat" cmpd="sng" algn="ctr">
+                      <a:solidFill>
+                        <a:srgbClr val="C4C3BF"/>
+                      </a:solidFill>
+                      <a:prstDash val="solid"/>
+                      <a:round/>
+                      <a:headEnd type="none" w="med" len="med"/>
+                      <a:tailEnd type="none" w="med" len="med"/>
+                    </a:lnT>
+                    <a:lnB w="12700" cap="flat" cmpd="sng" algn="ctr">
+                      <a:solidFill>
+                        <a:srgbClr val="B6B5B1"/>
+                      </a:solidFill>
+                      <a:prstDash val="solid"/>
+                      <a:round/>
+                      <a:headEnd type="none" w="med" len="med"/>
+                      <a:tailEnd type="none" w="med" len="med"/>
+                    </a:lnB>
+                    <a:solidFill>
+                      <a:srgbClr val="E4E2DD"/>
+                    </a:solidFill>
+                  </a:tcPr>
+                </a:tc>
+                <a:tc>
+                  <a:txBody>
+                    <a:bodyPr/>
+                    <a:lstStyle/>
+                    <a:p>
+                      <a:pPr marL="0" indent="0">
+                        <a:lnSpc>
+                          <a:spcPts val="2100"/>
+                        </a:lnSpc>
+                        <a:buNone/>
+                      </a:pPr>
+                      <a:r>
+                        <a:rPr lang="en-US" sz="1500" b="1" dirty="0">
+                          <a:solidFill>
+                            <a:srgbClr val="14181F"/>
+                          </a:solidFill>
+                          <a:latin typeface="Helvetica" pitchFamily="34" charset="0"/>
+                          <a:ea typeface="Helvetica" pitchFamily="34" charset="-122"/>
+                          <a:cs typeface="Helvetica" pitchFamily="34" charset="-120"/>
+                        </a:rPr>
+                        <a:t>Best for in a code app</a:t>
+                      </a:r>
+                      <a:endParaRPr lang="en-US" sz="1500" dirty="0">
+                        <a:latin typeface="Helvetica" charset="0"/>
+                        <a:ea typeface="Helvetica" charset="0"/>
+                        <a:cs typeface="Helvetica" charset="0"/>
+                      </a:endParaRPr>
+                    </a:p>
+                  </a:txBody>
+                  <a:tcPr marL="66675" marR="66675" marT="66675" marB="66675">
+                    <a:lnL w="12700" cap="flat" cmpd="sng" algn="ctr">
+                      <a:solidFill>
+                        <a:srgbClr val="B6B5B1"/>
+                      </a:solidFill>
+                      <a:prstDash val="solid"/>
+                      <a:round/>
+                      <a:headEnd type="none" w="med" len="med"/>
+                      <a:tailEnd type="none" w="med" len="med"/>
+                    </a:lnL>
+                    <a:lnR w="12700" cap="flat" cmpd="sng" algn="ctr">
+                      <a:solidFill>
+                        <a:srgbClr val="B6B5B1"/>
+                      </a:solidFill>
+                      <a:prstDash val="solid"/>
+                      <a:round/>
+                      <a:headEnd type="none" w="med" len="med"/>
+                      <a:tailEnd type="none" w="med" len="med"/>
+                    </a:lnR>
+                    <a:lnT w="12700" cap="flat" cmpd="sng" algn="ctr">
+                      <a:solidFill>
+                        <a:srgbClr val="C4C3BF"/>
+                      </a:solidFill>
+                      <a:prstDash val="solid"/>
+                      <a:round/>
+                      <a:headEnd type="none" w="med" len="med"/>
+                      <a:tailEnd type="none" w="med" len="med"/>
+                    </a:lnT>
+                    <a:lnB w="12700" cap="flat" cmpd="sng" algn="ctr">
+                      <a:solidFill>
+                        <a:srgbClr val="B6B5B1"/>
+                      </a:solidFill>
+                      <a:prstDash val="solid"/>
+                      <a:round/>
+                      <a:headEnd type="none" w="med" len="med"/>
+                      <a:tailEnd type="none" w="med" len="med"/>
+                    </a:lnB>
+                    <a:solidFill>
+                      <a:srgbClr val="E4E2DD"/>
+                    </a:solidFill>
+                  </a:tcPr>
+                </a:tc>
+                <a:tc>
+                  <a:txBody>
+                    <a:bodyPr/>
+                    <a:lstStyle/>
+                    <a:p>
+                      <a:pPr marL="0" indent="0">
+                        <a:lnSpc>
+                          <a:spcPts val="2100"/>
+                        </a:lnSpc>
+                        <a:buNone/>
+                      </a:pPr>
+                      <a:r>
+                        <a:rPr lang="en-US" sz="1500" b="1" dirty="0">
+                          <a:solidFill>
+                            <a:srgbClr val="14181F"/>
+                          </a:solidFill>
+                          <a:latin typeface="Helvetica" pitchFamily="34" charset="0"/>
+                          <a:ea typeface="Helvetica" pitchFamily="34" charset="-122"/>
+                          <a:cs typeface="Helvetica" pitchFamily="34" charset="-120"/>
+                        </a:rPr>
+                        <a:t>Core strength</a:t>
+                      </a:r>
+                      <a:endParaRPr lang="en-US" sz="1500" dirty="0">
+                        <a:latin typeface="Helvetica" charset="0"/>
+                        <a:ea typeface="Helvetica" charset="0"/>
+                        <a:cs typeface="Helvetica" charset="0"/>
+                      </a:endParaRPr>
+                    </a:p>
+                  </a:txBody>
+                  <a:tcPr marL="66675" marR="66675" marT="66675" marB="66675">
+                    <a:lnL w="12700" cap="flat" cmpd="sng" algn="ctr">
+                      <a:solidFill>
+                        <a:srgbClr val="B6B5B1"/>
+                      </a:solidFill>
+                      <a:prstDash val="solid"/>
+                      <a:round/>
+                      <a:headEnd type="none" w="med" len="med"/>
+                      <a:tailEnd type="none" w="med" len="med"/>
+                    </a:lnL>
+                    <a:lnR w="12700" cap="flat" cmpd="sng" algn="ctr">
+                      <a:solidFill>
+                        <a:srgbClr val="B6B5B1"/>
+                      </a:solidFill>
+                      <a:prstDash val="solid"/>
+                      <a:round/>
+                      <a:headEnd type="none" w="med" len="med"/>
+                      <a:tailEnd type="none" w="med" len="med"/>
+                    </a:lnR>
+                    <a:lnT w="12700" cap="flat" cmpd="sng" algn="ctr">
+                      <a:solidFill>
+                        <a:srgbClr val="C4C3BF"/>
+                      </a:solidFill>
+                      <a:prstDash val="solid"/>
+                      <a:round/>
+                      <a:headEnd type="none" w="med" len="med"/>
+                      <a:tailEnd type="none" w="med" len="med"/>
+                    </a:lnT>
+                    <a:lnB w="12700" cap="flat" cmpd="sng" algn="ctr">
+                      <a:solidFill>
+                        <a:srgbClr val="B6B5B1"/>
+                      </a:solidFill>
+                      <a:prstDash val="solid"/>
+                      <a:round/>
+                      <a:headEnd type="none" w="med" len="med"/>
+                      <a:tailEnd type="none" w="med" len="med"/>
+                    </a:lnB>
+                    <a:solidFill>
+                      <a:srgbClr val="E4E2DD"/>
+                    </a:solidFill>
+                  </a:tcPr>
+                </a:tc>
+                <a:extLst>
+                  <a:ext uri="{0D108BD9-81ED-4DB2-BD59-A6C34878D82A}">
+                    <a16:rowId xmlns:a16="http://schemas.microsoft.com/office/drawing/2014/main" val="10000"/>
+                  </a:ext>
+                </a:extLst>
+              </a:tr>
+              <a:tr h="412750">
+                <a:tc>
+                  <a:txBody>
+                    <a:bodyPr/>
+                    <a:lstStyle/>
+                    <a:p>
+                      <a:pPr marL="0" indent="0">
+                        <a:lnSpc>
+                          <a:spcPts val="2100"/>
+                        </a:lnSpc>
+                        <a:buNone/>
+                      </a:pPr>
+                      <a:r>
+                        <a:rPr lang="en-US" sz="1500" dirty="0">
+                          <a:solidFill>
+                            <a:srgbClr val="14181F"/>
+                          </a:solidFill>
+                          <a:latin typeface="Helvetica" pitchFamily="34" charset="0"/>
+                          <a:ea typeface="Helvetica" pitchFamily="34" charset="-122"/>
+                          <a:cs typeface="Helvetica" pitchFamily="34" charset="-120"/>
+                        </a:rPr>
+                        <a:t>Claude Sonnet</a:t>
+                      </a:r>
+                      <a:endParaRPr lang="en-US" sz="1500" dirty="0">
+                        <a:latin typeface="Helvetica" charset="0"/>
+                        <a:ea typeface="Helvetica" charset="0"/>
+                        <a:cs typeface="Helvetica" charset="0"/>
+                      </a:endParaRPr>
+                    </a:p>
+                  </a:txBody>
+                  <a:tcPr marL="66675" marR="66675" marT="66675" marB="66675">
+                    <a:lnL w="12700" cap="flat" cmpd="sng" algn="ctr">
+                      <a:solidFill>
+                        <a:srgbClr val="C4C3BF"/>
+                      </a:solidFill>
+                      <a:prstDash val="solid"/>
+                      <a:round/>
+                      <a:headEnd type="none" w="med" len="med"/>
+                      <a:tailEnd type="none" w="med" len="med"/>
+                    </a:lnL>
+                    <a:lnR w="12700" cap="flat" cmpd="sng" algn="ctr">
+                      <a:solidFill>
+                        <a:srgbClr val="C4C3BF"/>
+                      </a:solidFill>
+                      <a:prstDash val="solid"/>
+                      <a:round/>
+                      <a:headEnd type="none" w="med" len="med"/>
+                      <a:tailEnd type="none" w="med" len="med"/>
+                    </a:lnR>
+                    <a:lnT w="12700" cap="flat" cmpd="sng" algn="ctr">
+                      <a:solidFill>
+                        <a:srgbClr val="B6B5B1"/>
+                      </a:solidFill>
+                      <a:prstDash val="solid"/>
+                      <a:round/>
+                      <a:headEnd type="none" w="med" len="med"/>
+                      <a:tailEnd type="none" w="med" len="med"/>
+                    </a:lnT>
+                    <a:lnB w="12700" cap="flat" cmpd="sng" algn="ctr">
+                      <a:solidFill>
+                        <a:srgbClr val="C4C3BF"/>
+                      </a:solidFill>
+                      <a:prstDash val="solid"/>
+                      <a:round/>
+                      <a:headEnd type="none" w="med" len="med"/>
+                      <a:tailEnd type="none" w="med" len="med"/>
+                    </a:lnB>
+                  </a:tcPr>
+                </a:tc>
+                <a:tc>
+                  <a:txBody>
+                    <a:bodyPr/>
+                    <a:lstStyle/>
+                    <a:p>
+                      <a:pPr marL="0" indent="0">
+                        <a:lnSpc>
+                          <a:spcPts val="2100"/>
+                        </a:lnSpc>
+                        <a:buNone/>
+                      </a:pPr>
+                      <a:r>
+                        <a:rPr lang="en-US" sz="1500" dirty="0">
+                          <a:solidFill>
+                            <a:srgbClr val="14181F"/>
+                          </a:solidFill>
+                          <a:latin typeface="Helvetica" pitchFamily="34" charset="0"/>
+                          <a:ea typeface="Helvetica" pitchFamily="34" charset="-122"/>
+                          <a:cs typeface="Helvetica" pitchFamily="34" charset="-120"/>
+                        </a:rPr>
+                        <a:t>Complex logic, multi-file refactors</a:t>
+                      </a:r>
+                      <a:endParaRPr lang="en-US" sz="1500" dirty="0">
+                        <a:latin typeface="Helvetica" charset="0"/>
+                        <a:ea typeface="Helvetica" charset="0"/>
+                        <a:cs typeface="Helvetica" charset="0"/>
+                      </a:endParaRPr>
+                    </a:p>
+                  </a:txBody>
+                  <a:tcPr marL="66675" marR="66675" marT="66675" marB="66675">
+                    <a:lnL w="12700" cap="flat" cmpd="sng" algn="ctr">
+                      <a:solidFill>
+                        <a:srgbClr val="C4C3BF"/>
+                      </a:solidFill>
+                      <a:prstDash val="solid"/>
+                      <a:round/>
+                      <a:headEnd type="none" w="med" len="med"/>
+                      <a:tailEnd type="none" w="med" len="med"/>
+                    </a:lnL>
+                    <a:lnR w="12700" cap="flat" cmpd="sng" algn="ctr">
+                      <a:solidFill>
+                        <a:srgbClr val="C4C3BF"/>
+                      </a:solidFill>
+                      <a:prstDash val="solid"/>
+                      <a:round/>
+                      <a:headEnd type="none" w="med" len="med"/>
+                      <a:tailEnd type="none" w="med" len="med"/>
+                    </a:lnR>
+                    <a:lnT w="12700" cap="flat" cmpd="sng" algn="ctr">
+                      <a:solidFill>
+                        <a:srgbClr val="B6B5B1"/>
+                      </a:solidFill>
+                      <a:prstDash val="solid"/>
+                      <a:round/>
+                      <a:headEnd type="none" w="med" len="med"/>
+                      <a:tailEnd type="none" w="med" len="med"/>
+                    </a:lnT>
+                    <a:lnB w="12700" cap="flat" cmpd="sng" algn="ctr">
+                      <a:solidFill>
+                        <a:srgbClr val="C4C3BF"/>
+                      </a:solidFill>
+                      <a:prstDash val="solid"/>
+                      <a:round/>
+                      <a:headEnd type="none" w="med" len="med"/>
+                      <a:tailEnd type="none" w="med" len="med"/>
+                    </a:lnB>
+                  </a:tcPr>
+                </a:tc>
+                <a:tc>
+                  <a:txBody>
+                    <a:bodyPr/>
+                    <a:lstStyle/>
+                    <a:p>
+                      <a:pPr marL="0" indent="0">
+                        <a:lnSpc>
+                          <a:spcPts val="2100"/>
+                        </a:lnSpc>
+                        <a:buNone/>
+                      </a:pPr>
+                      <a:r>
+                        <a:rPr lang="en-US" sz="1500" dirty="0">
+                          <a:solidFill>
+                            <a:srgbClr val="14181F"/>
+                          </a:solidFill>
+                          <a:latin typeface="Helvetica" pitchFamily="34" charset="0"/>
+                          <a:ea typeface="Helvetica" pitchFamily="34" charset="-122"/>
+                          <a:cs typeface="Helvetica" pitchFamily="34" charset="-120"/>
+                        </a:rPr>
+                        <a:t>Code comprehension, large context</a:t>
+                      </a:r>
+                      <a:endParaRPr lang="en-US" sz="1500" dirty="0">
+                        <a:latin typeface="Helvetica" charset="0"/>
+                        <a:ea typeface="Helvetica" charset="0"/>
+                        <a:cs typeface="Helvetica" charset="0"/>
+                      </a:endParaRPr>
+                    </a:p>
+                  </a:txBody>
+                  <a:tcPr marL="66675" marR="66675" marT="66675" marB="66675">
+                    <a:lnL w="12700" cap="flat" cmpd="sng" algn="ctr">
+                      <a:solidFill>
+                        <a:srgbClr val="C4C3BF"/>
+                      </a:solidFill>
+                      <a:prstDash val="solid"/>
+                      <a:round/>
+                      <a:headEnd type="none" w="med" len="med"/>
+                      <a:tailEnd type="none" w="med" len="med"/>
+                    </a:lnL>
+                    <a:lnR w="12700" cap="flat" cmpd="sng" algn="ctr">
+                      <a:solidFill>
+                        <a:srgbClr val="C4C3BF"/>
+                      </a:solidFill>
+                      <a:prstDash val="solid"/>
+                      <a:round/>
+                      <a:headEnd type="none" w="med" len="med"/>
+                      <a:tailEnd type="none" w="med" len="med"/>
+                    </a:lnR>
+                    <a:lnT w="12700" cap="flat" cmpd="sng" algn="ctr">
+                      <a:solidFill>
+                        <a:srgbClr val="B6B5B1"/>
+                      </a:solidFill>
+                      <a:prstDash val="solid"/>
+                      <a:round/>
+                      <a:headEnd type="none" w="med" len="med"/>
+                      <a:tailEnd type="none" w="med" len="med"/>
+                    </a:lnT>
+                    <a:lnB w="12700" cap="flat" cmpd="sng" algn="ctr">
+                      <a:solidFill>
+                        <a:srgbClr val="C4C3BF"/>
+                      </a:solidFill>
+                      <a:prstDash val="solid"/>
+                      <a:round/>
+                      <a:headEnd type="none" w="med" len="med"/>
+                      <a:tailEnd type="none" w="med" len="med"/>
+                    </a:lnB>
+                  </a:tcPr>
+                </a:tc>
+                <a:extLst>
+                  <a:ext uri="{0D108BD9-81ED-4DB2-BD59-A6C34878D82A}">
+                    <a16:rowId xmlns:a16="http://schemas.microsoft.com/office/drawing/2014/main" val="10001"/>
+                  </a:ext>
+                </a:extLst>
+              </a:tr>
+              <a:tr h="412750">
+                <a:tc>
+                  <a:txBody>
+                    <a:bodyPr/>
+                    <a:lstStyle/>
+                    <a:p>
+                      <a:pPr marL="0" indent="0">
+                        <a:lnSpc>
+                          <a:spcPts val="2100"/>
+                        </a:lnSpc>
+                        <a:buNone/>
+                      </a:pPr>
+                      <a:r>
+                        <a:rPr lang="en-US" sz="1500" dirty="0">
+                          <a:solidFill>
+                            <a:srgbClr val="14181F"/>
+                          </a:solidFill>
+                          <a:latin typeface="Helvetica" pitchFamily="34" charset="0"/>
+                          <a:ea typeface="Helvetica" pitchFamily="34" charset="-122"/>
+                          <a:cs typeface="Helvetica" pitchFamily="34" charset="-120"/>
+                        </a:rPr>
+                        <a:t>Copilot native</a:t>
+                      </a:r>
+                      <a:endParaRPr lang="en-US" sz="1500" dirty="0">
+                        <a:latin typeface="Helvetica" charset="0"/>
+                        <a:ea typeface="Helvetica" charset="0"/>
+                        <a:cs typeface="Helvetica" charset="0"/>
+                      </a:endParaRPr>
+                    </a:p>
+                  </a:txBody>
+                  <a:tcPr marL="66675" marR="66675" marT="66675" marB="66675">
+                    <a:lnL w="12700" cap="flat" cmpd="sng" algn="ctr">
+                      <a:solidFill>
+                        <a:srgbClr val="C4C3BF"/>
+                      </a:solidFill>
+                      <a:prstDash val="solid"/>
+                      <a:round/>
+                      <a:headEnd type="none" w="med" len="med"/>
+                      <a:tailEnd type="none" w="med" len="med"/>
+                    </a:lnL>
+                    <a:lnR w="12700" cap="flat" cmpd="sng" algn="ctr">
+                      <a:solidFill>
+                        <a:srgbClr val="C4C3BF"/>
+                      </a:solidFill>
+                      <a:prstDash val="solid"/>
+                      <a:round/>
+                      <a:headEnd type="none" w="med" len="med"/>
+                      <a:tailEnd type="none" w="med" len="med"/>
+                    </a:lnR>
+                    <a:lnT w="12700" cap="flat" cmpd="sng" algn="ctr">
+                      <a:solidFill>
+                        <a:srgbClr val="C4C3BF"/>
+                      </a:solidFill>
+                      <a:prstDash val="solid"/>
+                      <a:round/>
+                      <a:headEnd type="none" w="med" len="med"/>
+                      <a:tailEnd type="none" w="med" len="med"/>
+                    </a:lnT>
+                    <a:lnB w="12700" cap="flat" cmpd="sng" algn="ctr">
+                      <a:solidFill>
+                        <a:srgbClr val="C4C3BF"/>
+                      </a:solidFill>
+                      <a:prstDash val="solid"/>
+                      <a:round/>
+                      <a:headEnd type="none" w="med" len="med"/>
+                      <a:tailEnd type="none" w="med" len="med"/>
+                    </a:lnB>
+                  </a:tcPr>
+                </a:tc>
+                <a:tc>
+                  <a:txBody>
+                    <a:bodyPr/>
+                    <a:lstStyle/>
+                    <a:p>
+                      <a:pPr marL="0" indent="0">
+                        <a:lnSpc>
+                          <a:spcPts val="2100"/>
+                        </a:lnSpc>
+                        <a:buNone/>
+                      </a:pPr>
+                      <a:r>
+                        <a:rPr lang="en-US" sz="1500" dirty="0">
+                          <a:solidFill>
+                            <a:srgbClr val="14181F"/>
+                          </a:solidFill>
+                          <a:latin typeface="Helvetica" pitchFamily="34" charset="0"/>
+                          <a:ea typeface="Helvetica" pitchFamily="34" charset="-122"/>
+                          <a:cs typeface="Helvetica" pitchFamily="34" charset="-120"/>
+                        </a:rPr>
+                        <a:t>Inline edits while you type</a:t>
+                      </a:r>
+                      <a:endParaRPr lang="en-US" sz="1500" dirty="0">
+                        <a:latin typeface="Helvetica" charset="0"/>
+                        <a:ea typeface="Helvetica" charset="0"/>
+                        <a:cs typeface="Helvetica" charset="0"/>
+                      </a:endParaRPr>
+                    </a:p>
+                  </a:txBody>
+                  <a:tcPr marL="66675" marR="66675" marT="66675" marB="66675">
+                    <a:lnL w="12700" cap="flat" cmpd="sng" algn="ctr">
+                      <a:solidFill>
+                        <a:srgbClr val="C4C3BF"/>
+                      </a:solidFill>
+                      <a:prstDash val="solid"/>
+                      <a:round/>
+                      <a:headEnd type="none" w="med" len="med"/>
+                      <a:tailEnd type="none" w="med" len="med"/>
+                    </a:lnL>
+                    <a:lnR w="12700" cap="flat" cmpd="sng" algn="ctr">
+                      <a:solidFill>
+                        <a:srgbClr val="C4C3BF"/>
+                      </a:solidFill>
+                      <a:prstDash val="solid"/>
+                      <a:round/>
+                      <a:headEnd type="none" w="med" len="med"/>
+                      <a:tailEnd type="none" w="med" len="med"/>
+                    </a:lnR>
+                    <a:lnT w="12700" cap="flat" cmpd="sng" algn="ctr">
+                      <a:solidFill>
+                        <a:srgbClr val="C4C3BF"/>
+                      </a:solidFill>
+                      <a:prstDash val="solid"/>
+                      <a:round/>
+                      <a:headEnd type="none" w="med" len="med"/>
+                      <a:tailEnd type="none" w="med" len="med"/>
+                    </a:lnT>
+                    <a:lnB w="12700" cap="flat" cmpd="sng" algn="ctr">
+                      <a:solidFill>
+                        <a:srgbClr val="C4C3BF"/>
+                      </a:solidFill>
+                      <a:prstDash val="solid"/>
+                      <a:round/>
+                      <a:headEnd type="none" w="med" len="med"/>
+                      <a:tailEnd type="none" w="med" len="med"/>
+                    </a:lnB>
+                  </a:tcPr>
+                </a:tc>
+                <a:tc>
+                  <a:txBody>
+                    <a:bodyPr/>
+                    <a:lstStyle/>
+                    <a:p>
+                      <a:pPr marL="0" indent="0">
+                        <a:lnSpc>
+                          <a:spcPts val="2100"/>
+                        </a:lnSpc>
+                        <a:buNone/>
+                      </a:pPr>
+                      <a:r>
+                        <a:rPr lang="en-US" sz="1500" dirty="0">
+                          <a:solidFill>
+                            <a:srgbClr val="14181F"/>
+                          </a:solidFill>
+                          <a:latin typeface="Helvetica" pitchFamily="34" charset="0"/>
+                          <a:ea typeface="Helvetica" pitchFamily="34" charset="-122"/>
+                          <a:cs typeface="Helvetica" pitchFamily="34" charset="-120"/>
+                        </a:rPr>
+                        <a:t>Lowest latency, IDE integration</a:t>
+                      </a:r>
+                      <a:endParaRPr lang="en-US" sz="1500" dirty="0">
+                        <a:latin typeface="Helvetica" charset="0"/>
+                        <a:ea typeface="Helvetica" charset="0"/>
+                        <a:cs typeface="Helvetica" charset="0"/>
+                      </a:endParaRPr>
+                    </a:p>
+                  </a:txBody>
+                  <a:tcPr marL="66675" marR="66675" marT="66675" marB="66675">
+                    <a:lnL w="12700" cap="flat" cmpd="sng" algn="ctr">
+                      <a:solidFill>
+                        <a:srgbClr val="C4C3BF"/>
+                      </a:solidFill>
+                      <a:prstDash val="solid"/>
+                      <a:round/>
+                      <a:headEnd type="none" w="med" len="med"/>
+                      <a:tailEnd type="none" w="med" len="med"/>
+                    </a:lnL>
+                    <a:lnR w="12700" cap="flat" cmpd="sng" algn="ctr">
+                      <a:solidFill>
+                        <a:srgbClr val="C4C3BF"/>
+                      </a:solidFill>
+                      <a:prstDash val="solid"/>
+                      <a:round/>
+                      <a:headEnd type="none" w="med" len="med"/>
+                      <a:tailEnd type="none" w="med" len="med"/>
+                    </a:lnR>
+                    <a:lnT w="12700" cap="flat" cmpd="sng" algn="ctr">
+                      <a:solidFill>
+                        <a:srgbClr val="C4C3BF"/>
+                      </a:solidFill>
+                      <a:prstDash val="solid"/>
+                      <a:round/>
+                      <a:headEnd type="none" w="med" len="med"/>
+                      <a:tailEnd type="none" w="med" len="med"/>
+                    </a:lnT>
+                    <a:lnB w="12700" cap="flat" cmpd="sng" algn="ctr">
+                      <a:solidFill>
+                        <a:srgbClr val="C4C3BF"/>
+                      </a:solidFill>
+                      <a:prstDash val="solid"/>
+                      <a:round/>
+                      <a:headEnd type="none" w="med" len="med"/>
+                      <a:tailEnd type="none" w="med" len="med"/>
+                    </a:lnB>
+                  </a:tcPr>
+                </a:tc>
+                <a:extLst>
+                  <a:ext uri="{0D108BD9-81ED-4DB2-BD59-A6C34878D82A}">
+                    <a16:rowId xmlns:a16="http://schemas.microsoft.com/office/drawing/2014/main" val="10002"/>
+                  </a:ext>
+                </a:extLst>
+              </a:tr>
+              <a:tr h="412750">
+                <a:tc>
+                  <a:txBody>
+                    <a:bodyPr/>
+                    <a:lstStyle/>
+                    <a:p>
+                      <a:pPr marL="0" indent="0">
+                        <a:lnSpc>
+                          <a:spcPts val="2100"/>
+                        </a:lnSpc>
+                        <a:buNone/>
+                      </a:pPr>
+                      <a:r>
+                        <a:rPr lang="en-US" sz="1500" dirty="0">
+                          <a:solidFill>
+                            <a:srgbClr val="14181F"/>
+                          </a:solidFill>
+                          <a:latin typeface="Helvetica" pitchFamily="34" charset="0"/>
+                          <a:ea typeface="Helvetica" pitchFamily="34" charset="-122"/>
+                          <a:cs typeface="Helvetica" pitchFamily="34" charset="-120"/>
+                        </a:rPr>
+                        <a:t>OpenAI Codex</a:t>
+                      </a:r>
+                      <a:endParaRPr lang="en-US" sz="1500" dirty="0">
+                        <a:latin typeface="Helvetica" charset="0"/>
+                        <a:ea typeface="Helvetica" charset="0"/>
+                        <a:cs typeface="Helvetica" charset="0"/>
+                      </a:endParaRPr>
+                    </a:p>
+                  </a:txBody>
+                  <a:tcPr marL="66675" marR="66675" marT="66675" marB="66675">
+                    <a:lnL w="12700" cap="flat" cmpd="sng" algn="ctr">
+                      <a:solidFill>
+                        <a:srgbClr val="C4C3BF"/>
+                      </a:solidFill>
+                      <a:prstDash val="solid"/>
+                      <a:round/>
+                      <a:headEnd type="none" w="med" len="med"/>
+                      <a:tailEnd type="none" w="med" len="med"/>
+                    </a:lnL>
+                    <a:lnR w="12700" cap="flat" cmpd="sng" algn="ctr">
+                      <a:solidFill>
+                        <a:srgbClr val="C4C3BF"/>
+                      </a:solidFill>
+                      <a:prstDash val="solid"/>
+                      <a:round/>
+                      <a:headEnd type="none" w="med" len="med"/>
+                      <a:tailEnd type="none" w="med" len="med"/>
+                    </a:lnR>
+                    <a:lnT w="12700" cap="flat" cmpd="sng" algn="ctr">
+                      <a:solidFill>
+                        <a:srgbClr val="C4C3BF"/>
+                      </a:solidFill>
+                      <a:prstDash val="solid"/>
+                      <a:round/>
+                      <a:headEnd type="none" w="med" len="med"/>
+                      <a:tailEnd type="none" w="med" len="med"/>
+                    </a:lnT>
+                    <a:lnB w="12700" cap="flat" cmpd="sng" algn="ctr">
+                      <a:solidFill>
+                        <a:srgbClr val="C4C3BF"/>
+                      </a:solidFill>
+                      <a:prstDash val="solid"/>
+                      <a:round/>
+                      <a:headEnd type="none" w="med" len="med"/>
+                      <a:tailEnd type="none" w="med" len="med"/>
+                    </a:lnB>
+                  </a:tcPr>
+                </a:tc>
+                <a:tc>
+                  <a:txBody>
+                    <a:bodyPr/>
+                    <a:lstStyle/>
+                    <a:p>
+                      <a:pPr marL="0" indent="0">
+                        <a:lnSpc>
+                          <a:spcPts val="2100"/>
+                        </a:lnSpc>
+                        <a:buNone/>
+                      </a:pPr>
+                      <a:r>
+                        <a:rPr lang="en-US" sz="1500" dirty="0">
+                          <a:solidFill>
+                            <a:srgbClr val="14181F"/>
+                          </a:solidFill>
+                          <a:latin typeface="Helvetica" pitchFamily="34" charset="0"/>
+                          <a:ea typeface="Helvetica" pitchFamily="34" charset="-122"/>
+                          <a:cs typeface="Helvetica" pitchFamily="34" charset="-120"/>
+                        </a:rPr>
+                        <a:t>Async features and PRs</a:t>
+                      </a:r>
+                      <a:endParaRPr lang="en-US" sz="1500" dirty="0">
+                        <a:latin typeface="Helvetica" charset="0"/>
+                        <a:ea typeface="Helvetica" charset="0"/>
+                        <a:cs typeface="Helvetica" charset="0"/>
+                      </a:endParaRPr>
+                    </a:p>
+                  </a:txBody>
+                  <a:tcPr marL="66675" marR="66675" marT="66675" marB="66675">
+                    <a:lnL w="12700" cap="flat" cmpd="sng" algn="ctr">
+                      <a:solidFill>
+                        <a:srgbClr val="C4C3BF"/>
+                      </a:solidFill>
+                      <a:prstDash val="solid"/>
+                      <a:round/>
+                      <a:headEnd type="none" w="med" len="med"/>
+                      <a:tailEnd type="none" w="med" len="med"/>
+                    </a:lnL>
+                    <a:lnR w="12700" cap="flat" cmpd="sng" algn="ctr">
+                      <a:solidFill>
+                        <a:srgbClr val="C4C3BF"/>
+                      </a:solidFill>
+                      <a:prstDash val="solid"/>
+                      <a:round/>
+                      <a:headEnd type="none" w="med" len="med"/>
+                      <a:tailEnd type="none" w="med" len="med"/>
+                    </a:lnR>
+                    <a:lnT w="12700" cap="flat" cmpd="sng" algn="ctr">
+                      <a:solidFill>
+                        <a:srgbClr val="C4C3BF"/>
+                      </a:solidFill>
+                      <a:prstDash val="solid"/>
+                      <a:round/>
+                      <a:headEnd type="none" w="med" len="med"/>
+                      <a:tailEnd type="none" w="med" len="med"/>
+                    </a:lnT>
+                    <a:lnB w="12700" cap="flat" cmpd="sng" algn="ctr">
+                      <a:solidFill>
+                        <a:srgbClr val="C4C3BF"/>
+                      </a:solidFill>
+                      <a:prstDash val="solid"/>
+                      <a:round/>
+                      <a:headEnd type="none" w="med" len="med"/>
+                      <a:tailEnd type="none" w="med" len="med"/>
+                    </a:lnB>
+                  </a:tcPr>
+                </a:tc>
+                <a:tc>
+                  <a:txBody>
+                    <a:bodyPr/>
+                    <a:lstStyle/>
+                    <a:p>
+                      <a:pPr marL="0" indent="0">
+                        <a:lnSpc>
+                          <a:spcPts val="2100"/>
+                        </a:lnSpc>
+                        <a:buNone/>
+                      </a:pPr>
+                      <a:r>
+                        <a:rPr lang="en-US" sz="1500" dirty="0">
+                          <a:solidFill>
+                            <a:srgbClr val="14181F"/>
+                          </a:solidFill>
+                          <a:latin typeface="Helvetica" pitchFamily="34" charset="0"/>
+                          <a:ea typeface="Helvetica" pitchFamily="34" charset="-122"/>
+                          <a:cs typeface="Helvetica" pitchFamily="34" charset="-120"/>
+                        </a:rPr>
+                        <a:t>Multi-agent orchestration</a:t>
+                      </a:r>
+                      <a:endParaRPr lang="en-US" sz="1500" dirty="0">
+                        <a:latin typeface="Helvetica" charset="0"/>
+                        <a:ea typeface="Helvetica" charset="0"/>
+                        <a:cs typeface="Helvetica" charset="0"/>
+                      </a:endParaRPr>
+                    </a:p>
+                  </a:txBody>
+                  <a:tcPr marL="66675" marR="66675" marT="66675" marB="66675">
+                    <a:lnL w="12700" cap="flat" cmpd="sng" algn="ctr">
+                      <a:solidFill>
+                        <a:srgbClr val="C4C3BF"/>
+                      </a:solidFill>
+                      <a:prstDash val="solid"/>
+                      <a:round/>
+                      <a:headEnd type="none" w="med" len="med"/>
+                      <a:tailEnd type="none" w="med" len="med"/>
+                    </a:lnL>
+                    <a:lnR w="12700" cap="flat" cmpd="sng" algn="ctr">
+                      <a:solidFill>
+                        <a:srgbClr val="C4C3BF"/>
+                      </a:solidFill>
+                      <a:prstDash val="solid"/>
+                      <a:round/>
+                      <a:headEnd type="none" w="med" len="med"/>
+                      <a:tailEnd type="none" w="med" len="med"/>
+                    </a:lnR>
+                    <a:lnT w="12700" cap="flat" cmpd="sng" algn="ctr">
+                      <a:solidFill>
+                        <a:srgbClr val="C4C3BF"/>
+                      </a:solidFill>
+                      <a:prstDash val="solid"/>
+                      <a:round/>
+                      <a:headEnd type="none" w="med" len="med"/>
+                      <a:tailEnd type="none" w="med" len="med"/>
+                    </a:lnT>
+                    <a:lnB w="12700" cap="flat" cmpd="sng" algn="ctr">
+                      <a:solidFill>
+                        <a:srgbClr val="C4C3BF"/>
+                      </a:solidFill>
+                      <a:prstDash val="solid"/>
+                      <a:round/>
+                      <a:headEnd type="none" w="med" len="med"/>
+                      <a:tailEnd type="none" w="med" len="med"/>
+                    </a:lnB>
+                  </a:tcPr>
+                </a:tc>
+                <a:extLst>
+                  <a:ext uri="{0D108BD9-81ED-4DB2-BD59-A6C34878D82A}">
+                    <a16:rowId xmlns:a16="http://schemas.microsoft.com/office/drawing/2014/main" val="10003"/>
+                  </a:ext>
+                </a:extLst>
+              </a:tr>
+            </a:tbl>
+          </a:graphicData>
+        </a:graphic>
+      </p:graphicFrame>
+    </p:spTree>
+  </p:cSld>
+  <p:clrMapOvr>
+    <a:masterClrMapping/>
+  </p:clrMapOvr>
+</p:sld>
+</file>
+
+<file path=ppt/slides/slide13.xml><?xml version="1.0" encoding="utf-8"?>
+<p:sld xmlns:a="http://schemas.openxmlformats.org/drawingml/2006/main" xmlns:r="http://schemas.openxmlformats.org/officeDocument/2006/relationships" xmlns:p="http://schemas.openxmlformats.org/presentationml/2006/main">
+  <p:cSld>
+    <p:bg>
+      <p:bgPr>
+        <a:solidFill>
+          <a:srgbClr val="14181F"/>
+        </a:solidFill>
+        <a:effectLst/>
+      </p:bgPr>
+    </p:bg>
+    <p:spTree>
+      <p:nvGrpSpPr>
+        <p:cNvPr id="1" name=""/>
+        <p:cNvGrpSpPr/>
+        <p:nvPr/>
+      </p:nvGrpSpPr>
+      <p:grpSpPr>
+        <a:xfrm>
+          <a:off x="0" y="0"/>
+          <a:ext cx="0" cy="0"/>
+          <a:chOff x="0" y="0"/>
+          <a:chExt cx="0" cy="0"/>
+        </a:xfrm>
+      </p:grpSpPr>
+      <p:sp>
+        <p:nvSpPr>
+          <p:cNvPr id="2" name="Text 0"/>
+          <p:cNvSpPr/>
+          <p:nvPr/>
+        </p:nvSpPr>
+        <p:spPr>
+          <a:xfrm>
+            <a:off x="812800" y="1021179"/>
+            <a:ext cx="10883392" cy="274290"/>
+          </a:xfrm>
+          <a:prstGeom prst="rect">
+            <a:avLst/>
+          </a:prstGeom>
+          <a:noFill/>
+          <a:ln/>
+        </p:spPr>
+        <p:txBody>
+          <a:bodyPr wrap="square" lIns="0" tIns="0" rIns="0" bIns="0" rtlCol="0" anchor="t">
+            <a:normAutofit/>
+          </a:bodyPr>
+          <a:lstStyle/>
+          <a:p>
+            <a:pPr marL="0" marR="0" lvl="0" indent="0" algn="l" defTabSz="914400" rtl="0" eaLnBrk="1" fontAlgn="auto" latinLnBrk="0" hangingPunct="1">
+              <a:lnSpc>
+                <a:spcPts val="1960"/>
+              </a:lnSpc>
+              <a:spcBef>
+                <a:spcPts val="0"/>
+              </a:spcBef>
+              <a:spcAft>
+                <a:spcPts val="0"/>
+              </a:spcAft>
+              <a:buClrTx/>
+              <a:buSzTx/>
+              <a:buFontTx/>
+              <a:buNone/>
+              <a:tabLst/>
+              <a:defRPr/>
+            </a:pPr>
+            <a:r>
+              <a:rPr kumimoji="0" lang="en-US" sz="1400" b="1" i="0" u="none" strike="noStrike" kern="1200" cap="none" spc="0" normalizeH="0" baseline="0" noProof="0" dirty="0">
+                <a:ln>
+                  <a:noFill/>
+                </a:ln>
+                <a:solidFill>
+                  <a:srgbClr val="E8794F"/>
+                </a:solidFill>
+                <a:effectLst/>
+                <a:uLnTx/>
+                <a:uFillTx/>
+                <a:latin typeface="Helvetica" pitchFamily="34" charset="0"/>
+                <a:ea typeface="Helvetica" pitchFamily="34" charset="-122"/>
+                <a:cs typeface="Helvetica" pitchFamily="34" charset="-120"/>
+              </a:rPr>
+              <a:t>CLAUDE SONNET</a:t>
+            </a:r>
+            <a:endParaRPr kumimoji="0" lang="en-US" sz="1400" b="0" i="0" u="none" strike="noStrike" kern="1200" cap="none" spc="0" normalizeH="0" baseline="0" noProof="0" dirty="0">
+              <a:ln>
+                <a:noFill/>
+              </a:ln>
+              <a:solidFill>
+                <a:srgbClr val="F6F4EF"/>
+              </a:solidFill>
+              <a:effectLst/>
+              <a:uLnTx/>
+              <a:uFillTx/>
+              <a:latin typeface="Helvetica"/>
+              <a:ea typeface="+mn-ea"/>
+              <a:cs typeface="+mn-cs"/>
+            </a:endParaRPr>
+          </a:p>
+        </p:txBody>
+      </p:sp>
+      <p:sp>
+        <p:nvSpPr>
+          <p:cNvPr id="3" name="Text 1"/>
+          <p:cNvSpPr>
+            <a:spLocks noGrp="1"/>
+          </p:cNvSpPr>
+          <p:nvPr>
+            <p:ph type="title"/>
+          </p:nvPr>
+        </p:nvSpPr>
+        <p:spPr>
+          <a:xfrm>
+            <a:off x="812800" y="1524069"/>
+            <a:ext cx="10883392" cy="640060"/>
+          </a:xfrm>
+          <a:prstGeom prst="rect">
+            <a:avLst/>
+          </a:prstGeom>
+          <a:noFill/>
+          <a:ln/>
+        </p:spPr>
+        <p:txBody>
+          <a:bodyPr wrap="square" lIns="0" tIns="0" rIns="0" bIns="0" rtlCol="0" anchor="t">
+            <a:normAutofit/>
+          </a:bodyPr>
+          <a:lstStyle/>
+          <a:p>
+            <a:pPr marL="0" indent="0" algn="l">
+              <a:lnSpc>
+                <a:spcPts val="4840"/>
+              </a:lnSpc>
+              <a:buNone/>
+            </a:pPr>
+            <a:r>
+              <a:rPr lang="en-US" sz="4400" b="1" i="0" dirty="0">
+                <a:solidFill>
+                  <a:srgbClr val="F6F4EF"/>
+                </a:solidFill>
+                <a:latin typeface="Helvetica" pitchFamily="34" charset="0"/>
+                <a:ea typeface="Helvetica" pitchFamily="34" charset="-122"/>
+                <a:cs typeface="Helvetica" pitchFamily="34" charset="-120"/>
+              </a:rPr>
+              <a:t>Built for complex logic</a:t>
+            </a:r>
+            <a:endParaRPr lang="en-US" sz="4400" dirty="0"/>
+          </a:p>
+        </p:txBody>
+      </p:sp>
+      <p:sp>
+        <p:nvSpPr>
+          <p:cNvPr id="4" name="Text 2"/>
+          <p:cNvSpPr/>
+          <p:nvPr/>
+        </p:nvSpPr>
+        <p:spPr>
+          <a:xfrm>
+            <a:off x="812800" y="2392729"/>
+            <a:ext cx="9156700" cy="711200"/>
+          </a:xfrm>
+          <a:prstGeom prst="rect">
+            <a:avLst/>
+          </a:prstGeom>
+          <a:noFill/>
+          <a:ln/>
+        </p:spPr>
+        <p:txBody>
+          <a:bodyPr wrap="square" lIns="0" tIns="0" rIns="0" bIns="0" rtlCol="0" anchor="t">
+            <a:normAutofit/>
+          </a:bodyPr>
+          <a:lstStyle/>
+          <a:p>
+            <a:pPr marL="0" marR="0" lvl="0" indent="0" algn="l" defTabSz="914400" rtl="0" eaLnBrk="1" fontAlgn="auto" latinLnBrk="0" hangingPunct="1">
+              <a:lnSpc>
+                <a:spcPts val="2700"/>
+              </a:lnSpc>
+              <a:spcBef>
+                <a:spcPts val="0"/>
+              </a:spcBef>
+              <a:spcAft>
+                <a:spcPts val="0"/>
+              </a:spcAft>
+              <a:buClrTx/>
+              <a:buSzTx/>
+              <a:buFontTx/>
+              <a:buNone/>
+              <a:tabLst/>
+              <a:defRPr/>
+            </a:pPr>
+            <a:r>
+              <a:rPr kumimoji="0" lang="en-US" sz="2000" b="0" i="0" u="none" strike="noStrike" kern="1200" cap="none" spc="0" normalizeH="0" baseline="0" noProof="0" dirty="0">
+                <a:ln>
+                  <a:noFill/>
+                </a:ln>
+                <a:solidFill>
+                  <a:srgbClr val="F6F4EF"/>
+                </a:solidFill>
+                <a:effectLst/>
+                <a:uLnTx/>
+                <a:uFillTx/>
+                <a:latin typeface="Helvetica" pitchFamily="34" charset="0"/>
+                <a:ea typeface="Helvetica" pitchFamily="34" charset="-122"/>
+                <a:cs typeface="Helvetica" pitchFamily="34" charset="-120"/>
+              </a:rPr>
+              <a:t>Use it for Dataverse and connector logic, debugging and multi-file refactors in the generated React code. The code apps plugin also works in Claude Code.</a:t>
+            </a:r>
+            <a:endParaRPr kumimoji="0" lang="en-US" sz="2000" b="0" i="0" u="none" strike="noStrike" kern="1200" cap="none" spc="0" normalizeH="0" baseline="0" noProof="0" dirty="0">
+              <a:ln>
+                <a:noFill/>
+              </a:ln>
+              <a:solidFill>
+                <a:srgbClr val="F6F4EF"/>
+              </a:solidFill>
+              <a:effectLst/>
+              <a:uLnTx/>
+              <a:uFillTx/>
+              <a:latin typeface="Helvetica"/>
+              <a:ea typeface="+mn-ea"/>
+              <a:cs typeface="+mn-cs"/>
+            </a:endParaRPr>
+          </a:p>
+        </p:txBody>
+      </p:sp>
+      <p:sp>
+        <p:nvSpPr>
+          <p:cNvPr id="5" name="Text 3"/>
+          <p:cNvSpPr/>
+          <p:nvPr/>
+        </p:nvSpPr>
+        <p:spPr>
+          <a:xfrm>
+            <a:off x="812800" y="3332529"/>
+            <a:ext cx="10883392" cy="309860"/>
+          </a:xfrm>
+          <a:prstGeom prst="rect">
+            <a:avLst/>
+          </a:prstGeom>
+          <a:noFill/>
+          <a:ln/>
+        </p:spPr>
+        <p:txBody>
+          <a:bodyPr wrap="square" lIns="0" tIns="0" rIns="0" bIns="0" rtlCol="0" anchor="t">
+            <a:normAutofit/>
+          </a:bodyPr>
+          <a:lstStyle/>
+          <a:p>
+            <a:pPr marL="0" marR="0" lvl="0" indent="0" algn="l" defTabSz="914400" rtl="0" eaLnBrk="1" fontAlgn="auto" latinLnBrk="0" hangingPunct="1">
+              <a:lnSpc>
+                <a:spcPts val="2240"/>
+              </a:lnSpc>
+              <a:spcBef>
+                <a:spcPts val="0"/>
+              </a:spcBef>
+              <a:spcAft>
+                <a:spcPts val="0"/>
+              </a:spcAft>
+              <a:buClrTx/>
+              <a:buSzTx/>
+              <a:buFontTx/>
+              <a:buNone/>
+              <a:tabLst/>
+              <a:defRPr/>
+            </a:pPr>
+            <a:r>
+              <a:rPr kumimoji="0" lang="en-US" sz="1600" b="1" i="0" u="none" strike="noStrike" kern="1200" cap="none" spc="0" normalizeH="0" baseline="0" noProof="0" dirty="0">
+                <a:ln>
+                  <a:noFill/>
+                </a:ln>
+                <a:solidFill>
+                  <a:srgbClr val="E8794F"/>
+                </a:solidFill>
+                <a:effectLst/>
+                <a:uLnTx/>
+                <a:uFillTx/>
+                <a:latin typeface="Helvetica" pitchFamily="34" charset="0"/>
+                <a:ea typeface="Helvetica" pitchFamily="34" charset="-122"/>
+                <a:cs typeface="Helvetica" pitchFamily="34" charset="-120"/>
+              </a:rPr>
+              <a:t>Strength: deep reasoning and a massive context window</a:t>
+            </a:r>
+            <a:endParaRPr kumimoji="0" lang="en-US" sz="1600" b="0" i="0" u="none" strike="noStrike" kern="1200" cap="none" spc="0" normalizeH="0" baseline="0" noProof="0" dirty="0">
+              <a:ln>
+                <a:noFill/>
+              </a:ln>
+              <a:solidFill>
+                <a:srgbClr val="F6F4EF"/>
+              </a:solidFill>
+              <a:effectLst/>
+              <a:uLnTx/>
+              <a:uFillTx/>
+              <a:latin typeface="Helvetica"/>
+              <a:ea typeface="+mn-ea"/>
+              <a:cs typeface="+mn-cs"/>
+            </a:endParaRPr>
+          </a:p>
+        </p:txBody>
+      </p:sp>
+      <p:sp>
+        <p:nvSpPr>
+          <p:cNvPr id="7" name="TextBox 6">
+            <a:extLst>
+              <a:ext uri="{FF2B5EF4-FFF2-40B4-BE49-F238E27FC236}">
+                <a16:creationId xmlns:a16="http://schemas.microsoft.com/office/drawing/2014/main" id="{5665D398-FBE2-5349-8C7F-56199BD4AFA1}"/>
+              </a:ext>
+            </a:extLst>
+          </p:cNvPr>
+          <p:cNvSpPr txBox="1"/>
+          <p:nvPr/>
+        </p:nvSpPr>
+        <p:spPr>
+          <a:xfrm>
+            <a:off x="752015" y="3764270"/>
+            <a:ext cx="11166715" cy="2811475"/>
+          </a:xfrm>
+          <a:prstGeom prst="rect">
+            <a:avLst/>
+          </a:prstGeom>
+          <a:noFill/>
+        </p:spPr>
+        <p:txBody>
+          <a:bodyPr wrap="square">
+            <a:spAutoFit/>
+          </a:bodyPr>
+          <a:lstStyle/>
+          <a:p>
+            <a:pPr rtl="0">
+              <a:lnSpc>
+                <a:spcPct val="130000"/>
+              </a:lnSpc>
+              <a:buNone/>
+            </a:pPr>
+            <a:r>
+              <a:rPr lang="en-US" sz="1600" b="1" dirty="0">
+                <a:solidFill>
+                  <a:srgbClr val="E8794F"/>
+                </a:solidFill>
+                <a:latin typeface="Helvetica" pitchFamily="34" charset="0"/>
+                <a:cs typeface="Helvetica" pitchFamily="34" charset="-120"/>
+              </a:rPr>
+              <a:t>Where it helps most</a:t>
+            </a:r>
+            <a:r>
+              <a:rPr lang="en-US" b="1" dirty="0">
+                <a:solidFill>
+                  <a:schemeClr val="accent1">
+                    <a:lumMod val="60000"/>
+                    <a:lumOff val="40000"/>
+                  </a:schemeClr>
+                </a:solidFill>
+              </a:rPr>
+              <a:t>.</a:t>
+            </a:r>
+            <a:endParaRPr lang="en-US" dirty="0">
+              <a:solidFill>
+                <a:schemeClr val="accent1">
+                  <a:lumMod val="60000"/>
+                  <a:lumOff val="40000"/>
+                </a:schemeClr>
+              </a:solidFill>
+            </a:endParaRPr>
+          </a:p>
+          <a:p>
+            <a:pPr marL="285750" indent="-285750" rtl="0">
+              <a:lnSpc>
+                <a:spcPct val="130000"/>
+              </a:lnSpc>
+              <a:buFont typeface="Wingdings" panose="05000000000000000000" pitchFamily="2" charset="2"/>
+              <a:buChar char="Ø"/>
+            </a:pPr>
+            <a:r>
+              <a:rPr lang="en-US" sz="2000" dirty="0">
+                <a:solidFill>
+                  <a:srgbClr val="F6F4EF"/>
+                </a:solidFill>
+                <a:latin typeface="Helvetica" pitchFamily="34" charset="0"/>
+                <a:cs typeface="Helvetica" pitchFamily="34" charset="-120"/>
+              </a:rPr>
+              <a:t>Logic-heavy work: Dataverse queries, connector data shaping and business rules that are more than simple CRUD.</a:t>
+            </a:r>
+          </a:p>
+          <a:p>
+            <a:pPr marL="285750" indent="-285750" rtl="0">
+              <a:lnSpc>
+                <a:spcPct val="130000"/>
+              </a:lnSpc>
+              <a:buFont typeface="Wingdings" panose="05000000000000000000" pitchFamily="2" charset="2"/>
+              <a:buChar char="Ø"/>
+            </a:pPr>
+            <a:r>
+              <a:rPr lang="en-US" sz="2000" dirty="0">
+                <a:solidFill>
+                  <a:srgbClr val="F6F4EF"/>
+                </a:solidFill>
+                <a:latin typeface="Helvetica" pitchFamily="34" charset="0"/>
+                <a:cs typeface="Helvetica" pitchFamily="34" charset="-120"/>
+              </a:rPr>
+              <a:t>Multi-file changes: refactoring the generated React app, renaming types or restructuring components without breaking dependencies.</a:t>
+            </a:r>
+          </a:p>
+          <a:p>
+            <a:pPr marL="285750" indent="-285750" rtl="0">
+              <a:lnSpc>
+                <a:spcPct val="130000"/>
+              </a:lnSpc>
+              <a:buFont typeface="Wingdings" panose="05000000000000000000" pitchFamily="2" charset="2"/>
+              <a:buChar char="Ø"/>
+            </a:pPr>
+            <a:r>
+              <a:rPr lang="en-US" sz="2000" dirty="0">
+                <a:solidFill>
+                  <a:srgbClr val="F6F4EF"/>
+                </a:solidFill>
+                <a:latin typeface="Helvetica" pitchFamily="34" charset="0"/>
+                <a:cs typeface="Helvetica" pitchFamily="34" charset="-120"/>
+              </a:rPr>
+              <a:t>Debugging: tracing build errors or failed pushes across the project.</a:t>
+            </a:r>
+          </a:p>
+          <a:p>
+            <a:pPr marL="285750" indent="-285750" rtl="0">
+              <a:lnSpc>
+                <a:spcPct val="130000"/>
+              </a:lnSpc>
+              <a:buFont typeface="Wingdings" panose="05000000000000000000" pitchFamily="2" charset="2"/>
+              <a:buChar char="Ø"/>
+            </a:pPr>
+            <a:r>
+              <a:rPr lang="en-US" sz="2000" dirty="0">
+                <a:solidFill>
+                  <a:srgbClr val="F6F4EF"/>
+                </a:solidFill>
+                <a:latin typeface="Helvetica" pitchFamily="34" charset="0"/>
+                <a:cs typeface="Helvetica" pitchFamily="34" charset="-120"/>
+              </a:rPr>
+              <a:t>Maintainability: clean, documented code that a team can keep editing after the first version</a:t>
+            </a:r>
+            <a:r>
+              <a:rPr lang="en-US" dirty="0"/>
+              <a:t>.</a:t>
+            </a:r>
+          </a:p>
+        </p:txBody>
+      </p:sp>
+    </p:spTree>
+  </p:cSld>
+  <p:clrMapOvr>
+    <a:masterClrMapping/>
+  </p:clrMapOvr>
+</p:sld>
+</file>
+
+<file path=ppt/slides/slide14.xml><?xml version="1.0" encoding="utf-8"?>
+<p:sld xmlns:a="http://schemas.openxmlformats.org/drawingml/2006/main" xmlns:r="http://schemas.openxmlformats.org/officeDocument/2006/relationships" xmlns:p="http://schemas.openxmlformats.org/presentationml/2006/main">
+  <p:cSld>
+    <p:bg>
+      <p:bgPr>
+        <a:solidFill>
+          <a:srgbClr val="F6F4EF"/>
+        </a:solidFill>
+        <a:effectLst/>
+      </p:bgPr>
+    </p:bg>
+    <p:spTree>
+      <p:nvGrpSpPr>
+        <p:cNvPr id="1" name=""/>
+        <p:cNvGrpSpPr/>
+        <p:nvPr/>
+      </p:nvGrpSpPr>
+      <p:grpSpPr>
+        <a:xfrm>
+          <a:off x="0" y="0"/>
+          <a:ext cx="0" cy="0"/>
+          <a:chOff x="0" y="0"/>
+          <a:chExt cx="0" cy="0"/>
+        </a:xfrm>
+      </p:grpSpPr>
+      <p:sp>
+        <p:nvSpPr>
+          <p:cNvPr id="2" name="Text 0"/>
+          <p:cNvSpPr/>
+          <p:nvPr/>
+        </p:nvSpPr>
+        <p:spPr>
+          <a:xfrm>
+            <a:off x="812800" y="895055"/>
+            <a:ext cx="10883392" cy="274290"/>
+          </a:xfrm>
+          <a:prstGeom prst="rect">
+            <a:avLst/>
+          </a:prstGeom>
+          <a:noFill/>
+          <a:ln/>
+        </p:spPr>
+        <p:txBody>
+          <a:bodyPr wrap="square" lIns="0" tIns="0" rIns="0" bIns="0" rtlCol="0" anchor="t">
+            <a:normAutofit/>
+          </a:bodyPr>
+          <a:lstStyle/>
+          <a:p>
+            <a:pPr marL="0" marR="0" lvl="0" indent="0" algn="l" defTabSz="914400" rtl="0" eaLnBrk="1" fontAlgn="auto" latinLnBrk="0" hangingPunct="1">
+              <a:lnSpc>
+                <a:spcPts val="1960"/>
+              </a:lnSpc>
+              <a:spcBef>
+                <a:spcPts val="0"/>
+              </a:spcBef>
+              <a:spcAft>
+                <a:spcPts val="0"/>
+              </a:spcAft>
+              <a:buClrTx/>
+              <a:buSzTx/>
+              <a:buFontTx/>
+              <a:buNone/>
+              <a:tabLst/>
+              <a:defRPr/>
+            </a:pPr>
+            <a:r>
+              <a:rPr kumimoji="0" lang="en-US" sz="1400" b="1" i="0" u="none" strike="noStrike" kern="1200" cap="none" spc="0" normalizeH="0" baseline="0" noProof="0" dirty="0">
+                <a:ln>
+                  <a:noFill/>
+                </a:ln>
+                <a:solidFill>
+                  <a:srgbClr val="2F5FC4"/>
+                </a:solidFill>
+                <a:effectLst/>
+                <a:uLnTx/>
+                <a:uFillTx/>
+                <a:latin typeface="Helvetica" pitchFamily="34" charset="0"/>
+                <a:ea typeface="Helvetica" pitchFamily="34" charset="-122"/>
+                <a:cs typeface="Helvetica" pitchFamily="34" charset="-120"/>
+              </a:rPr>
+              <a:t>GITHUB COPILOT</a:t>
+            </a:r>
+            <a:endParaRPr kumimoji="0" lang="en-US" sz="1400" b="0" i="0" u="none" strike="noStrike" kern="1200" cap="none" spc="0" normalizeH="0" baseline="0" noProof="0" dirty="0">
+              <a:ln>
+                <a:noFill/>
+              </a:ln>
+              <a:solidFill>
+                <a:srgbClr val="F6F4EF"/>
+              </a:solidFill>
+              <a:effectLst/>
+              <a:uLnTx/>
+              <a:uFillTx/>
+              <a:latin typeface="Helvetica"/>
+              <a:ea typeface="+mn-ea"/>
+              <a:cs typeface="+mn-cs"/>
+            </a:endParaRPr>
+          </a:p>
+        </p:txBody>
+      </p:sp>
+      <p:sp>
+        <p:nvSpPr>
+          <p:cNvPr id="3" name="Text 1"/>
+          <p:cNvSpPr>
+            <a:spLocks noGrp="1"/>
+          </p:cNvSpPr>
+          <p:nvPr>
+            <p:ph type="title"/>
+          </p:nvPr>
+        </p:nvSpPr>
+        <p:spPr>
+          <a:xfrm>
+            <a:off x="812800" y="1397945"/>
+            <a:ext cx="10883392" cy="640060"/>
+          </a:xfrm>
+          <a:prstGeom prst="rect">
+            <a:avLst/>
+          </a:prstGeom>
+          <a:noFill/>
+          <a:ln/>
+        </p:spPr>
+        <p:txBody>
+          <a:bodyPr wrap="square" lIns="0" tIns="0" rIns="0" bIns="0" rtlCol="0" anchor="t">
+            <a:normAutofit/>
+          </a:bodyPr>
+          <a:lstStyle/>
+          <a:p>
+            <a:pPr marL="0" indent="0" algn="l">
+              <a:lnSpc>
+                <a:spcPts val="4840"/>
+              </a:lnSpc>
+              <a:buNone/>
+            </a:pPr>
+            <a:r>
+              <a:rPr lang="en-US" sz="4400" b="1" i="0" dirty="0">
+                <a:solidFill>
+                  <a:srgbClr val="14181F"/>
+                </a:solidFill>
+                <a:latin typeface="Helvetica" pitchFamily="34" charset="0"/>
+                <a:ea typeface="Helvetica" pitchFamily="34" charset="-122"/>
+                <a:cs typeface="Helvetica" pitchFamily="34" charset="-120"/>
+              </a:rPr>
+              <a:t>Built for speed</a:t>
+            </a:r>
+            <a:endParaRPr lang="en-US" sz="4400" dirty="0"/>
+          </a:p>
+        </p:txBody>
+      </p:sp>
+      <p:sp>
+        <p:nvSpPr>
+          <p:cNvPr id="4" name="Text 2"/>
+          <p:cNvSpPr/>
+          <p:nvPr/>
+        </p:nvSpPr>
+        <p:spPr>
+          <a:xfrm>
+            <a:off x="812800" y="2266605"/>
+            <a:ext cx="9156700" cy="711200"/>
+          </a:xfrm>
+          <a:prstGeom prst="rect">
+            <a:avLst/>
+          </a:prstGeom>
+          <a:noFill/>
+          <a:ln/>
+        </p:spPr>
+        <p:txBody>
+          <a:bodyPr wrap="square" lIns="0" tIns="0" rIns="0" bIns="0" rtlCol="0" anchor="t">
+            <a:normAutofit/>
+          </a:bodyPr>
+          <a:lstStyle/>
+          <a:p>
+            <a:pPr marL="0" marR="0" lvl="0" indent="0" algn="l" defTabSz="914400" rtl="0" eaLnBrk="1" fontAlgn="auto" latinLnBrk="0" hangingPunct="1">
+              <a:lnSpc>
+                <a:spcPts val="2700"/>
+              </a:lnSpc>
+              <a:spcBef>
+                <a:spcPts val="0"/>
+              </a:spcBef>
+              <a:spcAft>
+                <a:spcPts val="0"/>
+              </a:spcAft>
+              <a:buClrTx/>
+              <a:buSzTx/>
+              <a:buFontTx/>
+              <a:buNone/>
+              <a:tabLst/>
+              <a:defRPr/>
+            </a:pPr>
+            <a:r>
+              <a:rPr kumimoji="0" lang="en-US" sz="2000" b="0" i="0" u="none" strike="noStrike" kern="1200" cap="none" spc="0" normalizeH="0" baseline="0" noProof="0" dirty="0">
+                <a:ln>
+                  <a:noFill/>
+                </a:ln>
+                <a:solidFill>
+                  <a:srgbClr val="14181F"/>
+                </a:solidFill>
+                <a:effectLst/>
+                <a:uLnTx/>
+                <a:uFillTx/>
+                <a:latin typeface="Helvetica" pitchFamily="34" charset="0"/>
+                <a:ea typeface="Helvetica" pitchFamily="34" charset="-122"/>
+                <a:cs typeface="Helvetica" pitchFamily="34" charset="-120"/>
+              </a:rPr>
+              <a:t>Copilot CLI is the quickstart's walkthrough tool, and inline completion speeds up hand edits to the app in your IDE.</a:t>
+            </a:r>
+            <a:endParaRPr kumimoji="0" lang="en-US" sz="2000" b="0" i="0" u="none" strike="noStrike" kern="1200" cap="none" spc="0" normalizeH="0" baseline="0" noProof="0" dirty="0">
+              <a:ln>
+                <a:noFill/>
+              </a:ln>
+              <a:solidFill>
+                <a:srgbClr val="F6F4EF"/>
+              </a:solidFill>
+              <a:effectLst/>
+              <a:uLnTx/>
+              <a:uFillTx/>
+              <a:latin typeface="Helvetica"/>
+              <a:ea typeface="+mn-ea"/>
+              <a:cs typeface="+mn-cs"/>
+            </a:endParaRPr>
+          </a:p>
+        </p:txBody>
+      </p:sp>
+      <p:sp>
+        <p:nvSpPr>
+          <p:cNvPr id="5" name="Text 3"/>
+          <p:cNvSpPr/>
+          <p:nvPr/>
+        </p:nvSpPr>
+        <p:spPr>
+          <a:xfrm>
+            <a:off x="812800" y="3206405"/>
+            <a:ext cx="10883392" cy="309860"/>
+          </a:xfrm>
+          <a:prstGeom prst="rect">
+            <a:avLst/>
+          </a:prstGeom>
+          <a:noFill/>
+          <a:ln/>
+        </p:spPr>
+        <p:txBody>
+          <a:bodyPr wrap="square" lIns="0" tIns="0" rIns="0" bIns="0" rtlCol="0" anchor="t">
+            <a:normAutofit/>
+          </a:bodyPr>
+          <a:lstStyle/>
+          <a:p>
+            <a:pPr marL="0" marR="0" lvl="0" indent="0" algn="l" defTabSz="914400" rtl="0" eaLnBrk="1" fontAlgn="auto" latinLnBrk="0" hangingPunct="1">
+              <a:lnSpc>
+                <a:spcPts val="2240"/>
+              </a:lnSpc>
+              <a:spcBef>
+                <a:spcPts val="0"/>
+              </a:spcBef>
+              <a:spcAft>
+                <a:spcPts val="0"/>
+              </a:spcAft>
+              <a:buClrTx/>
+              <a:buSzTx/>
+              <a:buFontTx/>
+              <a:buNone/>
+              <a:tabLst/>
+              <a:defRPr/>
+            </a:pPr>
+            <a:r>
+              <a:rPr kumimoji="0" lang="en-US" sz="1600" b="1" i="0" u="none" strike="noStrike" kern="1200" cap="none" spc="0" normalizeH="0" baseline="0" noProof="0" dirty="0">
+                <a:ln>
+                  <a:noFill/>
+                </a:ln>
+                <a:solidFill>
+                  <a:srgbClr val="2F5FC4"/>
+                </a:solidFill>
+                <a:effectLst/>
+                <a:uLnTx/>
+                <a:uFillTx/>
+                <a:latin typeface="Helvetica" pitchFamily="34" charset="0"/>
+                <a:ea typeface="Helvetica" pitchFamily="34" charset="-122"/>
+                <a:cs typeface="Helvetica" pitchFamily="34" charset="-120"/>
+              </a:rPr>
+              <a:t>Strength: lowest latency while you type</a:t>
+            </a:r>
+            <a:endParaRPr kumimoji="0" lang="en-US" sz="1600" b="0" i="0" u="none" strike="noStrike" kern="1200" cap="none" spc="0" normalizeH="0" baseline="0" noProof="0" dirty="0">
+              <a:ln>
+                <a:noFill/>
+              </a:ln>
+              <a:solidFill>
+                <a:srgbClr val="F6F4EF"/>
+              </a:solidFill>
+              <a:effectLst/>
+              <a:uLnTx/>
+              <a:uFillTx/>
+              <a:latin typeface="Helvetica"/>
+              <a:ea typeface="+mn-ea"/>
+              <a:cs typeface="+mn-cs"/>
+            </a:endParaRPr>
+          </a:p>
+        </p:txBody>
+      </p:sp>
+      <p:sp>
+        <p:nvSpPr>
+          <p:cNvPr id="7" name="TextBox 6">
+            <a:extLst>
+              <a:ext uri="{FF2B5EF4-FFF2-40B4-BE49-F238E27FC236}">
+                <a16:creationId xmlns:a16="http://schemas.microsoft.com/office/drawing/2014/main" id="{6DEB1799-CEAE-6B7F-6569-F6CF35838C5D}"/>
+              </a:ext>
+            </a:extLst>
+          </p:cNvPr>
+          <p:cNvSpPr txBox="1"/>
+          <p:nvPr/>
+        </p:nvSpPr>
+        <p:spPr>
+          <a:xfrm>
+            <a:off x="812800" y="3940357"/>
+            <a:ext cx="10614047" cy="1677895"/>
+          </a:xfrm>
+          <a:prstGeom prst="rect">
+            <a:avLst/>
+          </a:prstGeom>
+          <a:noFill/>
+        </p:spPr>
+        <p:txBody>
+          <a:bodyPr wrap="square">
+            <a:spAutoFit/>
+          </a:bodyPr>
+          <a:lstStyle/>
+          <a:p>
+            <a:pPr rtl="0">
+              <a:buNone/>
+            </a:pPr>
+            <a:r>
+              <a:rPr lang="en-US" sz="1600" b="1" dirty="0">
+                <a:solidFill>
+                  <a:srgbClr val="2F5FC4"/>
+                </a:solidFill>
+                <a:latin typeface="Helvetica" pitchFamily="34" charset="0"/>
+                <a:cs typeface="Helvetica" pitchFamily="34" charset="-120"/>
+              </a:rPr>
+              <a:t>Where it helps most.</a:t>
+            </a:r>
+          </a:p>
+          <a:p>
+            <a:pPr marL="285750" indent="-285750" rtl="0">
+              <a:lnSpc>
+                <a:spcPct val="140000"/>
+              </a:lnSpc>
+              <a:buFont typeface="Wingdings" panose="05000000000000000000" pitchFamily="2" charset="2"/>
+              <a:buChar char="Ø"/>
+            </a:pPr>
+            <a:r>
+              <a:rPr lang="en-US" sz="1600" b="1" dirty="0">
+                <a:solidFill>
+                  <a:schemeClr val="bg1"/>
+                </a:solidFill>
+                <a:latin typeface="Helvetica" panose="020B0604020202020204" pitchFamily="34" charset="0"/>
+                <a:cs typeface="Helvetica" panose="020B0604020202020204" pitchFamily="34" charset="0"/>
+              </a:rPr>
+              <a:t>Getting started fast:</a:t>
+            </a:r>
+            <a:r>
+              <a:rPr lang="en-US" sz="1600" dirty="0">
+                <a:solidFill>
+                  <a:schemeClr val="bg1"/>
+                </a:solidFill>
+                <a:latin typeface="Helvetica" panose="020B0604020202020204" pitchFamily="34" charset="0"/>
+                <a:cs typeface="Helvetica" panose="020B0604020202020204" pitchFamily="34" charset="0"/>
+              </a:rPr>
+              <a:t> the quick start goes from a natural-language prompt to a deployed, shareable app.</a:t>
+            </a:r>
+          </a:p>
+          <a:p>
+            <a:pPr marL="285750" indent="-285750" rtl="0">
+              <a:lnSpc>
+                <a:spcPct val="140000"/>
+              </a:lnSpc>
+              <a:buFont typeface="Wingdings" panose="05000000000000000000" pitchFamily="2" charset="2"/>
+              <a:buChar char="Ø"/>
+            </a:pPr>
+            <a:r>
+              <a:rPr lang="en-US" sz="1600" b="1" dirty="0">
+                <a:solidFill>
+                  <a:schemeClr val="bg1"/>
+                </a:solidFill>
+                <a:latin typeface="Helvetica" panose="020B0604020202020204" pitchFamily="34" charset="0"/>
+                <a:cs typeface="Helvetica" panose="020B0604020202020204" pitchFamily="34" charset="0"/>
+              </a:rPr>
+              <a:t>Everyday edits:</a:t>
+            </a:r>
+            <a:r>
+              <a:rPr lang="en-US" sz="1600" dirty="0">
+                <a:solidFill>
+                  <a:schemeClr val="bg1"/>
+                </a:solidFill>
+                <a:latin typeface="Helvetica" panose="020B0604020202020204" pitchFamily="34" charset="0"/>
+                <a:cs typeface="Helvetica" panose="020B0604020202020204" pitchFamily="34" charset="0"/>
+              </a:rPr>
+              <a:t> small UI tweaks, wiring up a field, writing a handler or filling in boilerplate as you type.</a:t>
+            </a:r>
+          </a:p>
+          <a:p>
+            <a:pPr marL="285750" indent="-285750" rtl="0">
+              <a:lnSpc>
+                <a:spcPct val="140000"/>
+              </a:lnSpc>
+              <a:buFont typeface="Wingdings" panose="05000000000000000000" pitchFamily="2" charset="2"/>
+              <a:buChar char="Ø"/>
+            </a:pPr>
+            <a:r>
+              <a:rPr lang="en-US" sz="1600" b="1" dirty="0">
+                <a:solidFill>
+                  <a:schemeClr val="bg1"/>
+                </a:solidFill>
+                <a:latin typeface="Helvetica" panose="020B0604020202020204" pitchFamily="34" charset="0"/>
+                <a:cs typeface="Helvetica" panose="020B0604020202020204" pitchFamily="34" charset="0"/>
+              </a:rPr>
+              <a:t>Low friction:</a:t>
+            </a:r>
+            <a:r>
+              <a:rPr lang="en-US" sz="1600" dirty="0">
+                <a:solidFill>
+                  <a:schemeClr val="bg1"/>
+                </a:solidFill>
+                <a:latin typeface="Helvetica" panose="020B0604020202020204" pitchFamily="34" charset="0"/>
+                <a:cs typeface="Helvetica" panose="020B0604020202020204" pitchFamily="34" charset="0"/>
+              </a:rPr>
+              <a:t> it works inside tools your team likely already uses, with GitHub Copilot enabled for the account or tenant.</a:t>
+            </a:r>
+          </a:p>
+        </p:txBody>
+      </p:sp>
+    </p:spTree>
+  </p:cSld>
+  <p:clrMapOvr>
+    <a:masterClrMapping/>
+  </p:clrMapOvr>
+</p:sld>
+</file>
+
+<file path=ppt/slides/slide15.xml><?xml version="1.0" encoding="utf-8"?>
+<p:sld xmlns:a="http://schemas.openxmlformats.org/drawingml/2006/main" xmlns:r="http://schemas.openxmlformats.org/officeDocument/2006/relationships" xmlns:p="http://schemas.openxmlformats.org/presentationml/2006/main">
+  <p:cSld>
+    <p:bg>
+      <p:bgPr>
+        <a:solidFill>
+          <a:srgbClr val="14181F"/>
+        </a:solidFill>
+        <a:effectLst/>
+      </p:bgPr>
+    </p:bg>
+    <p:spTree>
+      <p:nvGrpSpPr>
+        <p:cNvPr id="1" name=""/>
+        <p:cNvGrpSpPr/>
+        <p:nvPr/>
+      </p:nvGrpSpPr>
+      <p:grpSpPr>
+        <a:xfrm>
+          <a:off x="0" y="0"/>
+          <a:ext cx="0" cy="0"/>
+          <a:chOff x="0" y="0"/>
+          <a:chExt cx="0" cy="0"/>
+        </a:xfrm>
+      </p:grpSpPr>
+      <p:sp>
+        <p:nvSpPr>
+          <p:cNvPr id="2" name="Text 0"/>
+          <p:cNvSpPr/>
+          <p:nvPr/>
+        </p:nvSpPr>
+        <p:spPr>
+          <a:xfrm>
+            <a:off x="812800" y="352722"/>
+            <a:ext cx="10883392" cy="274290"/>
+          </a:xfrm>
+          <a:prstGeom prst="rect">
+            <a:avLst/>
+          </a:prstGeom>
+          <a:noFill/>
+          <a:ln/>
+        </p:spPr>
+        <p:txBody>
+          <a:bodyPr wrap="square" lIns="0" tIns="0" rIns="0" bIns="0" rtlCol="0" anchor="t">
+            <a:normAutofit/>
+          </a:bodyPr>
+          <a:lstStyle/>
+          <a:p>
+            <a:pPr marL="0" marR="0" lvl="0" indent="0" algn="l" defTabSz="914400" rtl="0" eaLnBrk="1" fontAlgn="auto" latinLnBrk="0" hangingPunct="1">
+              <a:lnSpc>
+                <a:spcPts val="1960"/>
+              </a:lnSpc>
+              <a:spcBef>
+                <a:spcPts val="0"/>
+              </a:spcBef>
+              <a:spcAft>
+                <a:spcPts val="0"/>
+              </a:spcAft>
+              <a:buClrTx/>
+              <a:buSzTx/>
+              <a:buFontTx/>
+              <a:buNone/>
+              <a:tabLst/>
+              <a:defRPr/>
+            </a:pPr>
+            <a:r>
+              <a:rPr kumimoji="0" lang="en-US" sz="1400" b="1" i="0" u="none" strike="noStrike" kern="1200" cap="none" spc="0" normalizeH="0" baseline="0" noProof="0" dirty="0">
+                <a:ln>
+                  <a:noFill/>
+                </a:ln>
+                <a:solidFill>
+                  <a:srgbClr val="E8794F"/>
+                </a:solidFill>
+                <a:effectLst/>
+                <a:uLnTx/>
+                <a:uFillTx/>
+                <a:latin typeface="Helvetica" pitchFamily="34" charset="0"/>
+                <a:ea typeface="Helvetica" pitchFamily="34" charset="-122"/>
+                <a:cs typeface="Helvetica" pitchFamily="34" charset="-120"/>
+              </a:rPr>
+              <a:t>OPENAI CODEX</a:t>
+            </a:r>
+            <a:endParaRPr kumimoji="0" lang="en-US" sz="1400" b="0" i="0" u="none" strike="noStrike" kern="1200" cap="none" spc="0" normalizeH="0" baseline="0" noProof="0" dirty="0">
+              <a:ln>
+                <a:noFill/>
+              </a:ln>
+              <a:solidFill>
+                <a:srgbClr val="F6F4EF"/>
+              </a:solidFill>
+              <a:effectLst/>
+              <a:uLnTx/>
+              <a:uFillTx/>
+              <a:latin typeface="Helvetica"/>
+              <a:ea typeface="+mn-ea"/>
+              <a:cs typeface="+mn-cs"/>
+            </a:endParaRPr>
+          </a:p>
+        </p:txBody>
+      </p:sp>
+      <p:sp>
+        <p:nvSpPr>
+          <p:cNvPr id="3" name="Text 1"/>
+          <p:cNvSpPr>
+            <a:spLocks noGrp="1"/>
+          </p:cNvSpPr>
+          <p:nvPr>
+            <p:ph type="title"/>
+          </p:nvPr>
+        </p:nvSpPr>
+        <p:spPr>
+          <a:xfrm>
+            <a:off x="812800" y="855612"/>
+            <a:ext cx="10883392" cy="640060"/>
+          </a:xfrm>
+          <a:prstGeom prst="rect">
+            <a:avLst/>
+          </a:prstGeom>
+          <a:noFill/>
+          <a:ln/>
+        </p:spPr>
+        <p:txBody>
+          <a:bodyPr wrap="square" lIns="0" tIns="0" rIns="0" bIns="0" rtlCol="0" anchor="t">
+            <a:normAutofit/>
+          </a:bodyPr>
+          <a:lstStyle/>
+          <a:p>
+            <a:pPr marL="0" indent="0" algn="l">
+              <a:lnSpc>
+                <a:spcPts val="4840"/>
+              </a:lnSpc>
+              <a:buNone/>
+            </a:pPr>
+            <a:r>
+              <a:rPr lang="en-US" sz="4400" b="1" i="0" dirty="0">
+                <a:solidFill>
+                  <a:srgbClr val="F6F4EF"/>
+                </a:solidFill>
+                <a:latin typeface="Helvetica" pitchFamily="34" charset="0"/>
+                <a:ea typeface="Helvetica" pitchFamily="34" charset="-122"/>
+                <a:cs typeface="Helvetica" pitchFamily="34" charset="-120"/>
+              </a:rPr>
+              <a:t>Built for autonomy</a:t>
+            </a:r>
+            <a:endParaRPr lang="en-US" sz="4400" dirty="0"/>
+          </a:p>
+        </p:txBody>
+      </p:sp>
+      <p:sp>
+        <p:nvSpPr>
+          <p:cNvPr id="4" name="Text 2"/>
+          <p:cNvSpPr/>
+          <p:nvPr/>
+        </p:nvSpPr>
+        <p:spPr>
+          <a:xfrm>
+            <a:off x="812800" y="1724272"/>
+            <a:ext cx="9156700" cy="711200"/>
+          </a:xfrm>
+          <a:prstGeom prst="rect">
+            <a:avLst/>
+          </a:prstGeom>
+          <a:noFill/>
+          <a:ln/>
+        </p:spPr>
+        <p:txBody>
+          <a:bodyPr wrap="square" lIns="0" tIns="0" rIns="0" bIns="0" rtlCol="0" anchor="t">
+            <a:normAutofit/>
+          </a:bodyPr>
+          <a:lstStyle/>
+          <a:p>
+            <a:pPr marL="0" marR="0" lvl="0" indent="0" algn="l" defTabSz="914400" rtl="0" eaLnBrk="1" fontAlgn="auto" latinLnBrk="0" hangingPunct="1">
+              <a:lnSpc>
+                <a:spcPts val="2700"/>
+              </a:lnSpc>
+              <a:spcBef>
+                <a:spcPts val="0"/>
+              </a:spcBef>
+              <a:spcAft>
+                <a:spcPts val="0"/>
+              </a:spcAft>
+              <a:buClrTx/>
+              <a:buSzTx/>
+              <a:buFontTx/>
+              <a:buNone/>
+              <a:tabLst/>
+              <a:defRPr/>
+            </a:pPr>
+            <a:r>
+              <a:rPr kumimoji="0" lang="en-US" sz="2000" b="0" i="0" u="none" strike="noStrike" kern="1200" cap="none" spc="0" normalizeH="0" baseline="0" noProof="0" dirty="0">
+                <a:ln>
+                  <a:noFill/>
+                </a:ln>
+                <a:solidFill>
+                  <a:srgbClr val="F6F4EF"/>
+                </a:solidFill>
+                <a:effectLst/>
+                <a:uLnTx/>
+                <a:uFillTx/>
+                <a:latin typeface="Helvetica" pitchFamily="34" charset="0"/>
+                <a:ea typeface="Helvetica" pitchFamily="34" charset="-122"/>
+                <a:cs typeface="Helvetica" pitchFamily="34" charset="-120"/>
+              </a:rPr>
+              <a:t>Delegate features in the app's repository and review the result as a pull request. Check that your agent supports the plugin through Open Plugins.</a:t>
+            </a:r>
+            <a:endParaRPr kumimoji="0" lang="en-US" sz="2000" b="0" i="0" u="none" strike="noStrike" kern="1200" cap="none" spc="0" normalizeH="0" baseline="0" noProof="0" dirty="0">
+              <a:ln>
+                <a:noFill/>
+              </a:ln>
+              <a:solidFill>
+                <a:srgbClr val="F6F4EF"/>
+              </a:solidFill>
+              <a:effectLst/>
+              <a:uLnTx/>
+              <a:uFillTx/>
+              <a:latin typeface="Helvetica"/>
+              <a:ea typeface="+mn-ea"/>
+              <a:cs typeface="+mn-cs"/>
+            </a:endParaRPr>
+          </a:p>
+        </p:txBody>
+      </p:sp>
+      <p:sp>
+        <p:nvSpPr>
+          <p:cNvPr id="5" name="Text 3"/>
+          <p:cNvSpPr/>
+          <p:nvPr/>
+        </p:nvSpPr>
+        <p:spPr>
+          <a:xfrm>
+            <a:off x="812800" y="2594706"/>
+            <a:ext cx="10883392" cy="309860"/>
+          </a:xfrm>
+          <a:prstGeom prst="rect">
+            <a:avLst/>
+          </a:prstGeom>
+          <a:noFill/>
+          <a:ln/>
+        </p:spPr>
+        <p:txBody>
+          <a:bodyPr wrap="square" lIns="0" tIns="0" rIns="0" bIns="0" rtlCol="0" anchor="t">
+            <a:normAutofit/>
+          </a:bodyPr>
+          <a:lstStyle/>
+          <a:p>
+            <a:pPr marL="0" marR="0" lvl="0" indent="0" algn="l" defTabSz="914400" rtl="0" eaLnBrk="1" fontAlgn="auto" latinLnBrk="0" hangingPunct="1">
+              <a:lnSpc>
+                <a:spcPts val="2240"/>
+              </a:lnSpc>
+              <a:spcBef>
+                <a:spcPts val="0"/>
+              </a:spcBef>
+              <a:spcAft>
+                <a:spcPts val="0"/>
+              </a:spcAft>
+              <a:buClrTx/>
+              <a:buSzTx/>
+              <a:buFontTx/>
+              <a:buNone/>
+              <a:tabLst/>
+              <a:defRPr/>
+            </a:pPr>
+            <a:r>
+              <a:rPr kumimoji="0" lang="en-US" sz="1600" b="1" i="0" u="none" strike="noStrike" kern="1200" cap="none" spc="0" normalizeH="0" baseline="0" noProof="0" dirty="0">
+                <a:ln>
+                  <a:noFill/>
+                </a:ln>
+                <a:solidFill>
+                  <a:srgbClr val="E8794F"/>
+                </a:solidFill>
+                <a:effectLst/>
+                <a:uLnTx/>
+                <a:uFillTx/>
+                <a:latin typeface="Helvetica" pitchFamily="34" charset="0"/>
+                <a:ea typeface="Helvetica" pitchFamily="34" charset="-122"/>
+                <a:cs typeface="Helvetica" pitchFamily="34" charset="-120"/>
+              </a:rPr>
+              <a:t>Strength: asynchronous agentic tasks and PR automation</a:t>
+            </a:r>
+            <a:endParaRPr kumimoji="0" lang="en-US" sz="1600" b="0" i="0" u="none" strike="noStrike" kern="1200" cap="none" spc="0" normalizeH="0" baseline="0" noProof="0" dirty="0">
+              <a:ln>
+                <a:noFill/>
+              </a:ln>
+              <a:solidFill>
+                <a:srgbClr val="F6F4EF"/>
+              </a:solidFill>
+              <a:effectLst/>
+              <a:uLnTx/>
+              <a:uFillTx/>
+              <a:latin typeface="Helvetica"/>
+              <a:ea typeface="+mn-ea"/>
+              <a:cs typeface="+mn-cs"/>
+            </a:endParaRPr>
+          </a:p>
+        </p:txBody>
+      </p:sp>
+      <p:sp>
+        <p:nvSpPr>
+          <p:cNvPr id="7" name="TextBox 6">
+            <a:extLst>
+              <a:ext uri="{FF2B5EF4-FFF2-40B4-BE49-F238E27FC236}">
+                <a16:creationId xmlns:a16="http://schemas.microsoft.com/office/drawing/2014/main" id="{9FFD1023-9CFA-120F-9741-E9D2B17A7224}"/>
+              </a:ext>
+            </a:extLst>
+          </p:cNvPr>
+          <p:cNvSpPr txBox="1"/>
+          <p:nvPr/>
+        </p:nvSpPr>
+        <p:spPr>
+          <a:xfrm>
+            <a:off x="764628" y="2935315"/>
+            <a:ext cx="10586544" cy="1524007"/>
+          </a:xfrm>
+          <a:prstGeom prst="rect">
+            <a:avLst/>
+          </a:prstGeom>
+          <a:noFill/>
+        </p:spPr>
+        <p:txBody>
+          <a:bodyPr wrap="square">
+            <a:spAutoFit/>
+          </a:bodyPr>
+          <a:lstStyle/>
+          <a:p>
+            <a:pPr rtl="0">
+              <a:lnSpc>
+                <a:spcPct val="150000"/>
+              </a:lnSpc>
+              <a:buNone/>
+            </a:pPr>
+            <a:r>
+              <a:rPr lang="en-US" sz="1600" b="1" dirty="0">
+                <a:solidFill>
+                  <a:srgbClr val="E8794F"/>
+                </a:solidFill>
+                <a:latin typeface="Helvetica" pitchFamily="34" charset="0"/>
+                <a:cs typeface="Helvetica" pitchFamily="34" charset="-120"/>
+              </a:rPr>
+              <a:t>Where it would help most</a:t>
+            </a:r>
+            <a:r>
+              <a:rPr lang="en-US" sz="1600" b="1" dirty="0">
+                <a:latin typeface="Helvetica" panose="020B0604020202020204" pitchFamily="34" charset="0"/>
+                <a:cs typeface="Helvetica" panose="020B0604020202020204" pitchFamily="34" charset="0"/>
+              </a:rPr>
+              <a:t>.</a:t>
+            </a:r>
+            <a:endParaRPr lang="en-US" sz="1600" dirty="0">
+              <a:latin typeface="Helvetica" panose="020B0604020202020204" pitchFamily="34" charset="0"/>
+              <a:cs typeface="Helvetica" panose="020B0604020202020204" pitchFamily="34" charset="0"/>
+            </a:endParaRPr>
+          </a:p>
+          <a:p>
+            <a:pPr marL="285750" indent="-285750" rtl="0">
+              <a:lnSpc>
+                <a:spcPct val="150000"/>
+              </a:lnSpc>
+              <a:buFont typeface="Wingdings" panose="05000000000000000000" pitchFamily="2" charset="2"/>
+              <a:buChar char="Ø"/>
+            </a:pPr>
+            <a:r>
+              <a:rPr lang="en-US" sz="1600" b="1" dirty="0">
+                <a:latin typeface="Helvetica" panose="020B0604020202020204" pitchFamily="34" charset="0"/>
+                <a:cs typeface="Helvetica" panose="020B0604020202020204" pitchFamily="34" charset="0"/>
+              </a:rPr>
+              <a:t>Background feature work:</a:t>
+            </a:r>
+            <a:r>
+              <a:rPr lang="en-US" sz="1600" dirty="0">
+                <a:latin typeface="Helvetica" panose="020B0604020202020204" pitchFamily="34" charset="0"/>
+                <a:cs typeface="Helvetica" panose="020B0604020202020204" pitchFamily="34" charset="0"/>
+              </a:rPr>
+              <a:t> hand off a defined task in the app’s repository and review the result later.</a:t>
+            </a:r>
+          </a:p>
+          <a:p>
+            <a:pPr marL="285750" indent="-285750" rtl="0">
+              <a:lnSpc>
+                <a:spcPct val="150000"/>
+              </a:lnSpc>
+              <a:buFont typeface="Wingdings" panose="05000000000000000000" pitchFamily="2" charset="2"/>
+              <a:buChar char="Ø"/>
+            </a:pPr>
+            <a:r>
+              <a:rPr lang="en-US" sz="1600" b="1" dirty="0">
+                <a:latin typeface="Helvetica" panose="020B0604020202020204" pitchFamily="34" charset="0"/>
+                <a:cs typeface="Helvetica" panose="020B0604020202020204" pitchFamily="34" charset="0"/>
+              </a:rPr>
+              <a:t>Pull request automation:</a:t>
+            </a:r>
+            <a:r>
+              <a:rPr lang="en-US" sz="1600" dirty="0">
+                <a:latin typeface="Helvetica" panose="020B0604020202020204" pitchFamily="34" charset="0"/>
+                <a:cs typeface="Helvetica" panose="020B0604020202020204" pitchFamily="34" charset="0"/>
+              </a:rPr>
+              <a:t> generated changes arrive as PRs your team can review and merge.</a:t>
+            </a:r>
+          </a:p>
+          <a:p>
+            <a:pPr marL="285750" indent="-285750" rtl="0">
+              <a:lnSpc>
+                <a:spcPct val="150000"/>
+              </a:lnSpc>
+              <a:buFont typeface="Wingdings" panose="05000000000000000000" pitchFamily="2" charset="2"/>
+              <a:buChar char="Ø"/>
+            </a:pPr>
+            <a:r>
+              <a:rPr lang="en-US" sz="1600" b="1" dirty="0">
+                <a:latin typeface="Helvetica" panose="020B0604020202020204" pitchFamily="34" charset="0"/>
+                <a:cs typeface="Helvetica" panose="020B0604020202020204" pitchFamily="34" charset="0"/>
+              </a:rPr>
+              <a:t>OpenAI-centered teams:</a:t>
+            </a:r>
+            <a:r>
+              <a:rPr lang="en-US" sz="1600" dirty="0">
+                <a:latin typeface="Helvetica" panose="020B0604020202020204" pitchFamily="34" charset="0"/>
+                <a:cs typeface="Helvetica" panose="020B0604020202020204" pitchFamily="34" charset="0"/>
+              </a:rPr>
+              <a:t> it fits shops that already use ChatGPT and OpenAI’s agent tooling.</a:t>
+            </a:r>
+          </a:p>
+        </p:txBody>
+      </p:sp>
+      <p:sp>
+        <p:nvSpPr>
+          <p:cNvPr id="9" name="TextBox 8">
+            <a:extLst>
+              <a:ext uri="{FF2B5EF4-FFF2-40B4-BE49-F238E27FC236}">
+                <a16:creationId xmlns:a16="http://schemas.microsoft.com/office/drawing/2014/main" id="{93AFADCF-D554-668A-693C-706505EB2984}"/>
+              </a:ext>
+            </a:extLst>
+          </p:cNvPr>
+          <p:cNvSpPr txBox="1"/>
+          <p:nvPr/>
+        </p:nvSpPr>
+        <p:spPr>
+          <a:xfrm>
+            <a:off x="764628" y="4711717"/>
+            <a:ext cx="11313335" cy="1801006"/>
+          </a:xfrm>
+          <a:prstGeom prst="rect">
+            <a:avLst/>
+          </a:prstGeom>
+          <a:noFill/>
+        </p:spPr>
+        <p:txBody>
+          <a:bodyPr wrap="square">
+            <a:spAutoFit/>
+          </a:bodyPr>
+          <a:lstStyle/>
+          <a:p>
+            <a:pPr rtl="0">
+              <a:buNone/>
+            </a:pPr>
+            <a:r>
+              <a:rPr lang="en-US" sz="1600" b="1" dirty="0">
+                <a:solidFill>
+                  <a:srgbClr val="E8794F"/>
+                </a:solidFill>
+                <a:latin typeface="Helvetica" pitchFamily="34" charset="0"/>
+                <a:cs typeface="Helvetica" pitchFamily="34" charset="-120"/>
+              </a:rPr>
+              <a:t>Limits to keep in mind</a:t>
+            </a:r>
+            <a:r>
+              <a:rPr lang="en-US" b="1" dirty="0"/>
+              <a:t>.</a:t>
+            </a:r>
+            <a:endParaRPr lang="en-US" dirty="0"/>
+          </a:p>
+          <a:p>
+            <a:pPr marL="285750" indent="-285750">
+              <a:lnSpc>
+                <a:spcPct val="150000"/>
+              </a:lnSpc>
+              <a:buFont typeface="Wingdings" panose="05000000000000000000" pitchFamily="2" charset="2"/>
+              <a:buChar char="Ø"/>
+            </a:pPr>
+            <a:r>
+              <a:rPr lang="en-US" sz="1600" b="1" dirty="0">
+                <a:latin typeface="Helvetica" panose="020B0604020202020204" pitchFamily="34" charset="0"/>
+                <a:cs typeface="Helvetica" panose="020B0604020202020204" pitchFamily="34" charset="0"/>
+              </a:rPr>
+              <a:t>Official support: the Microsoft quick start is built for Copilot CLI, so expect more manual setup with Codex.</a:t>
+            </a:r>
+          </a:p>
+          <a:p>
+            <a:pPr marL="285750" indent="-285750">
+              <a:lnSpc>
+                <a:spcPct val="150000"/>
+              </a:lnSpc>
+              <a:buFont typeface="Wingdings" panose="05000000000000000000" pitchFamily="2" charset="2"/>
+              <a:buChar char="Ø"/>
+            </a:pPr>
+            <a:r>
+              <a:rPr lang="en-US" sz="1600" b="1" dirty="0">
+                <a:latin typeface="Helvetica" panose="020B0604020202020204" pitchFamily="34" charset="0"/>
+                <a:cs typeface="Helvetica" panose="020B0604020202020204" pitchFamily="34" charset="0"/>
+              </a:rPr>
+              <a:t>Deployment safety: a community developer notes that fast agents using the PAC CLI take the most direct path, and Power Platform changes are hard to undo. Review before pushing to any environment.</a:t>
+            </a:r>
+          </a:p>
+          <a:p>
+            <a:pPr marL="285750" indent="-285750">
+              <a:lnSpc>
+                <a:spcPct val="150000"/>
+              </a:lnSpc>
+              <a:buFont typeface="Wingdings" panose="05000000000000000000" pitchFamily="2" charset="2"/>
+              <a:buChar char="Ø"/>
+            </a:pPr>
+            <a:r>
+              <a:rPr lang="en-US" sz="1600" b="1" dirty="0">
+                <a:latin typeface="Helvetica" panose="020B0604020202020204" pitchFamily="34" charset="0"/>
+                <a:cs typeface="Helvetica" panose="020B0604020202020204" pitchFamily="34" charset="0"/>
+              </a:rPr>
+              <a:t>Preview status: code apps are in preview, so commands may change.</a:t>
+            </a:r>
+          </a:p>
+        </p:txBody>
+      </p:sp>
+    </p:spTree>
+  </p:cSld>
+  <p:clrMapOvr>
+    <a:masterClrMapping/>
+  </p:clrMapOvr>
+</p:sld>
+</file>
+
+<file path=ppt/slides/slide16.xml><?xml version="1.0" encoding="utf-8"?>
 <p:sld xmlns:a="http://schemas.openxmlformats.org/drawingml/2006/main" xmlns:r="http://schemas.openxmlformats.org/officeDocument/2006/relationships" xmlns:p="http://schemas.openxmlformats.org/presentationml/2006/main">
   <p:cSld>
     <p:spTree>
@@ -18116,6 +21450,296 @@
 </file>
 
 <file path=ppt/theme/theme5.xml><?xml version="1.0" encoding="utf-8"?>
+<a:theme xmlns:a="http://schemas.openxmlformats.org/drawingml/2006/main" name="AI coding tools for Power Apps code apps">
+  <a:themeElements>
+    <a:clrScheme name="AI coding tools for Power Apps code apps">
+      <a:dk1>
+        <a:srgbClr val="14181F"/>
+      </a:dk1>
+      <a:lt1>
+        <a:srgbClr val="F6F4EF"/>
+      </a:lt1>
+      <a:dk2>
+        <a:srgbClr val="2B2E34"/>
+      </a:dk2>
+      <a:lt2>
+        <a:srgbClr val="BEBDBB"/>
+      </a:lt2>
+      <a:accent1>
+        <a:srgbClr val="E8794F"/>
+      </a:accent1>
+      <a:accent2>
+        <a:srgbClr val="2F5FC4"/>
+      </a:accent2>
+      <a:accent3>
+        <a:srgbClr val="B8BEC8"/>
+      </a:accent3>
+      <a:accent4>
+        <a:srgbClr val="6A7179"/>
+      </a:accent4>
+      <a:accent5>
+        <a:srgbClr val="9AA0A6"/>
+      </a:accent5>
+      <a:accent6>
+        <a:srgbClr val="9C9C9C"/>
+      </a:accent6>
+      <a:hlink>
+        <a:srgbClr val="0563C1"/>
+      </a:hlink>
+      <a:folHlink>
+        <a:srgbClr val="954F72"/>
+      </a:folHlink>
+    </a:clrScheme>
+    <a:fontScheme name="AI coding tools for Power Apps code apps">
+      <a:majorFont>
+        <a:latin typeface="Helvetica"/>
+        <a:ea typeface=""/>
+        <a:cs typeface=""/>
+        <a:font script="Jpan" typeface="游ゴシック Light"/>
+        <a:font script="Hang" typeface="맑은 고딕"/>
+        <a:font script="Hans" typeface="等线 Light"/>
+        <a:font script="Hant" typeface="新細明體"/>
+        <a:font script="Arab" typeface="Times New Roman"/>
+        <a:font script="Hebr" typeface="Times New Roman"/>
+        <a:font script="Thai" typeface="Angsana New"/>
+        <a:font script="Ethi" typeface="Nyala"/>
+        <a:font script="Beng" typeface="Vrinda"/>
+        <a:font script="Gujr" typeface="Shruti"/>
+        <a:font script="Khmr" typeface="MoolBoran"/>
+        <a:font script="Knda" typeface="Tunga"/>
+        <a:font script="Guru" typeface="Raavi"/>
+        <a:font script="Cans" typeface="Euphemia"/>
+        <a:font script="Cher" typeface="Plantagenet Cherokee"/>
+        <a:font script="Yiii" typeface="Microsoft Yi Baiti"/>
+        <a:font script="Tibt" typeface="Microsoft Himalaya"/>
+        <a:font script="Thaa" typeface="MV Boli"/>
+        <a:font script="Deva" typeface="Mangal"/>
+        <a:font script="Telu" typeface="Gautami"/>
+        <a:font script="Taml" typeface="Latha"/>
+        <a:font script="Syrc" typeface="Estrangelo Edessa"/>
+        <a:font script="Orya" typeface="Kalinga"/>
+        <a:font script="Mlym" typeface="Kartika"/>
+        <a:font script="Laoo" typeface="DokChampa"/>
+        <a:font script="Sinh" typeface="Iskoola Pota"/>
+        <a:font script="Mong" typeface="Mongolian Baiti"/>
+        <a:font script="Viet" typeface="Times New Roman"/>
+        <a:font script="Uigh" typeface="Microsoft Uighur"/>
+        <a:font script="Geor" typeface="Sylfaen"/>
+        <a:font script="Armn" typeface="Arial"/>
+        <a:font script="Bugi" typeface="Leelawadee UI"/>
+        <a:font script="Bopo" typeface="Microsoft JhengHei"/>
+        <a:font script="Java" typeface="Javanese Text"/>
+        <a:font script="Lisu" typeface="Segoe UI"/>
+        <a:font script="Mymr" typeface="Myanmar Text"/>
+        <a:font script="Nkoo" typeface="Ebrima"/>
+        <a:font script="Olck" typeface="Nirmala UI"/>
+        <a:font script="Osma" typeface="Ebrima"/>
+        <a:font script="Phag" typeface="Phagspa"/>
+        <a:font script="Syrn" typeface="Estrangelo Edessa"/>
+        <a:font script="Syrj" typeface="Estrangelo Edessa"/>
+        <a:font script="Syre" typeface="Estrangelo Edessa"/>
+        <a:font script="Sora" typeface="Nirmala UI"/>
+        <a:font script="Tale" typeface="Microsoft Tai Le"/>
+        <a:font script="Talu" typeface="Microsoft New Tai Lue"/>
+        <a:font script="Tfng" typeface="Ebrima"/>
+      </a:majorFont>
+      <a:minorFont>
+        <a:latin typeface="Helvetica"/>
+        <a:ea typeface=""/>
+        <a:cs typeface=""/>
+        <a:font script="Jpan" typeface="游ゴシック"/>
+        <a:font script="Hang" typeface="맑은 고딕"/>
+        <a:font script="Hans" typeface="等线"/>
+        <a:font script="Hant" typeface="新細明體"/>
+        <a:font script="Arab" typeface="Arial"/>
+        <a:font script="Hebr" typeface="Arial"/>
+        <a:font script="Thai" typeface="Cordia New"/>
+        <a:font script="Ethi" typeface="Nyala"/>
+        <a:font script="Beng" typeface="Vrinda"/>
+        <a:font script="Gujr" typeface="Shruti"/>
+        <a:font script="Khmr" typeface="DaunPenh"/>
+        <a:font script="Knda" typeface="Tunga"/>
+        <a:font script="Guru" typeface="Raavi"/>
+        <a:font script="Cans" typeface="Euphemia"/>
+        <a:font script="Cher" typeface="Plantagenet Cherokee"/>
+        <a:font script="Yiii" typeface="Microsoft Yi Baiti"/>
+        <a:font script="Tibt" typeface="Microsoft Himalaya"/>
+        <a:font script="Thaa" typeface="MV Boli"/>
+        <a:font script="Deva" typeface="Mangal"/>
+        <a:font script="Telu" typeface="Gautami"/>
+        <a:font script="Taml" typeface="Latha"/>
+        <a:font script="Syrc" typeface="Estrangelo Edessa"/>
+        <a:font script="Orya" typeface="Kalinga"/>
+        <a:font script="Mlym" typeface="Kartika"/>
+        <a:font script="Laoo" typeface="DokChampa"/>
+        <a:font script="Sinh" typeface="Iskoola Pota"/>
+        <a:font script="Mong" typeface="Mongolian Baiti"/>
+        <a:font script="Viet" typeface="Arial"/>
+        <a:font script="Uigh" typeface="Microsoft Uighur"/>
+        <a:font script="Geor" typeface="Sylfaen"/>
+        <a:font script="Armn" typeface="Arial"/>
+        <a:font script="Bugi" typeface="Leelawadee UI"/>
+        <a:font script="Bopo" typeface="Microsoft JhengHei"/>
+        <a:font script="Java" typeface="Javanese Text"/>
+        <a:font script="Lisu" typeface="Segoe UI"/>
+        <a:font script="Mymr" typeface="Myanmar Text"/>
+        <a:font script="Nkoo" typeface="Ebrima"/>
+        <a:font script="Olck" typeface="Nirmala UI"/>
+        <a:font script="Osma" typeface="Ebrima"/>
+        <a:font script="Phag" typeface="Phagspa"/>
+        <a:font script="Syrn" typeface="Estrangelo Edessa"/>
+        <a:font script="Syrj" typeface="Estrangelo Edessa"/>
+        <a:font script="Syre" typeface="Estrangelo Edessa"/>
+        <a:font script="Sora" typeface="Nirmala UI"/>
+        <a:font script="Tale" typeface="Microsoft Tai Le"/>
+        <a:font script="Talu" typeface="Microsoft New Tai Lue"/>
+        <a:font script="Tfng" typeface="Ebrima"/>
+      </a:minorFont>
+    </a:fontScheme>
+    <a:fmtScheme name="Office">
+      <a:fillStyleLst>
+        <a:solidFill>
+          <a:schemeClr val="phClr"/>
+        </a:solidFill>
+        <a:gradFill rotWithShape="1">
+          <a:gsLst>
+            <a:gs pos="0">
+              <a:schemeClr val="phClr">
+                <a:lumMod val="110000"/>
+                <a:satMod val="105000"/>
+                <a:tint val="67000"/>
+              </a:schemeClr>
+            </a:gs>
+            <a:gs pos="50000">
+              <a:schemeClr val="phClr">
+                <a:lumMod val="105000"/>
+                <a:satMod val="103000"/>
+                <a:tint val="73000"/>
+              </a:schemeClr>
+            </a:gs>
+            <a:gs pos="100000">
+              <a:schemeClr val="phClr">
+                <a:lumMod val="105000"/>
+                <a:satMod val="109000"/>
+                <a:tint val="81000"/>
+              </a:schemeClr>
+            </a:gs>
+          </a:gsLst>
+          <a:lin ang="5400000" scaled="0"/>
+        </a:gradFill>
+        <a:gradFill rotWithShape="1">
+          <a:gsLst>
+            <a:gs pos="0">
+              <a:schemeClr val="phClr">
+                <a:satMod val="103000"/>
+                <a:lumMod val="102000"/>
+                <a:tint val="94000"/>
+              </a:schemeClr>
+            </a:gs>
+            <a:gs pos="50000">
+              <a:schemeClr val="phClr">
+                <a:satMod val="110000"/>
+                <a:lumMod val="100000"/>
+                <a:shade val="100000"/>
+              </a:schemeClr>
+            </a:gs>
+            <a:gs pos="100000">
+              <a:schemeClr val="phClr">
+                <a:lumMod val="99000"/>
+                <a:satMod val="120000"/>
+                <a:shade val="78000"/>
+              </a:schemeClr>
+            </a:gs>
+          </a:gsLst>
+          <a:lin ang="5400000" scaled="0"/>
+        </a:gradFill>
+      </a:fillStyleLst>
+      <a:lnStyleLst>
+        <a:ln w="6350" cap="flat" cmpd="sng" algn="ctr">
+          <a:solidFill>
+            <a:schemeClr val="phClr"/>
+          </a:solidFill>
+          <a:prstDash val="solid"/>
+          <a:miter lim="800000"/>
+        </a:ln>
+        <a:ln w="12700" cap="flat" cmpd="sng" algn="ctr">
+          <a:solidFill>
+            <a:schemeClr val="phClr"/>
+          </a:solidFill>
+          <a:prstDash val="solid"/>
+          <a:miter lim="800000"/>
+        </a:ln>
+        <a:ln w="19050" cap="flat" cmpd="sng" algn="ctr">
+          <a:solidFill>
+            <a:schemeClr val="phClr"/>
+          </a:solidFill>
+          <a:prstDash val="solid"/>
+          <a:miter lim="800000"/>
+        </a:ln>
+      </a:lnStyleLst>
+      <a:effectStyleLst>
+        <a:effectStyle>
+          <a:effectLst/>
+        </a:effectStyle>
+        <a:effectStyle>
+          <a:effectLst/>
+        </a:effectStyle>
+        <a:effectStyle>
+          <a:effectLst>
+            <a:outerShdw blurRad="57150" dist="19050" dir="5400000" algn="ctr" rotWithShape="0">
+              <a:srgbClr val="000000">
+                <a:alpha val="63000"/>
+              </a:srgbClr>
+            </a:outerShdw>
+          </a:effectLst>
+        </a:effectStyle>
+      </a:effectStyleLst>
+      <a:bgFillStyleLst>
+        <a:solidFill>
+          <a:schemeClr val="phClr"/>
+        </a:solidFill>
+        <a:solidFill>
+          <a:schemeClr val="phClr">
+            <a:tint val="95000"/>
+            <a:satMod val="170000"/>
+          </a:schemeClr>
+        </a:solidFill>
+        <a:gradFill rotWithShape="1">
+          <a:gsLst>
+            <a:gs pos="0">
+              <a:schemeClr val="phClr">
+                <a:tint val="93000"/>
+                <a:satMod val="150000"/>
+                <a:shade val="98000"/>
+                <a:lumMod val="102000"/>
+              </a:schemeClr>
+            </a:gs>
+            <a:gs pos="50000">
+              <a:schemeClr val="phClr">
+                <a:tint val="98000"/>
+                <a:satMod val="130000"/>
+                <a:shade val="90000"/>
+                <a:lumMod val="103000"/>
+              </a:schemeClr>
+            </a:gs>
+            <a:gs pos="100000">
+              <a:schemeClr val="phClr">
+                <a:shade val="63000"/>
+                <a:satMod val="120000"/>
+              </a:schemeClr>
+            </a:gs>
+          </a:gsLst>
+          <a:lin ang="5400000" scaled="0"/>
+        </a:gradFill>
+      </a:bgFillStyleLst>
+    </a:fmtScheme>
+  </a:themeElements>
+  <a:objectDefaults/>
+  <a:extraClrSchemeLst/>
+</a:theme>
+</file>
+
+<file path=ppt/theme/theme6.xml><?xml version="1.0" encoding="utf-8"?>
 <a:theme xmlns:a="http://schemas.openxmlformats.org/drawingml/2006/main" name="Office Theme">
   <a:themeElements>
     <a:clrScheme name="Office">
